--- a/clientes/flavia-muccelin/Revelacao-de-Essencia-Flavia-Pereira-Muccelin.pptx
+++ b/clientes/flavia-muccelin/Revelacao-de-Essencia-Flavia-Pereira-Muccelin.pptx
@@ -3132,7 +3132,7 @@
     <p:bg>
       <p:bgPr>
         <a:solidFill>
-          <a:srgbClr val="F7F5F0"/>
+          <a:srgbClr val="F8F7F2"/>
         </a:solidFill>
         <a:effectLst/>
       </p:bgPr>
@@ -3153,7 +3153,9 @@
           <p:nvPr/>
         </p:nvPicPr>
         <p:blipFill>
-          <a:blip r:embed="rId2"/>
+          <a:blip r:embed="rId2">
+            <a:alphaModFix amt="32000"/>
+          </a:blip>
           <a:stretch>
             <a:fillRect/>
           </a:stretch>
@@ -3274,7 +3276,7 @@
     <p:bg>
       <p:bgPr>
         <a:solidFill>
-          <a:srgbClr val="F7F5F0"/>
+          <a:srgbClr val="F8F7F2"/>
         </a:solidFill>
         <a:effectLst/>
       </p:bgPr>
@@ -3295,7 +3297,9 @@
           <p:nvPr/>
         </p:nvPicPr>
         <p:blipFill>
-          <a:blip r:embed="rId2"/>
+          <a:blip r:embed="rId2">
+            <a:alphaModFix amt="32000"/>
+          </a:blip>
           <a:stretch>
             <a:fillRect/>
           </a:stretch>
@@ -3350,7 +3354,7 @@
             <a:avLst/>
           </a:prstGeom>
           <a:solidFill>
-            <a:srgbClr val="F7F5F0"/>
+            <a:srgbClr val="F8F7F2"/>
           </a:solidFill>
           <a:ln>
             <a:noFill/>
@@ -3518,7 +3522,7 @@
             </a:avLst>
           </a:prstGeom>
           <a:solidFill>
-            <a:srgbClr val="F7F5F0"/>
+            <a:srgbClr val="F8F7F2"/>
           </a:solidFill>
           <a:ln>
             <a:noFill/>
@@ -3575,7 +3579,7 @@
               </a:lnSpc>
             </a:pPr>
             <a:r>
-              <a:rPr sz="1200" i="0" b="0" spc="220">
+              <a:rPr sz="1500" i="0" b="0" spc="220">
                 <a:solidFill>
                   <a:srgbClr val="1C1C1A"/>
                 </a:solidFill>
@@ -3584,7 +3588,7 @@
               <a:t>REVELAÇÃO DE ESSÊNCIA</a:t>
             </a:r>
             <a:r>
-              <a:rPr sz="1200" i="0" b="0" spc="220">
+              <a:rPr sz="1500" i="0" b="0" spc="220">
                 <a:solidFill>
                   <a:srgbClr val="A5A49F"/>
                 </a:solidFill>
@@ -3593,7 +3597,7 @@
               <a:t>   |   </a:t>
             </a:r>
             <a:r>
-              <a:rPr sz="1200" i="0" b="0" spc="220">
+              <a:rPr sz="1500" i="0" b="0" spc="220">
                 <a:solidFill>
                   <a:srgbClr val="1C1C1A"/>
                 </a:solidFill>
@@ -4096,7 +4100,7 @@
     <p:bg>
       <p:bgPr>
         <a:solidFill>
-          <a:srgbClr val="F7F5F0"/>
+          <a:srgbClr val="F8F7F2"/>
         </a:solidFill>
         <a:effectLst/>
       </p:bgPr>
@@ -4117,7 +4121,9 @@
           <p:nvPr/>
         </p:nvPicPr>
         <p:blipFill>
-          <a:blip r:embed="rId2"/>
+          <a:blip r:embed="rId2">
+            <a:alphaModFix amt="32000"/>
+          </a:blip>
           <a:stretch>
             <a:fillRect/>
           </a:stretch>
@@ -4147,7 +4153,7 @@
             <a:avLst/>
           </a:prstGeom>
           <a:solidFill>
-            <a:srgbClr val="F7F5F0"/>
+            <a:srgbClr val="F8F7F2"/>
           </a:solidFill>
           <a:ln>
             <a:noFill/>
@@ -4340,7 +4346,7 @@
             </a:avLst>
           </a:prstGeom>
           <a:solidFill>
-            <a:srgbClr val="F7F5F0"/>
+            <a:srgbClr val="F8F7F2"/>
           </a:solidFill>
           <a:ln>
             <a:noFill/>
@@ -4397,7 +4403,7 @@
               </a:lnSpc>
             </a:pPr>
             <a:r>
-              <a:rPr sz="1200" i="0" b="0" spc="220">
+              <a:rPr sz="1500" i="0" b="0" spc="220">
                 <a:solidFill>
                   <a:srgbClr val="1C1C1A"/>
                 </a:solidFill>
@@ -4406,7 +4412,7 @@
               <a:t>REVELAÇÃO DE ESSÊNCIA</a:t>
             </a:r>
             <a:r>
-              <a:rPr sz="1200" i="0" b="0" spc="220">
+              <a:rPr sz="1500" i="0" b="0" spc="220">
                 <a:solidFill>
                   <a:srgbClr val="A5A49F"/>
                 </a:solidFill>
@@ -4415,7 +4421,7 @@
               <a:t>   |   </a:t>
             </a:r>
             <a:r>
-              <a:rPr sz="1200" i="0" b="0" spc="220">
+              <a:rPr sz="1500" i="0" b="0" spc="220">
                 <a:solidFill>
                   <a:srgbClr val="1C1C1A"/>
                 </a:solidFill>
@@ -4918,7 +4924,7 @@
     <p:bg>
       <p:bgPr>
         <a:solidFill>
-          <a:srgbClr val="F7F5F0"/>
+          <a:srgbClr val="F8F7F2"/>
         </a:solidFill>
         <a:effectLst/>
       </p:bgPr>
@@ -4939,7 +4945,9 @@
           <p:nvPr/>
         </p:nvPicPr>
         <p:blipFill>
-          <a:blip r:embed="rId2"/>
+          <a:blip r:embed="rId2">
+            <a:alphaModFix amt="32000"/>
+          </a:blip>
           <a:stretch>
             <a:fillRect/>
           </a:stretch>
@@ -4971,7 +4979,7 @@
             </a:avLst>
           </a:prstGeom>
           <a:solidFill>
-            <a:srgbClr val="F7F5F0"/>
+            <a:srgbClr val="F8F7F2"/>
           </a:solidFill>
           <a:ln>
             <a:noFill/>
@@ -5028,7 +5036,7 @@
               </a:lnSpc>
             </a:pPr>
             <a:r>
-              <a:rPr sz="1200" i="0" b="0" spc="300">
+              <a:rPr sz="950" i="0" b="0" spc="300">
                 <a:solidFill>
                   <a:srgbClr val="A9724A"/>
                 </a:solidFill>
@@ -5073,7 +5081,7 @@
                 </a:solidFill>
                 <a:latin typeface="Outfit 2 Light"/>
               </a:rPr>
-              <a:t>AS TENSÕES</a:t>
+              <a:t>As tensões</a:t>
             </a:r>
           </a:p>
         </p:txBody>
@@ -5139,7 +5147,7 @@
             </a:avLst>
           </a:prstGeom>
           <a:solidFill>
-            <a:srgbClr val="F7F5F0"/>
+            <a:srgbClr val="F8F7F2"/>
           </a:solidFill>
           <a:ln>
             <a:noFill/>
@@ -5263,7 +5271,7 @@
     <p:bg>
       <p:bgPr>
         <a:solidFill>
-          <a:srgbClr val="F7F5F0"/>
+          <a:srgbClr val="F8F7F2"/>
         </a:solidFill>
         <a:effectLst/>
       </p:bgPr>
@@ -5284,7 +5292,9 @@
           <p:nvPr/>
         </p:nvPicPr>
         <p:blipFill>
-          <a:blip r:embed="rId2"/>
+          <a:blip r:embed="rId2">
+            <a:alphaModFix amt="32000"/>
+          </a:blip>
           <a:stretch>
             <a:fillRect/>
           </a:stretch>
@@ -5339,7 +5349,7 @@
             <a:avLst/>
           </a:prstGeom>
           <a:solidFill>
-            <a:srgbClr val="F7F5F0"/>
+            <a:srgbClr val="F8F7F2"/>
           </a:solidFill>
           <a:ln>
             <a:noFill/>
@@ -5507,7 +5517,7 @@
             </a:avLst>
           </a:prstGeom>
           <a:solidFill>
-            <a:srgbClr val="F7F5F0"/>
+            <a:srgbClr val="F8F7F2"/>
           </a:solidFill>
           <a:ln>
             <a:noFill/>
@@ -5564,7 +5574,7 @@
               </a:lnSpc>
             </a:pPr>
             <a:r>
-              <a:rPr sz="1200" i="0" b="0" spc="220">
+              <a:rPr sz="1500" i="0" b="0" spc="220">
                 <a:solidFill>
                   <a:srgbClr val="1C1C1A"/>
                 </a:solidFill>
@@ -5573,7 +5583,7 @@
               <a:t>REVELAÇÃO DE ESSÊNCIA</a:t>
             </a:r>
             <a:r>
-              <a:rPr sz="1200" i="0" b="0" spc="220">
+              <a:rPr sz="1500" i="0" b="0" spc="220">
                 <a:solidFill>
                   <a:srgbClr val="A5A49F"/>
                 </a:solidFill>
@@ -5582,7 +5592,7 @@
               <a:t>   |   </a:t>
             </a:r>
             <a:r>
-              <a:rPr sz="1200" i="0" b="0" spc="220">
+              <a:rPr sz="1500" i="0" b="0" spc="220">
                 <a:solidFill>
                   <a:srgbClr val="1C1C1A"/>
                 </a:solidFill>
@@ -6305,7 +6315,7 @@
     <p:bg>
       <p:bgPr>
         <a:solidFill>
-          <a:srgbClr val="F7F5F0"/>
+          <a:srgbClr val="F8F7F2"/>
         </a:solidFill>
         <a:effectLst/>
       </p:bgPr>
@@ -6326,7 +6336,9 @@
           <p:nvPr/>
         </p:nvPicPr>
         <p:blipFill>
-          <a:blip r:embed="rId2"/>
+          <a:blip r:embed="rId2">
+            <a:alphaModFix amt="32000"/>
+          </a:blip>
           <a:stretch>
             <a:fillRect/>
           </a:stretch>
@@ -6356,7 +6368,7 @@
             <a:avLst/>
           </a:prstGeom>
           <a:solidFill>
-            <a:srgbClr val="F7F5F0"/>
+            <a:srgbClr val="F8F7F2"/>
           </a:solidFill>
           <a:ln>
             <a:noFill/>
@@ -6549,7 +6561,7 @@
             </a:avLst>
           </a:prstGeom>
           <a:solidFill>
-            <a:srgbClr val="F7F5F0"/>
+            <a:srgbClr val="F8F7F2"/>
           </a:solidFill>
           <a:ln>
             <a:noFill/>
@@ -6606,7 +6618,7 @@
               </a:lnSpc>
             </a:pPr>
             <a:r>
-              <a:rPr sz="1200" i="0" b="0" spc="220">
+              <a:rPr sz="1500" i="0" b="0" spc="220">
                 <a:solidFill>
                   <a:srgbClr val="1C1C1A"/>
                 </a:solidFill>
@@ -6615,7 +6627,7 @@
               <a:t>REVELAÇÃO DE ESSÊNCIA</a:t>
             </a:r>
             <a:r>
-              <a:rPr sz="1200" i="0" b="0" spc="220">
+              <a:rPr sz="1500" i="0" b="0" spc="220">
                 <a:solidFill>
                   <a:srgbClr val="A5A49F"/>
                 </a:solidFill>
@@ -6624,7 +6636,7 @@
               <a:t>   |   </a:t>
             </a:r>
             <a:r>
-              <a:rPr sz="1200" i="0" b="0" spc="220">
+              <a:rPr sz="1500" i="0" b="0" spc="220">
                 <a:solidFill>
                   <a:srgbClr val="1C1C1A"/>
                 </a:solidFill>
@@ -7142,7 +7154,7 @@
     <p:bg>
       <p:bgPr>
         <a:solidFill>
-          <a:srgbClr val="F7F5F0"/>
+          <a:srgbClr val="F8F7F2"/>
         </a:solidFill>
         <a:effectLst/>
       </p:bgPr>
@@ -7163,7 +7175,9 @@
           <p:nvPr/>
         </p:nvPicPr>
         <p:blipFill>
-          <a:blip r:embed="rId2"/>
+          <a:blip r:embed="rId2">
+            <a:alphaModFix amt="32000"/>
+          </a:blip>
           <a:stretch>
             <a:fillRect/>
           </a:stretch>
@@ -7195,7 +7209,7 @@
             </a:avLst>
           </a:prstGeom>
           <a:solidFill>
-            <a:srgbClr val="F7F5F0"/>
+            <a:srgbClr val="F8F7F2"/>
           </a:solidFill>
           <a:ln>
             <a:noFill/>
@@ -7252,7 +7266,7 @@
               </a:lnSpc>
             </a:pPr>
             <a:r>
-              <a:rPr sz="1200" i="0" b="0" spc="300">
+              <a:rPr sz="950" i="0" b="0" spc="300">
                 <a:solidFill>
                   <a:srgbClr val="A9724A"/>
                 </a:solidFill>
@@ -7297,7 +7311,7 @@
                 </a:solidFill>
                 <a:latin typeface="Outfit 2 Light"/>
               </a:rPr>
-              <a:t>OS PADRÕES</a:t>
+              <a:t>Os padrões</a:t>
             </a:r>
           </a:p>
         </p:txBody>
@@ -7363,7 +7377,7 @@
             </a:avLst>
           </a:prstGeom>
           <a:solidFill>
-            <a:srgbClr val="F7F5F0"/>
+            <a:srgbClr val="F8F7F2"/>
           </a:solidFill>
           <a:ln>
             <a:noFill/>
@@ -7487,7 +7501,7 @@
     <p:bg>
       <p:bgPr>
         <a:solidFill>
-          <a:srgbClr val="F7F5F0"/>
+          <a:srgbClr val="F8F7F2"/>
         </a:solidFill>
         <a:effectLst/>
       </p:bgPr>
@@ -7508,7 +7522,9 @@
           <p:nvPr/>
         </p:nvPicPr>
         <p:blipFill>
-          <a:blip r:embed="rId2"/>
+          <a:blip r:embed="rId2">
+            <a:alphaModFix amt="32000"/>
+          </a:blip>
           <a:stretch>
             <a:fillRect/>
           </a:stretch>
@@ -7563,7 +7579,7 @@
             <a:avLst/>
           </a:prstGeom>
           <a:solidFill>
-            <a:srgbClr val="F7F5F0"/>
+            <a:srgbClr val="F8F7F2"/>
           </a:solidFill>
           <a:ln>
             <a:noFill/>
@@ -7731,7 +7747,7 @@
             </a:avLst>
           </a:prstGeom>
           <a:solidFill>
-            <a:srgbClr val="F7F5F0"/>
+            <a:srgbClr val="F8F7F2"/>
           </a:solidFill>
           <a:ln>
             <a:noFill/>
@@ -7788,7 +7804,7 @@
               </a:lnSpc>
             </a:pPr>
             <a:r>
-              <a:rPr sz="1200" i="0" b="0" spc="220">
+              <a:rPr sz="1500" i="0" b="0" spc="220">
                 <a:solidFill>
                   <a:srgbClr val="1C1C1A"/>
                 </a:solidFill>
@@ -7797,7 +7813,7 @@
               <a:t>REVELAÇÃO DE ESSÊNCIA</a:t>
             </a:r>
             <a:r>
-              <a:rPr sz="1200" i="0" b="0" spc="220">
+              <a:rPr sz="1500" i="0" b="0" spc="220">
                 <a:solidFill>
                   <a:srgbClr val="A5A49F"/>
                 </a:solidFill>
@@ -7806,7 +7822,7 @@
               <a:t>   |   </a:t>
             </a:r>
             <a:r>
-              <a:rPr sz="1200" i="0" b="0" spc="220">
+              <a:rPr sz="1500" i="0" b="0" spc="220">
                 <a:solidFill>
                   <a:srgbClr val="1C1C1A"/>
                 </a:solidFill>
@@ -8290,7 +8306,7 @@
     <p:bg>
       <p:bgPr>
         <a:solidFill>
-          <a:srgbClr val="F7F5F0"/>
+          <a:srgbClr val="F8F7F2"/>
         </a:solidFill>
         <a:effectLst/>
       </p:bgPr>
@@ -8311,7 +8327,9 @@
           <p:nvPr/>
         </p:nvPicPr>
         <p:blipFill>
-          <a:blip r:embed="rId2"/>
+          <a:blip r:embed="rId2">
+            <a:alphaModFix amt="32000"/>
+          </a:blip>
           <a:stretch>
             <a:fillRect/>
           </a:stretch>
@@ -8341,7 +8359,7 @@
             <a:avLst/>
           </a:prstGeom>
           <a:solidFill>
-            <a:srgbClr val="F7F5F0"/>
+            <a:srgbClr val="F8F7F2"/>
           </a:solidFill>
           <a:ln>
             <a:noFill/>
@@ -8534,7 +8552,7 @@
             </a:avLst>
           </a:prstGeom>
           <a:solidFill>
-            <a:srgbClr val="F7F5F0"/>
+            <a:srgbClr val="F8F7F2"/>
           </a:solidFill>
           <a:ln>
             <a:noFill/>
@@ -8591,7 +8609,7 @@
               </a:lnSpc>
             </a:pPr>
             <a:r>
-              <a:rPr sz="1200" i="0" b="0" spc="220">
+              <a:rPr sz="1500" i="0" b="0" spc="220">
                 <a:solidFill>
                   <a:srgbClr val="1C1C1A"/>
                 </a:solidFill>
@@ -8600,7 +8618,7 @@
               <a:t>REVELAÇÃO DE ESSÊNCIA</a:t>
             </a:r>
             <a:r>
-              <a:rPr sz="1200" i="0" b="0" spc="220">
+              <a:rPr sz="1500" i="0" b="0" spc="220">
                 <a:solidFill>
                   <a:srgbClr val="A5A49F"/>
                 </a:solidFill>
@@ -8609,7 +8627,7 @@
               <a:t>   |   </a:t>
             </a:r>
             <a:r>
-              <a:rPr sz="1200" i="0" b="0" spc="220">
+              <a:rPr sz="1500" i="0" b="0" spc="220">
                 <a:solidFill>
                   <a:srgbClr val="1C1C1A"/>
                 </a:solidFill>
@@ -9471,7 +9489,7 @@
     <p:bg>
       <p:bgPr>
         <a:solidFill>
-          <a:srgbClr val="F7F5F0"/>
+          <a:srgbClr val="F8F7F2"/>
         </a:solidFill>
         <a:effectLst/>
       </p:bgPr>
@@ -9492,7 +9510,9 @@
           <p:nvPr/>
         </p:nvPicPr>
         <p:blipFill>
-          <a:blip r:embed="rId2"/>
+          <a:blip r:embed="rId2">
+            <a:alphaModFix amt="32000"/>
+          </a:blip>
           <a:stretch>
             <a:fillRect/>
           </a:stretch>
@@ -9524,7 +9544,7 @@
             </a:avLst>
           </a:prstGeom>
           <a:solidFill>
-            <a:srgbClr val="F7F5F0"/>
+            <a:srgbClr val="F8F7F2"/>
           </a:solidFill>
           <a:ln>
             <a:noFill/>
@@ -9601,7 +9621,7 @@
         <p:spPr>
           <a:xfrm>
             <a:off x="2011680" y="3291840"/>
-            <a:ext cx="11887200" cy="457200"/>
+            <a:ext cx="11887200" cy="548640"/>
           </a:xfrm>
           <a:prstGeom prst="rect">
             <a:avLst/>
@@ -9747,7 +9767,7 @@
             </a:avLst>
           </a:prstGeom>
           <a:solidFill>
-            <a:srgbClr val="F7F5F0"/>
+            <a:srgbClr val="F8F7F2"/>
           </a:solidFill>
           <a:ln>
             <a:noFill/>
@@ -9871,7 +9891,7 @@
     <p:bg>
       <p:bgPr>
         <a:solidFill>
-          <a:srgbClr val="F7F5F0"/>
+          <a:srgbClr val="F8F7F2"/>
         </a:solidFill>
         <a:effectLst/>
       </p:bgPr>
@@ -9892,7 +9912,9 @@
           <p:nvPr/>
         </p:nvPicPr>
         <p:blipFill>
-          <a:blip r:embed="rId2"/>
+          <a:blip r:embed="rId2">
+            <a:alphaModFix amt="32000"/>
+          </a:blip>
           <a:stretch>
             <a:fillRect/>
           </a:stretch>
@@ -9924,7 +9946,7 @@
             </a:avLst>
           </a:prstGeom>
           <a:solidFill>
-            <a:srgbClr val="F7F5F0"/>
+            <a:srgbClr val="F8F7F2"/>
           </a:solidFill>
           <a:ln>
             <a:noFill/>
@@ -9981,7 +10003,7 @@
               </a:lnSpc>
             </a:pPr>
             <a:r>
-              <a:rPr sz="1200" i="0" b="0" spc="300">
+              <a:rPr sz="950" i="0" b="0" spc="300">
                 <a:solidFill>
                   <a:srgbClr val="A9724A"/>
                 </a:solidFill>
@@ -10026,7 +10048,7 @@
                 </a:solidFill>
                 <a:latin typeface="Outfit 2 Light"/>
               </a:rPr>
-              <a:t>O IKIGAI</a:t>
+              <a:t>O Ikigai</a:t>
             </a:r>
           </a:p>
         </p:txBody>
@@ -10092,7 +10114,7 @@
             </a:avLst>
           </a:prstGeom>
           <a:solidFill>
-            <a:srgbClr val="F7F5F0"/>
+            <a:srgbClr val="F8F7F2"/>
           </a:solidFill>
           <a:ln>
             <a:noFill/>
@@ -10216,7 +10238,7 @@
     <p:bg>
       <p:bgPr>
         <a:solidFill>
-          <a:srgbClr val="F7F5F0"/>
+          <a:srgbClr val="F8F7F2"/>
         </a:solidFill>
         <a:effectLst/>
       </p:bgPr>
@@ -10237,7 +10259,9 @@
           <p:nvPr/>
         </p:nvPicPr>
         <p:blipFill>
-          <a:blip r:embed="rId2"/>
+          <a:blip r:embed="rId2">
+            <a:alphaModFix amt="32000"/>
+          </a:blip>
           <a:stretch>
             <a:fillRect/>
           </a:stretch>
@@ -10384,7 +10408,7 @@
         <p:spPr>
           <a:xfrm>
             <a:off x="2011680" y="6400800"/>
-            <a:ext cx="12801600" cy="548640"/>
+            <a:ext cx="12801600" cy="685800"/>
           </a:xfrm>
           <a:prstGeom prst="rect">
             <a:avLst/>
@@ -10634,7 +10658,7 @@
     <p:bg>
       <p:bgPr>
         <a:solidFill>
-          <a:srgbClr val="F7F5F0"/>
+          <a:srgbClr val="F8F7F2"/>
         </a:solidFill>
         <a:effectLst/>
       </p:bgPr>
@@ -10655,7 +10679,9 @@
           <p:nvPr/>
         </p:nvPicPr>
         <p:blipFill>
-          <a:blip r:embed="rId2"/>
+          <a:blip r:embed="rId2">
+            <a:alphaModFix amt="32000"/>
+          </a:blip>
           <a:stretch>
             <a:fillRect/>
           </a:stretch>
@@ -10710,7 +10736,7 @@
             <a:avLst/>
           </a:prstGeom>
           <a:solidFill>
-            <a:srgbClr val="F7F5F0"/>
+            <a:srgbClr val="F8F7F2"/>
           </a:solidFill>
           <a:ln>
             <a:noFill/>
@@ -10878,7 +10904,7 @@
             </a:avLst>
           </a:prstGeom>
           <a:solidFill>
-            <a:srgbClr val="F7F5F0"/>
+            <a:srgbClr val="F8F7F2"/>
           </a:solidFill>
           <a:ln>
             <a:noFill/>
@@ -10935,7 +10961,7 @@
               </a:lnSpc>
             </a:pPr>
             <a:r>
-              <a:rPr sz="1200" i="0" b="0" spc="220">
+              <a:rPr sz="1500" i="0" b="0" spc="220">
                 <a:solidFill>
                   <a:srgbClr val="1C1C1A"/>
                 </a:solidFill>
@@ -10944,7 +10970,7 @@
               <a:t>REVELAÇÃO DE ESSÊNCIA</a:t>
             </a:r>
             <a:r>
-              <a:rPr sz="1200" i="0" b="0" spc="220">
+              <a:rPr sz="1500" i="0" b="0" spc="220">
                 <a:solidFill>
                   <a:srgbClr val="A5A49F"/>
                 </a:solidFill>
@@ -10953,7 +10979,7 @@
               <a:t>   |   </a:t>
             </a:r>
             <a:r>
-              <a:rPr sz="1200" i="0" b="0" spc="220">
+              <a:rPr sz="1500" i="0" b="0" spc="220">
                 <a:solidFill>
                   <a:srgbClr val="1C1C1A"/>
                 </a:solidFill>
@@ -11432,7 +11458,7 @@
     <p:bg>
       <p:bgPr>
         <a:solidFill>
-          <a:srgbClr val="F7F5F0"/>
+          <a:srgbClr val="F8F7F2"/>
         </a:solidFill>
         <a:effectLst/>
       </p:bgPr>
@@ -11453,7 +11479,9 @@
           <p:nvPr/>
         </p:nvPicPr>
         <p:blipFill>
-          <a:blip r:embed="rId2"/>
+          <a:blip r:embed="rId2">
+            <a:alphaModFix amt="32000"/>
+          </a:blip>
           <a:stretch>
             <a:fillRect/>
           </a:stretch>
@@ -11485,7 +11513,7 @@
             </a:avLst>
           </a:prstGeom>
           <a:solidFill>
-            <a:srgbClr val="F7F5F0"/>
+            <a:srgbClr val="F8F7F2"/>
           </a:solidFill>
           <a:ln>
             <a:noFill/>
@@ -11653,7 +11681,7 @@
             </a:avLst>
           </a:prstGeom>
           <a:solidFill>
-            <a:srgbClr val="F7F5F0"/>
+            <a:srgbClr val="F8F7F2"/>
           </a:solidFill>
           <a:ln>
             <a:noFill/>
@@ -12289,7 +12317,7 @@
     <p:bg>
       <p:bgPr>
         <a:solidFill>
-          <a:srgbClr val="F7F5F0"/>
+          <a:srgbClr val="F8F7F2"/>
         </a:solidFill>
         <a:effectLst/>
       </p:bgPr>
@@ -12310,7 +12338,9 @@
           <p:nvPr/>
         </p:nvPicPr>
         <p:blipFill>
-          <a:blip r:embed="rId2"/>
+          <a:blip r:embed="rId2">
+            <a:alphaModFix amt="32000"/>
+          </a:blip>
           <a:stretch>
             <a:fillRect/>
           </a:stretch>
@@ -12340,7 +12370,7 @@
             <a:avLst/>
           </a:prstGeom>
           <a:solidFill>
-            <a:srgbClr val="F7F5F0"/>
+            <a:srgbClr val="F8F7F2"/>
           </a:solidFill>
           <a:ln>
             <a:noFill/>
@@ -12533,7 +12563,7 @@
             </a:avLst>
           </a:prstGeom>
           <a:solidFill>
-            <a:srgbClr val="F7F5F0"/>
+            <a:srgbClr val="F8F7F2"/>
           </a:solidFill>
           <a:ln>
             <a:noFill/>
@@ -12590,7 +12620,7 @@
               </a:lnSpc>
             </a:pPr>
             <a:r>
-              <a:rPr sz="1200" i="0" b="0" spc="220">
+              <a:rPr sz="1500" i="0" b="0" spc="220">
                 <a:solidFill>
                   <a:srgbClr val="1C1C1A"/>
                 </a:solidFill>
@@ -12599,7 +12629,7 @@
               <a:t>REVELAÇÃO DE ESSÊNCIA</a:t>
             </a:r>
             <a:r>
-              <a:rPr sz="1200" i="0" b="0" spc="220">
+              <a:rPr sz="1500" i="0" b="0" spc="220">
                 <a:solidFill>
                   <a:srgbClr val="A5A49F"/>
                 </a:solidFill>
@@ -12608,7 +12638,7 @@
               <a:t>   |   </a:t>
             </a:r>
             <a:r>
-              <a:rPr sz="1200" i="0" b="0" spc="220">
+              <a:rPr sz="1500" i="0" b="0" spc="220">
                 <a:solidFill>
                   <a:srgbClr val="1C1C1A"/>
                 </a:solidFill>
@@ -12925,7 +12955,7 @@
               </a:lnSpc>
             </a:pPr>
             <a:r>
-              <a:rPr sz="2800" i="0" b="0">
+              <a:rPr sz="2900" i="0" b="0">
                 <a:solidFill>
                   <a:srgbClr val="A9724A"/>
                 </a:solidFill>
@@ -12989,7 +13019,7 @@
     <p:bg>
       <p:bgPr>
         <a:solidFill>
-          <a:srgbClr val="F7F5F0"/>
+          <a:srgbClr val="F8F7F2"/>
         </a:solidFill>
         <a:effectLst/>
       </p:bgPr>
@@ -13010,7 +13040,9 @@
           <p:nvPr/>
         </p:nvPicPr>
         <p:blipFill>
-          <a:blip r:embed="rId2"/>
+          <a:blip r:embed="rId2">
+            <a:alphaModFix amt="32000"/>
+          </a:blip>
           <a:stretch>
             <a:fillRect/>
           </a:stretch>
@@ -13042,7 +13074,7 @@
             </a:avLst>
           </a:prstGeom>
           <a:solidFill>
-            <a:srgbClr val="F7F5F0"/>
+            <a:srgbClr val="F8F7F2"/>
           </a:solidFill>
           <a:ln>
             <a:noFill/>
@@ -13320,7 +13352,7 @@
             </a:avLst>
           </a:prstGeom>
           <a:solidFill>
-            <a:srgbClr val="F7F5F0"/>
+            <a:srgbClr val="F8F7F2"/>
           </a:solidFill>
           <a:ln>
             <a:noFill/>
@@ -13444,7 +13476,7 @@
     <p:bg>
       <p:bgPr>
         <a:solidFill>
-          <a:srgbClr val="F7F5F0"/>
+          <a:srgbClr val="F8F7F2"/>
         </a:solidFill>
         <a:effectLst/>
       </p:bgPr>
@@ -13465,7 +13497,9 @@
           <p:nvPr/>
         </p:nvPicPr>
         <p:blipFill>
-          <a:blip r:embed="rId2"/>
+          <a:blip r:embed="rId2">
+            <a:alphaModFix amt="32000"/>
+          </a:blip>
           <a:stretch>
             <a:fillRect/>
           </a:stretch>
@@ -13497,7 +13531,7 @@
             </a:avLst>
           </a:prstGeom>
           <a:solidFill>
-            <a:srgbClr val="F7F5F0"/>
+            <a:srgbClr val="F8F7F2"/>
           </a:solidFill>
           <a:ln>
             <a:noFill/>
@@ -13554,7 +13588,7 @@
               </a:lnSpc>
             </a:pPr>
             <a:r>
-              <a:rPr sz="1200" i="0" b="0" spc="300">
+              <a:rPr sz="950" i="0" b="0" spc="300">
                 <a:solidFill>
                   <a:srgbClr val="A9724A"/>
                 </a:solidFill>
@@ -13599,7 +13633,7 @@
                 </a:solidFill>
                 <a:latin typeface="Outfit 2 Light"/>
               </a:rPr>
-              <a:t>A ESSÊNCIA</a:t>
+              <a:t>A essência</a:t>
             </a:r>
           </a:p>
         </p:txBody>
@@ -13665,7 +13699,7 @@
             </a:avLst>
           </a:prstGeom>
           <a:solidFill>
-            <a:srgbClr val="F7F5F0"/>
+            <a:srgbClr val="F8F7F2"/>
           </a:solidFill>
           <a:ln>
             <a:noFill/>
@@ -13789,7 +13823,7 @@
     <p:bg>
       <p:bgPr>
         <a:solidFill>
-          <a:srgbClr val="F7F5F0"/>
+          <a:srgbClr val="F8F7F2"/>
         </a:solidFill>
         <a:effectLst/>
       </p:bgPr>
@@ -13810,7 +13844,9 @@
           <p:nvPr/>
         </p:nvPicPr>
         <p:blipFill>
-          <a:blip r:embed="rId2"/>
+          <a:blip r:embed="rId2">
+            <a:alphaModFix amt="32000"/>
+          </a:blip>
           <a:stretch>
             <a:fillRect/>
           </a:stretch>
@@ -13842,7 +13878,7 @@
             </a:avLst>
           </a:prstGeom>
           <a:solidFill>
-            <a:srgbClr val="F7F5F0"/>
+            <a:srgbClr val="F8F7F2"/>
           </a:solidFill>
           <a:ln>
             <a:noFill/>
@@ -14010,7 +14046,7 @@
             </a:avLst>
           </a:prstGeom>
           <a:solidFill>
-            <a:srgbClr val="F7F5F0"/>
+            <a:srgbClr val="F8F7F2"/>
           </a:solidFill>
           <a:ln>
             <a:noFill/>
@@ -14736,7 +14772,7 @@
     <p:bg>
       <p:bgPr>
         <a:solidFill>
-          <a:srgbClr val="F7F5F0"/>
+          <a:srgbClr val="F8F7F2"/>
         </a:solidFill>
         <a:effectLst/>
       </p:bgPr>
@@ -14757,7 +14793,9 @@
           <p:nvPr/>
         </p:nvPicPr>
         <p:blipFill>
-          <a:blip r:embed="rId2"/>
+          <a:blip r:embed="rId2">
+            <a:alphaModFix amt="32000"/>
+          </a:blip>
           <a:stretch>
             <a:fillRect/>
           </a:stretch>
@@ -14789,7 +14827,7 @@
             </a:avLst>
           </a:prstGeom>
           <a:solidFill>
-            <a:srgbClr val="F7F5F0"/>
+            <a:srgbClr val="F8F7F2"/>
           </a:solidFill>
           <a:ln>
             <a:noFill/>
@@ -15290,7 +15328,7 @@
             </a:avLst>
           </a:prstGeom>
           <a:solidFill>
-            <a:srgbClr val="F7F5F0"/>
+            <a:srgbClr val="F8F7F2"/>
           </a:solidFill>
           <a:ln>
             <a:noFill/>
@@ -15414,7 +15452,7 @@
     <p:bg>
       <p:bgPr>
         <a:solidFill>
-          <a:srgbClr val="F7F5F0"/>
+          <a:srgbClr val="F8F7F2"/>
         </a:solidFill>
         <a:effectLst/>
       </p:bgPr>
@@ -15435,7 +15473,9 @@
           <p:nvPr/>
         </p:nvPicPr>
         <p:blipFill>
-          <a:blip r:embed="rId2"/>
+          <a:blip r:embed="rId2">
+            <a:alphaModFix amt="32000"/>
+          </a:blip>
           <a:stretch>
             <a:fillRect/>
           </a:stretch>
@@ -15467,7 +15507,7 @@
             </a:avLst>
           </a:prstGeom>
           <a:solidFill>
-            <a:srgbClr val="F7F5F0"/>
+            <a:srgbClr val="F8F7F2"/>
           </a:solidFill>
           <a:ln>
             <a:noFill/>
@@ -15524,7 +15564,7 @@
               </a:lnSpc>
             </a:pPr>
             <a:r>
-              <a:rPr sz="1200" i="0" b="0" spc="300">
+              <a:rPr sz="950" i="0" b="0" spc="300">
                 <a:solidFill>
                   <a:srgbClr val="A9724A"/>
                 </a:solidFill>
@@ -15569,7 +15609,7 @@
                 </a:solidFill>
                 <a:latin typeface="Outfit 2 Light"/>
               </a:rPr>
-              <a:t>AS MARCAS</a:t>
+              <a:t>As marcas</a:t>
             </a:r>
           </a:p>
         </p:txBody>
@@ -15635,7 +15675,7 @@
             </a:avLst>
           </a:prstGeom>
           <a:solidFill>
-            <a:srgbClr val="F7F5F0"/>
+            <a:srgbClr val="F8F7F2"/>
           </a:solidFill>
           <a:ln>
             <a:noFill/>
@@ -15759,7 +15799,7 @@
     <p:bg>
       <p:bgPr>
         <a:solidFill>
-          <a:srgbClr val="F7F5F0"/>
+          <a:srgbClr val="F8F7F2"/>
         </a:solidFill>
         <a:effectLst/>
       </p:bgPr>
@@ -15780,7 +15820,9 @@
           <p:nvPr/>
         </p:nvPicPr>
         <p:blipFill>
-          <a:blip r:embed="rId2"/>
+          <a:blip r:embed="rId2">
+            <a:alphaModFix amt="32000"/>
+          </a:blip>
           <a:stretch>
             <a:fillRect/>
           </a:stretch>
@@ -15835,7 +15877,7 @@
             <a:avLst/>
           </a:prstGeom>
           <a:solidFill>
-            <a:srgbClr val="F7F5F0"/>
+            <a:srgbClr val="F8F7F2"/>
           </a:solidFill>
           <a:ln>
             <a:noFill/>
@@ -16003,7 +16045,7 @@
             </a:avLst>
           </a:prstGeom>
           <a:solidFill>
-            <a:srgbClr val="F7F5F0"/>
+            <a:srgbClr val="F8F7F2"/>
           </a:solidFill>
           <a:ln>
             <a:noFill/>
@@ -16060,7 +16102,7 @@
               </a:lnSpc>
             </a:pPr>
             <a:r>
-              <a:rPr sz="1200" i="0" b="0" spc="220">
+              <a:rPr sz="1500" i="0" b="0" spc="220">
                 <a:solidFill>
                   <a:srgbClr val="1C1C1A"/>
                 </a:solidFill>
@@ -16069,7 +16111,7 @@
               <a:t>REVELAÇÃO DE ESSÊNCIA</a:t>
             </a:r>
             <a:r>
-              <a:rPr sz="1200" i="0" b="0" spc="220">
+              <a:rPr sz="1500" i="0" b="0" spc="220">
                 <a:solidFill>
                   <a:srgbClr val="A5A49F"/>
                 </a:solidFill>
@@ -16078,7 +16120,7 @@
               <a:t>   |   </a:t>
             </a:r>
             <a:r>
-              <a:rPr sz="1200" i="0" b="0" spc="220">
+              <a:rPr sz="1500" i="0" b="0" spc="220">
                 <a:solidFill>
                   <a:srgbClr val="1C1C1A"/>
                 </a:solidFill>
@@ -16503,7 +16545,7 @@
     <p:bg>
       <p:bgPr>
         <a:solidFill>
-          <a:srgbClr val="F7F5F0"/>
+          <a:srgbClr val="F8F7F2"/>
         </a:solidFill>
         <a:effectLst/>
       </p:bgPr>
@@ -16524,7 +16566,9 @@
           <p:nvPr/>
         </p:nvPicPr>
         <p:blipFill>
-          <a:blip r:embed="rId2"/>
+          <a:blip r:embed="rId2">
+            <a:alphaModFix amt="32000"/>
+          </a:blip>
           <a:stretch>
             <a:fillRect/>
           </a:stretch>
@@ -16554,7 +16598,7 @@
             <a:avLst/>
           </a:prstGeom>
           <a:solidFill>
-            <a:srgbClr val="F7F5F0"/>
+            <a:srgbClr val="F8F7F2"/>
           </a:solidFill>
           <a:ln>
             <a:noFill/>
@@ -16747,7 +16791,7 @@
             </a:avLst>
           </a:prstGeom>
           <a:solidFill>
-            <a:srgbClr val="F7F5F0"/>
+            <a:srgbClr val="F8F7F2"/>
           </a:solidFill>
           <a:ln>
             <a:noFill/>
@@ -16804,7 +16848,7 @@
               </a:lnSpc>
             </a:pPr>
             <a:r>
-              <a:rPr sz="1200" i="0" b="0" spc="220">
+              <a:rPr sz="1500" i="0" b="0" spc="220">
                 <a:solidFill>
                   <a:srgbClr val="1C1C1A"/>
                 </a:solidFill>
@@ -16813,7 +16857,7 @@
               <a:t>REVELAÇÃO DE ESSÊNCIA</a:t>
             </a:r>
             <a:r>
-              <a:rPr sz="1200" i="0" b="0" spc="220">
+              <a:rPr sz="1500" i="0" b="0" spc="220">
                 <a:solidFill>
                   <a:srgbClr val="A5A49F"/>
                 </a:solidFill>
@@ -16822,7 +16866,7 @@
               <a:t>   |   </a:t>
             </a:r>
             <a:r>
-              <a:rPr sz="1200" i="0" b="0" spc="220">
+              <a:rPr sz="1500" i="0" b="0" spc="220">
                 <a:solidFill>
                   <a:srgbClr val="1C1C1A"/>
                 </a:solidFill>
@@ -17047,7 +17091,7 @@
     <p:bg>
       <p:bgPr>
         <a:solidFill>
-          <a:srgbClr val="F7F5F0"/>
+          <a:srgbClr val="F8F7F2"/>
         </a:solidFill>
         <a:effectLst/>
       </p:bgPr>
@@ -17068,7 +17112,9 @@
           <p:nvPr/>
         </p:nvPicPr>
         <p:blipFill>
-          <a:blip r:embed="rId2"/>
+          <a:blip r:embed="rId2">
+            <a:alphaModFix amt="32000"/>
+          </a:blip>
           <a:stretch>
             <a:fillRect/>
           </a:stretch>
@@ -17100,7 +17146,7 @@
             </a:avLst>
           </a:prstGeom>
           <a:solidFill>
-            <a:srgbClr val="F7F5F0"/>
+            <a:srgbClr val="F8F7F2"/>
           </a:solidFill>
           <a:ln>
             <a:noFill/>
@@ -18234,7 +18280,7 @@
             </a:avLst>
           </a:prstGeom>
           <a:solidFill>
-            <a:srgbClr val="F7F5F0"/>
+            <a:srgbClr val="F8F7F2"/>
           </a:solidFill>
           <a:ln>
             <a:noFill/>
@@ -18358,7 +18404,7 @@
     <p:bg>
       <p:bgPr>
         <a:solidFill>
-          <a:srgbClr val="F7F5F0"/>
+          <a:srgbClr val="F8F7F2"/>
         </a:solidFill>
         <a:effectLst/>
       </p:bgPr>
@@ -18379,7 +18425,9 @@
           <p:nvPr/>
         </p:nvPicPr>
         <p:blipFill>
-          <a:blip r:embed="rId2"/>
+          <a:blip r:embed="rId2">
+            <a:alphaModFix amt="32000"/>
+          </a:blip>
           <a:stretch>
             <a:fillRect/>
           </a:stretch>
@@ -18411,7 +18459,7 @@
             </a:avLst>
           </a:prstGeom>
           <a:solidFill>
-            <a:srgbClr val="F7F5F0"/>
+            <a:srgbClr val="F8F7F2"/>
           </a:solidFill>
           <a:ln>
             <a:noFill/>
@@ -18556,7 +18604,7 @@
             </a:avLst>
           </a:prstGeom>
           <a:solidFill>
-            <a:srgbClr val="F7F5F0"/>
+            <a:srgbClr val="F8F7F2"/>
           </a:solidFill>
           <a:ln>
             <a:noFill/>
@@ -18680,7 +18728,7 @@
     <p:bg>
       <p:bgPr>
         <a:solidFill>
-          <a:srgbClr val="F7F5F0"/>
+          <a:srgbClr val="F8F7F2"/>
         </a:solidFill>
         <a:effectLst/>
       </p:bgPr>
@@ -18701,7 +18749,9 @@
           <p:nvPr/>
         </p:nvPicPr>
         <p:blipFill>
-          <a:blip r:embed="rId2"/>
+          <a:blip r:embed="rId2">
+            <a:alphaModFix amt="32000"/>
+          </a:blip>
           <a:stretch>
             <a:fillRect/>
           </a:stretch>
@@ -18861,7 +18911,7 @@
     <p:bg>
       <p:bgPr>
         <a:solidFill>
-          <a:srgbClr val="F7F5F0"/>
+          <a:srgbClr val="F8F7F2"/>
         </a:solidFill>
         <a:effectLst/>
       </p:bgPr>
@@ -18882,7 +18932,9 @@
           <p:nvPr/>
         </p:nvPicPr>
         <p:blipFill>
-          <a:blip r:embed="rId2"/>
+          <a:blip r:embed="rId2">
+            <a:alphaModFix amt="32000"/>
+          </a:blip>
           <a:stretch>
             <a:fillRect/>
           </a:stretch>
@@ -18937,7 +18989,7 @@
             <a:avLst/>
           </a:prstGeom>
           <a:solidFill>
-            <a:srgbClr val="F7F5F0"/>
+            <a:srgbClr val="F8F7F2"/>
           </a:solidFill>
           <a:ln>
             <a:noFill/>
@@ -19105,7 +19157,7 @@
             </a:avLst>
           </a:prstGeom>
           <a:solidFill>
-            <a:srgbClr val="F7F5F0"/>
+            <a:srgbClr val="F8F7F2"/>
           </a:solidFill>
           <a:ln>
             <a:noFill/>
@@ -19162,7 +19214,7 @@
               </a:lnSpc>
             </a:pPr>
             <a:r>
-              <a:rPr sz="1200" i="0" b="0" spc="220">
+              <a:rPr sz="1500" i="0" b="0" spc="220">
                 <a:solidFill>
                   <a:srgbClr val="1C1C1A"/>
                 </a:solidFill>
@@ -19171,7 +19223,7 @@
               <a:t>REVELAÇÃO DE ESSÊNCIA</a:t>
             </a:r>
             <a:r>
-              <a:rPr sz="1200" i="0" b="0" spc="220">
+              <a:rPr sz="1500" i="0" b="0" spc="220">
                 <a:solidFill>
                   <a:srgbClr val="A5A49F"/>
                 </a:solidFill>
@@ -19180,7 +19232,7 @@
               <a:t>   |   </a:t>
             </a:r>
             <a:r>
-              <a:rPr sz="1200" i="0" b="0" spc="220">
+              <a:rPr sz="1500" i="0" b="0" spc="220">
                 <a:solidFill>
                   <a:srgbClr val="1C1C1A"/>
                 </a:solidFill>
@@ -19483,7 +19535,7 @@
     <p:bg>
       <p:bgPr>
         <a:solidFill>
-          <a:srgbClr val="F7F5F0"/>
+          <a:srgbClr val="F8F7F2"/>
         </a:solidFill>
         <a:effectLst/>
       </p:bgPr>
@@ -19504,7 +19556,9 @@
           <p:nvPr/>
         </p:nvPicPr>
         <p:blipFill>
-          <a:blip r:embed="rId2"/>
+          <a:blip r:embed="rId2">
+            <a:alphaModFix amt="32000"/>
+          </a:blip>
           <a:stretch>
             <a:fillRect/>
           </a:stretch>
@@ -19534,7 +19588,7 @@
             <a:avLst/>
           </a:prstGeom>
           <a:solidFill>
-            <a:srgbClr val="F7F5F0"/>
+            <a:srgbClr val="F8F7F2"/>
           </a:solidFill>
           <a:ln>
             <a:noFill/>
@@ -19727,7 +19781,7 @@
             </a:avLst>
           </a:prstGeom>
           <a:solidFill>
-            <a:srgbClr val="F7F5F0"/>
+            <a:srgbClr val="F8F7F2"/>
           </a:solidFill>
           <a:ln>
             <a:noFill/>
@@ -19784,7 +19838,7 @@
               </a:lnSpc>
             </a:pPr>
             <a:r>
-              <a:rPr sz="1200" i="0" b="0" spc="220">
+              <a:rPr sz="1500" i="0" b="0" spc="220">
                 <a:solidFill>
                   <a:srgbClr val="1C1C1A"/>
                 </a:solidFill>
@@ -19793,7 +19847,7 @@
               <a:t>REVELAÇÃO DE ESSÊNCIA</a:t>
             </a:r>
             <a:r>
-              <a:rPr sz="1200" i="0" b="0" spc="220">
+              <a:rPr sz="1500" i="0" b="0" spc="220">
                 <a:solidFill>
                   <a:srgbClr val="A5A49F"/>
                 </a:solidFill>
@@ -19802,7 +19856,7 @@
               <a:t>   |   </a:t>
             </a:r>
             <a:r>
-              <a:rPr sz="1200" i="0" b="0" spc="220">
+              <a:rPr sz="1500" i="0" b="0" spc="220">
                 <a:solidFill>
                   <a:srgbClr val="1C1C1A"/>
                 </a:solidFill>
@@ -19898,7 +19952,7 @@
     <p:bg>
       <p:bgPr>
         <a:solidFill>
-          <a:srgbClr val="F7F5F0"/>
+          <a:srgbClr val="F8F7F2"/>
         </a:solidFill>
         <a:effectLst/>
       </p:bgPr>
@@ -19919,7 +19973,9 @@
           <p:nvPr/>
         </p:nvPicPr>
         <p:blipFill>
-          <a:blip r:embed="rId2"/>
+          <a:blip r:embed="rId2">
+            <a:alphaModFix amt="32000"/>
+          </a:blip>
           <a:stretch>
             <a:fillRect/>
           </a:stretch>
@@ -19951,7 +20007,7 @@
             </a:avLst>
           </a:prstGeom>
           <a:solidFill>
-            <a:srgbClr val="F7F5F0"/>
+            <a:srgbClr val="F8F7F2"/>
           </a:solidFill>
           <a:ln>
             <a:noFill/>
@@ -20119,7 +20175,7 @@
             </a:avLst>
           </a:prstGeom>
           <a:solidFill>
-            <a:srgbClr val="F7F5F0"/>
+            <a:srgbClr val="F8F7F2"/>
           </a:solidFill>
           <a:ln>
             <a:noFill/>
@@ -20920,7 +20976,7 @@
     <p:bg>
       <p:bgPr>
         <a:solidFill>
-          <a:srgbClr val="F7F5F0"/>
+          <a:srgbClr val="F8F7F2"/>
         </a:solidFill>
         <a:effectLst/>
       </p:bgPr>
@@ -20941,7 +20997,9 @@
           <p:nvPr/>
         </p:nvPicPr>
         <p:blipFill>
-          <a:blip r:embed="rId2"/>
+          <a:blip r:embed="rId2">
+            <a:alphaModFix amt="32000"/>
+          </a:blip>
           <a:stretch>
             <a:fillRect/>
           </a:stretch>
@@ -20973,7 +21031,7 @@
             </a:avLst>
           </a:prstGeom>
           <a:solidFill>
-            <a:srgbClr val="F7F5F0"/>
+            <a:srgbClr val="F8F7F2"/>
           </a:solidFill>
           <a:ln>
             <a:noFill/>
@@ -21030,7 +21088,7 @@
               </a:lnSpc>
             </a:pPr>
             <a:r>
-              <a:rPr sz="1200" i="0" b="0" spc="300">
+              <a:rPr sz="950" i="0" b="0" spc="300">
                 <a:solidFill>
                   <a:srgbClr val="A9724A"/>
                 </a:solidFill>
@@ -21075,7 +21133,7 @@
                 </a:solidFill>
                 <a:latin typeface="Outfit 2 Light"/>
               </a:rPr>
-              <a:t>A ORIGEM</a:t>
+              <a:t>A origem</a:t>
             </a:r>
           </a:p>
         </p:txBody>
@@ -21141,7 +21199,7 @@
             </a:avLst>
           </a:prstGeom>
           <a:solidFill>
-            <a:srgbClr val="F7F5F0"/>
+            <a:srgbClr val="F8F7F2"/>
           </a:solidFill>
           <a:ln>
             <a:noFill/>
@@ -21265,7 +21323,7 @@
     <p:bg>
       <p:bgPr>
         <a:solidFill>
-          <a:srgbClr val="F7F5F0"/>
+          <a:srgbClr val="F8F7F2"/>
         </a:solidFill>
         <a:effectLst/>
       </p:bgPr>
@@ -21286,7 +21344,9 @@
           <p:nvPr/>
         </p:nvPicPr>
         <p:blipFill>
-          <a:blip r:embed="rId2"/>
+          <a:blip r:embed="rId2">
+            <a:alphaModFix amt="32000"/>
+          </a:blip>
           <a:stretch>
             <a:fillRect/>
           </a:stretch>
@@ -21341,7 +21401,7 @@
             <a:avLst/>
           </a:prstGeom>
           <a:solidFill>
-            <a:srgbClr val="F7F5F0"/>
+            <a:srgbClr val="F8F7F2"/>
           </a:solidFill>
           <a:ln>
             <a:noFill/>
@@ -21509,7 +21569,7 @@
             </a:avLst>
           </a:prstGeom>
           <a:solidFill>
-            <a:srgbClr val="F7F5F0"/>
+            <a:srgbClr val="F8F7F2"/>
           </a:solidFill>
           <a:ln>
             <a:noFill/>
@@ -21566,7 +21626,7 @@
               </a:lnSpc>
             </a:pPr>
             <a:r>
-              <a:rPr sz="1200" i="0" b="0" spc="220">
+              <a:rPr sz="1500" i="0" b="0" spc="220">
                 <a:solidFill>
                   <a:srgbClr val="1C1C1A"/>
                 </a:solidFill>
@@ -21575,7 +21635,7 @@
               <a:t>REVELAÇÃO DE ESSÊNCIA</a:t>
             </a:r>
             <a:r>
-              <a:rPr sz="1200" i="0" b="0" spc="220">
+              <a:rPr sz="1500" i="0" b="0" spc="220">
                 <a:solidFill>
                   <a:srgbClr val="A5A49F"/>
                 </a:solidFill>
@@ -21584,7 +21644,7 @@
               <a:t>   |   </a:t>
             </a:r>
             <a:r>
-              <a:rPr sz="1200" i="0" b="0" spc="220">
+              <a:rPr sz="1500" i="0" b="0" spc="220">
                 <a:solidFill>
                   <a:srgbClr val="1C1C1A"/>
                 </a:solidFill>
@@ -21809,7 +21869,7 @@
     <p:bg>
       <p:bgPr>
         <a:solidFill>
-          <a:srgbClr val="F7F5F0"/>
+          <a:srgbClr val="F8F7F2"/>
         </a:solidFill>
         <a:effectLst/>
       </p:bgPr>
@@ -21830,7 +21890,9 @@
           <p:nvPr/>
         </p:nvPicPr>
         <p:blipFill>
-          <a:blip r:embed="rId2"/>
+          <a:blip r:embed="rId2">
+            <a:alphaModFix amt="32000"/>
+          </a:blip>
           <a:stretch>
             <a:fillRect/>
           </a:stretch>
@@ -21860,7 +21922,7 @@
             <a:avLst/>
           </a:prstGeom>
           <a:solidFill>
-            <a:srgbClr val="F7F5F0"/>
+            <a:srgbClr val="F8F7F2"/>
           </a:solidFill>
           <a:ln>
             <a:noFill/>
@@ -22053,7 +22115,7 @@
             </a:avLst>
           </a:prstGeom>
           <a:solidFill>
-            <a:srgbClr val="F7F5F0"/>
+            <a:srgbClr val="F8F7F2"/>
           </a:solidFill>
           <a:ln>
             <a:noFill/>
@@ -22110,7 +22172,7 @@
               </a:lnSpc>
             </a:pPr>
             <a:r>
-              <a:rPr sz="1200" i="0" b="0" spc="220">
+              <a:rPr sz="1500" i="0" b="0" spc="220">
                 <a:solidFill>
                   <a:srgbClr val="1C1C1A"/>
                 </a:solidFill>
@@ -22119,7 +22181,7 @@
               <a:t>REVELAÇÃO DE ESSÊNCIA</a:t>
             </a:r>
             <a:r>
-              <a:rPr sz="1200" i="0" b="0" spc="220">
+              <a:rPr sz="1500" i="0" b="0" spc="220">
                 <a:solidFill>
                   <a:srgbClr val="A5A49F"/>
                 </a:solidFill>
@@ -22128,7 +22190,7 @@
               <a:t>   |   </a:t>
             </a:r>
             <a:r>
-              <a:rPr sz="1200" i="0" b="0" spc="220">
+              <a:rPr sz="1500" i="0" b="0" spc="220">
                 <a:solidFill>
                   <a:srgbClr val="1C1C1A"/>
                 </a:solidFill>
@@ -22284,7 +22346,7 @@
               </a:lnSpc>
             </a:pPr>
             <a:r>
-              <a:rPr sz="2800" i="0" b="0">
+              <a:rPr sz="2900" i="0" b="0">
                 <a:solidFill>
                   <a:srgbClr val="A9724A"/>
                 </a:solidFill>
@@ -22401,7 +22463,7 @@
               </a:lnSpc>
             </a:pPr>
             <a:r>
-              <a:rPr sz="2800" i="0" b="0">
+              <a:rPr sz="2900" i="0" b="0">
                 <a:solidFill>
                   <a:srgbClr val="A9724A"/>
                 </a:solidFill>

--- a/clientes/flavia-muccelin/Revelacao-de-Essencia-Flavia-Pereira-Muccelin.pptx
+++ b/clientes/flavia-muccelin/Revelacao-de-Essencia-Flavia-Pereira-Muccelin.pptx
@@ -3415,7 +3415,7 @@
                 <a:solidFill>
                   <a:srgbClr val="A5A49F"/>
                 </a:solidFill>
-                <a:latin typeface="Outfit 1"/>
+                <a:latin typeface="Outfit 2"/>
               </a:rPr>
               <a:t>A ORIGEM</a:t>
             </a:r>
@@ -3454,7 +3454,7 @@
                 <a:solidFill>
                   <a:srgbClr val="1C1C1A"/>
                 </a:solidFill>
-                <a:latin typeface="Outfit 2 Light"/>
+                <a:latin typeface="Outfit 1 Light"/>
               </a:rPr>
               <a:t>As experiências que a formaram</a:t>
             </a:r>
@@ -3579,25 +3579,25 @@
               </a:lnSpc>
             </a:pPr>
             <a:r>
-              <a:rPr sz="1500" i="0" b="0" spc="220">
+              <a:rPr sz="1700" i="0" b="0" spc="220">
                 <a:solidFill>
                   <a:srgbClr val="1C1C1A"/>
                 </a:solidFill>
-                <a:latin typeface="Outfit 1"/>
+                <a:latin typeface="Outfit 2"/>
               </a:rPr>
               <a:t>REVELAÇÃO DE ESSÊNCIA</a:t>
             </a:r>
             <a:r>
-              <a:rPr sz="1500" i="0" b="0" spc="220">
+              <a:rPr sz="1700" i="0" b="0" spc="220">
                 <a:solidFill>
                   <a:srgbClr val="A5A49F"/>
                 </a:solidFill>
-                <a:latin typeface="Outfit 1"/>
+                <a:latin typeface="Outfit 2"/>
               </a:rPr>
               <a:t>   |   </a:t>
             </a:r>
             <a:r>
-              <a:rPr sz="1500" i="0" b="0" spc="220">
+              <a:rPr sz="1700" i="0" b="0" spc="220">
                 <a:solidFill>
                   <a:srgbClr val="1C1C1A"/>
                 </a:solidFill>
@@ -3684,7 +3684,7 @@
                 <a:solidFill>
                   <a:srgbClr val="A9724A"/>
                 </a:solidFill>
-                <a:latin typeface="Outfit 2 Semi-Bold"/>
+                <a:latin typeface="Outfit 1 Semi-Bold"/>
               </a:rPr>
               <a:t>01</a:t>
             </a:r>
@@ -3723,7 +3723,7 @@
                 <a:solidFill>
                   <a:srgbClr val="1C1C1A"/>
                 </a:solidFill>
-                <a:latin typeface="Outfit 2 Light"/>
+                <a:latin typeface="Outfit 1 Light"/>
               </a:rPr>
               <a:t>A escassez</a:t>
             </a:r>
@@ -3762,7 +3762,7 @@
                 <a:solidFill>
                   <a:srgbClr val="6B6B66"/>
                 </a:solidFill>
-                <a:latin typeface="Outfit 2 Light"/>
+                <a:latin typeface="Outfit 1 Light"/>
               </a:rPr>
               <a:t>A Flávia cresceu em uma realidade de poucos recursos.</a:t>
             </a:r>
@@ -3801,7 +3801,7 @@
                 <a:solidFill>
                   <a:srgbClr val="A5A49F"/>
                 </a:solidFill>
-                <a:latin typeface="Outfit 2 Semi-Bold"/>
+                <a:latin typeface="Outfit 1 Semi-Bold"/>
               </a:rPr>
               <a:t>O QUE ISSO REVELA</a:t>
             </a:r>
@@ -3840,7 +3840,7 @@
                 <a:solidFill>
                   <a:srgbClr val="1C1C1A"/>
                 </a:solidFill>
-                <a:latin typeface="Outfit 2 Light"/>
+                <a:latin typeface="Outfit 1 Light"/>
               </a:rPr>
               <a:t>A vontade de ampliar possibilidades e não aceitar a condição presente como limite.</a:t>
             </a:r>
@@ -3923,7 +3923,7 @@
                 <a:solidFill>
                   <a:srgbClr val="A9724A"/>
                 </a:solidFill>
-                <a:latin typeface="Outfit 2 Semi-Bold"/>
+                <a:latin typeface="Outfit 1 Semi-Bold"/>
               </a:rPr>
               <a:t>02</a:t>
             </a:r>
@@ -3962,7 +3962,7 @@
                 <a:solidFill>
                   <a:srgbClr val="1C1C1A"/>
                 </a:solidFill>
-                <a:latin typeface="Outfit 2 Light"/>
+                <a:latin typeface="Outfit 1 Light"/>
               </a:rPr>
               <a:t>O portão</a:t>
             </a:r>
@@ -4001,7 +4001,7 @@
                 <a:solidFill>
                   <a:srgbClr val="6B6B66"/>
                 </a:solidFill>
-                <a:latin typeface="Outfit 2 Light"/>
+                <a:latin typeface="Outfit 1 Light"/>
               </a:rPr>
               <a:t>Ainda adolescente, a Flávia entrava escondida na casa dos donos da fazenda onde o pai trabalhava e se imaginava vivendo aquela realidade. Anos depois, tornou-se proprietária daquele mesmo lugar.</a:t>
             </a:r>
@@ -4040,7 +4040,7 @@
                 <a:solidFill>
                   <a:srgbClr val="A5A49F"/>
                 </a:solidFill>
-                <a:latin typeface="Outfit 2 Semi-Bold"/>
+                <a:latin typeface="Outfit 1 Semi-Bold"/>
               </a:rPr>
               <a:t>O QUE ISSO REVELA</a:t>
             </a:r>
@@ -4079,7 +4079,7 @@
                 <a:solidFill>
                   <a:srgbClr val="1C1C1A"/>
                 </a:solidFill>
-                <a:latin typeface="Outfit 2 Light"/>
+                <a:latin typeface="Outfit 1 Light"/>
               </a:rPr>
               <a:t>A capacidade de se enxergar dentro de uma realidade antes de ela existir concretamente.</a:t>
             </a:r>
@@ -4239,7 +4239,7 @@
                 <a:solidFill>
                   <a:srgbClr val="A5A49F"/>
                 </a:solidFill>
-                <a:latin typeface="Outfit 1"/>
+                <a:latin typeface="Outfit 2"/>
               </a:rPr>
               <a:t>A ORIGEM</a:t>
             </a:r>
@@ -4278,7 +4278,7 @@
                 <a:solidFill>
                   <a:srgbClr val="1C1C1A"/>
                 </a:solidFill>
-                <a:latin typeface="Outfit 2 Light"/>
+                <a:latin typeface="Outfit 1 Light"/>
               </a:rPr>
               <a:t>As experiências que a formaram</a:t>
             </a:r>
@@ -4403,25 +4403,25 @@
               </a:lnSpc>
             </a:pPr>
             <a:r>
-              <a:rPr sz="1500" i="0" b="0" spc="220">
+              <a:rPr sz="1700" i="0" b="0" spc="220">
                 <a:solidFill>
                   <a:srgbClr val="1C1C1A"/>
                 </a:solidFill>
-                <a:latin typeface="Outfit 1"/>
+                <a:latin typeface="Outfit 2"/>
               </a:rPr>
               <a:t>REVELAÇÃO DE ESSÊNCIA</a:t>
             </a:r>
             <a:r>
-              <a:rPr sz="1500" i="0" b="0" spc="220">
+              <a:rPr sz="1700" i="0" b="0" spc="220">
                 <a:solidFill>
                   <a:srgbClr val="A5A49F"/>
                 </a:solidFill>
-                <a:latin typeface="Outfit 1"/>
+                <a:latin typeface="Outfit 2"/>
               </a:rPr>
               <a:t>   |   </a:t>
             </a:r>
             <a:r>
-              <a:rPr sz="1500" i="0" b="0" spc="220">
+              <a:rPr sz="1700" i="0" b="0" spc="220">
                 <a:solidFill>
                   <a:srgbClr val="1C1C1A"/>
                 </a:solidFill>
@@ -4508,7 +4508,7 @@
                 <a:solidFill>
                   <a:srgbClr val="A9724A"/>
                 </a:solidFill>
-                <a:latin typeface="Outfit 2 Semi-Bold"/>
+                <a:latin typeface="Outfit 1 Semi-Bold"/>
               </a:rPr>
               <a:t>03</a:t>
             </a:r>
@@ -4547,7 +4547,7 @@
                 <a:solidFill>
                   <a:srgbClr val="1C1C1A"/>
                 </a:solidFill>
-                <a:latin typeface="Outfit 2 Light"/>
+                <a:latin typeface="Outfit 1 Light"/>
               </a:rPr>
               <a:t>O trabalho e o estudo</a:t>
             </a:r>
@@ -4586,7 +4586,7 @@
                 <a:solidFill>
                   <a:srgbClr val="6B6B66"/>
                 </a:solidFill>
-                <a:latin typeface="Outfit 2 Light"/>
+                <a:latin typeface="Outfit 1 Light"/>
               </a:rPr>
               <a:t>Trabalho, faculdade, bicicleta e futsal como caminho para conquistar uma bolsa de estudos.</a:t>
             </a:r>
@@ -4625,7 +4625,7 @@
                 <a:solidFill>
                   <a:srgbClr val="A5A49F"/>
                 </a:solidFill>
-                <a:latin typeface="Outfit 2 Semi-Bold"/>
+                <a:latin typeface="Outfit 1 Semi-Bold"/>
               </a:rPr>
               <a:t>O QUE ISSO REVELA</a:t>
             </a:r>
@@ -4664,7 +4664,7 @@
                 <a:solidFill>
                   <a:srgbClr val="1C1C1A"/>
                 </a:solidFill>
-                <a:latin typeface="Outfit 2 Light"/>
+                <a:latin typeface="Outfit 1 Light"/>
               </a:rPr>
               <a:t>Para a Flávia, enxergar uma possibilidade exige movimento para torná-la real.</a:t>
             </a:r>
@@ -4747,7 +4747,7 @@
                 <a:solidFill>
                   <a:srgbClr val="A9724A"/>
                 </a:solidFill>
-                <a:latin typeface="Outfit 2 Semi-Bold"/>
+                <a:latin typeface="Outfit 1 Semi-Bold"/>
               </a:rPr>
               <a:t>04</a:t>
             </a:r>
@@ -4786,7 +4786,7 @@
                 <a:solidFill>
                   <a:srgbClr val="1C1C1A"/>
                 </a:solidFill>
-                <a:latin typeface="Outfit 2 Light"/>
+                <a:latin typeface="Outfit 1 Light"/>
               </a:rPr>
               <a:t>A trajetória dos pais</a:t>
             </a:r>
@@ -4825,7 +4825,7 @@
                 <a:solidFill>
                   <a:srgbClr val="6B6B66"/>
                 </a:solidFill>
-                <a:latin typeface="Outfit 2 Light"/>
+                <a:latin typeface="Outfit 1 Light"/>
               </a:rPr>
               <a:t>A Flávia cresceu vendo os pais recomeçarem sem abandonar a honestidade, a fé, o trabalho e a família.</a:t>
             </a:r>
@@ -4864,7 +4864,7 @@
                 <a:solidFill>
                   <a:srgbClr val="A5A49F"/>
                 </a:solidFill>
-                <a:latin typeface="Outfit 2 Semi-Bold"/>
+                <a:latin typeface="Outfit 1 Semi-Bold"/>
               </a:rPr>
               <a:t>O QUE ISSO REVELA</a:t>
             </a:r>
@@ -4903,7 +4903,7 @@
                 <a:solidFill>
                   <a:srgbClr val="1C1C1A"/>
                 </a:solidFill>
-                <a:latin typeface="Outfit 2 Light"/>
+                <a:latin typeface="Outfit 1 Light"/>
               </a:rPr>
               <a:t>A forma de construir importa tanto quanto aquilo que é conquistado.</a:t>
             </a:r>
@@ -5040,7 +5040,7 @@
                 <a:solidFill>
                   <a:srgbClr val="A9724A"/>
                 </a:solidFill>
-                <a:latin typeface="Outfit 2 Semi-Bold"/>
+                <a:latin typeface="Outfit 1 Semi-Bold"/>
               </a:rPr>
               <a:t>02</a:t>
             </a:r>
@@ -5079,7 +5079,7 @@
                 <a:solidFill>
                   <a:srgbClr val="1C1C1A"/>
                 </a:solidFill>
-                <a:latin typeface="Outfit 2 Light"/>
+                <a:latin typeface="Outfit 1 Light"/>
               </a:rPr>
               <a:t>As tensões</a:t>
             </a:r>
@@ -5410,7 +5410,7 @@
                 <a:solidFill>
                   <a:srgbClr val="A5A49F"/>
                 </a:solidFill>
-                <a:latin typeface="Outfit 1"/>
+                <a:latin typeface="Outfit 2"/>
               </a:rPr>
               <a:t>AS TENSÕES</a:t>
             </a:r>
@@ -5449,7 +5449,7 @@
                 <a:solidFill>
                   <a:srgbClr val="1C1C1A"/>
                 </a:solidFill>
-                <a:latin typeface="Outfit 2 Light"/>
+                <a:latin typeface="Outfit 1 Light"/>
               </a:rPr>
               <a:t>As tensões que a colocaram em movimento</a:t>
             </a:r>
@@ -5574,25 +5574,25 @@
               </a:lnSpc>
             </a:pPr>
             <a:r>
-              <a:rPr sz="1500" i="0" b="0" spc="220">
+              <a:rPr sz="1700" i="0" b="0" spc="220">
                 <a:solidFill>
                   <a:srgbClr val="1C1C1A"/>
                 </a:solidFill>
-                <a:latin typeface="Outfit 1"/>
+                <a:latin typeface="Outfit 2"/>
               </a:rPr>
               <a:t>REVELAÇÃO DE ESSÊNCIA</a:t>
             </a:r>
             <a:r>
-              <a:rPr sz="1500" i="0" b="0" spc="220">
+              <a:rPr sz="1700" i="0" b="0" spc="220">
                 <a:solidFill>
                   <a:srgbClr val="A5A49F"/>
                 </a:solidFill>
-                <a:latin typeface="Outfit 1"/>
+                <a:latin typeface="Outfit 2"/>
               </a:rPr>
               <a:t>   |   </a:t>
             </a:r>
             <a:r>
-              <a:rPr sz="1500" i="0" b="0" spc="220">
+              <a:rPr sz="1700" i="0" b="0" spc="220">
                 <a:solidFill>
                   <a:srgbClr val="1C1C1A"/>
                 </a:solidFill>
@@ -5635,7 +5635,7 @@
                 <a:solidFill>
                   <a:srgbClr val="A5A49F"/>
                 </a:solidFill>
-                <a:latin typeface="Outfit 2 Light"/>
+                <a:latin typeface="Outfit 1 Light"/>
               </a:rPr>
               <a:t>Existe uma lógica recorrente na trajetória da Flávia.</a:t>
             </a:r>
@@ -5718,7 +5718,7 @@
                 <a:solidFill>
                   <a:srgbClr val="A5A49F"/>
                 </a:solidFill>
-                <a:latin typeface="Outfit 2 Semi-Bold"/>
+                <a:latin typeface="Outfit 1 Semi-Bold"/>
               </a:rPr>
               <a:t>A REALIDADE DIZIA</a:t>
             </a:r>
@@ -5757,7 +5757,7 @@
                 <a:solidFill>
                   <a:srgbClr val="6B6B66"/>
                 </a:solidFill>
-                <a:latin typeface="Outfit 2 Light"/>
+                <a:latin typeface="Outfit 1 Light"/>
               </a:rPr>
               <a:t>“Essa é a sua condição.”</a:t>
             </a:r>
@@ -5840,7 +5840,7 @@
                 <a:solidFill>
                   <a:srgbClr val="1C1C1A"/>
                 </a:solidFill>
-                <a:latin typeface="Outfit 2 Light"/>
+                <a:latin typeface="Outfit 1 Light"/>
               </a:rPr>
               <a:t>A Flávia enxergava outra.</a:t>
             </a:r>
@@ -5923,7 +5923,7 @@
                 <a:solidFill>
                   <a:srgbClr val="A5A49F"/>
                 </a:solidFill>
-                <a:latin typeface="Outfit 2 Semi-Bold"/>
+                <a:latin typeface="Outfit 1 Semi-Bold"/>
               </a:rPr>
               <a:t>O CARGO DIZIA</a:t>
             </a:r>
@@ -5962,7 +5962,7 @@
                 <a:solidFill>
                   <a:srgbClr val="6B6B66"/>
                 </a:solidFill>
-                <a:latin typeface="Outfit 2 Light"/>
+                <a:latin typeface="Outfit 1 Light"/>
               </a:rPr>
               <a:t>“Até aqui você pode chegar.”</a:t>
             </a:r>
@@ -6045,7 +6045,7 @@
                 <a:solidFill>
                   <a:srgbClr val="1C1C1A"/>
                 </a:solidFill>
-                <a:latin typeface="Outfit 2 Light"/>
+                <a:latin typeface="Outfit 1 Light"/>
               </a:rPr>
               <a:t>A Flávia queria mais.</a:t>
             </a:r>
@@ -6128,7 +6128,7 @@
                 <a:solidFill>
                   <a:srgbClr val="A5A49F"/>
                 </a:solidFill>
-                <a:latin typeface="Outfit 2 Semi-Bold"/>
+                <a:latin typeface="Outfit 1 Semi-Bold"/>
               </a:rPr>
               <a:t>AS MARCAS PRONTAS DIZIAM</a:t>
             </a:r>
@@ -6167,7 +6167,7 @@
                 <a:solidFill>
                   <a:srgbClr val="6B6B66"/>
                 </a:solidFill>
-                <a:latin typeface="Outfit 2 Light"/>
+                <a:latin typeface="Outfit 1 Light"/>
               </a:rPr>
               <a:t>“É assim que deve ser feito.”</a:t>
             </a:r>
@@ -6250,7 +6250,7 @@
                 <a:solidFill>
                   <a:srgbClr val="1C1C1A"/>
                 </a:solidFill>
-                <a:latin typeface="Outfit 2 Light"/>
+                <a:latin typeface="Outfit 1 Light"/>
               </a:rPr>
               <a:t>A Flávia queria fazer do seu jeito.</a:t>
             </a:r>
@@ -6454,7 +6454,7 @@
                 <a:solidFill>
                   <a:srgbClr val="A5A49F"/>
                 </a:solidFill>
-                <a:latin typeface="Outfit 1"/>
+                <a:latin typeface="Outfit 2"/>
               </a:rPr>
               <a:t>AS TENSÕES</a:t>
             </a:r>
@@ -6493,7 +6493,7 @@
                 <a:solidFill>
                   <a:srgbClr val="1C1C1A"/>
                 </a:solidFill>
-                <a:latin typeface="Outfit 2 Light"/>
+                <a:latin typeface="Outfit 1 Light"/>
               </a:rPr>
               <a:t>As tensões que a colocaram em movimento</a:t>
             </a:r>
@@ -6618,25 +6618,25 @@
               </a:lnSpc>
             </a:pPr>
             <a:r>
-              <a:rPr sz="1500" i="0" b="0" spc="220">
+              <a:rPr sz="1700" i="0" b="0" spc="220">
                 <a:solidFill>
                   <a:srgbClr val="1C1C1A"/>
                 </a:solidFill>
-                <a:latin typeface="Outfit 1"/>
+                <a:latin typeface="Outfit 2"/>
               </a:rPr>
               <a:t>REVELAÇÃO DE ESSÊNCIA</a:t>
             </a:r>
             <a:r>
-              <a:rPr sz="1500" i="0" b="0" spc="220">
+              <a:rPr sz="1700" i="0" b="0" spc="220">
                 <a:solidFill>
                   <a:srgbClr val="A5A49F"/>
                 </a:solidFill>
-                <a:latin typeface="Outfit 1"/>
+                <a:latin typeface="Outfit 2"/>
               </a:rPr>
               <a:t>   |   </a:t>
             </a:r>
             <a:r>
-              <a:rPr sz="1500" i="0" b="0" spc="220">
+              <a:rPr sz="1700" i="0" b="0" spc="220">
                 <a:solidFill>
                   <a:srgbClr val="1C1C1A"/>
                 </a:solidFill>
@@ -6723,7 +6723,7 @@
                 <a:solidFill>
                   <a:srgbClr val="A5A49F"/>
                 </a:solidFill>
-                <a:latin typeface="Outfit 2 Semi-Bold"/>
+                <a:latin typeface="Outfit 1 Semi-Bold"/>
               </a:rPr>
               <a:t>A MATERNIDADE EXIGIU UMA ESCOLHA</a:t>
             </a:r>
@@ -6762,7 +6762,7 @@
                 <a:solidFill>
                   <a:srgbClr val="6B6B66"/>
                 </a:solidFill>
-                <a:latin typeface="Outfit 2 Light"/>
+                <a:latin typeface="Outfit 1 Light"/>
               </a:rPr>
               <a:t>Conciliar a maternidade e o empreendedorismo não era possível como ela desejava naquele momento.</a:t>
             </a:r>
@@ -6845,7 +6845,7 @@
                 <a:solidFill>
                   <a:srgbClr val="1C1C1A"/>
                 </a:solidFill>
-                <a:latin typeface="Outfit 2 Light"/>
+                <a:latin typeface="Outfit 1 Light"/>
               </a:rPr>
               <a:t>Ela parou e, anos depois, construiu um caminho de volta.</a:t>
             </a:r>
@@ -6928,7 +6928,7 @@
                 <a:solidFill>
                   <a:srgbClr val="A5A49F"/>
                 </a:solidFill>
-                <a:latin typeface="Outfit 2 Semi-Bold"/>
+                <a:latin typeface="Outfit 1 Semi-Bold"/>
               </a:rPr>
               <a:t>AS SOBRAS TINHAM UM DESTINO</a:t>
             </a:r>
@@ -6967,7 +6967,7 @@
                 <a:solidFill>
                   <a:srgbClr val="6B6B66"/>
                 </a:solidFill>
-                <a:latin typeface="Outfit 2 Light"/>
+                <a:latin typeface="Outfit 1 Light"/>
               </a:rPr>
               <a:t>“O descarte.”</a:t>
             </a:r>
@@ -7050,7 +7050,7 @@
                 <a:solidFill>
                   <a:srgbClr val="1C1C1A"/>
                 </a:solidFill>
-                <a:latin typeface="Outfit 2 Light"/>
+                <a:latin typeface="Outfit 1 Light"/>
               </a:rPr>
               <a:t>A Flávia enxergou matéria para uma nova criação.</a:t>
             </a:r>
@@ -7133,7 +7133,7 @@
                 <a:solidFill>
                   <a:srgbClr val="1C1C1A"/>
                 </a:solidFill>
-                <a:latin typeface="Outfit 2 Light"/>
+                <a:latin typeface="Outfit 1 Light"/>
               </a:rPr>
               <a:t>Quando aquilo que está dado não corresponde ao que a Flávia enxerga como possível, ela entra em movimento.</a:t>
             </a:r>
@@ -7270,7 +7270,7 @@
                 <a:solidFill>
                   <a:srgbClr val="A9724A"/>
                 </a:solidFill>
-                <a:latin typeface="Outfit 2 Semi-Bold"/>
+                <a:latin typeface="Outfit 1 Semi-Bold"/>
               </a:rPr>
               <a:t>03</a:t>
             </a:r>
@@ -7309,7 +7309,7 @@
                 <a:solidFill>
                   <a:srgbClr val="1C1C1A"/>
                 </a:solidFill>
-                <a:latin typeface="Outfit 2 Light"/>
+                <a:latin typeface="Outfit 1 Light"/>
               </a:rPr>
               <a:t>Os padrões</a:t>
             </a:r>
@@ -7640,7 +7640,7 @@
                 <a:solidFill>
                   <a:srgbClr val="A5A49F"/>
                 </a:solidFill>
-                <a:latin typeface="Outfit 1"/>
+                <a:latin typeface="Outfit 2"/>
               </a:rPr>
               <a:t>OS PADRÕES</a:t>
             </a:r>
@@ -7679,7 +7679,7 @@
                 <a:solidFill>
                   <a:srgbClr val="1C1C1A"/>
                 </a:solidFill>
-                <a:latin typeface="Outfit 2 Light"/>
+                <a:latin typeface="Outfit 1 Light"/>
               </a:rPr>
               <a:t>O padrão invisível</a:t>
             </a:r>
@@ -7804,25 +7804,25 @@
               </a:lnSpc>
             </a:pPr>
             <a:r>
-              <a:rPr sz="1500" i="0" b="0" spc="220">
+              <a:rPr sz="1700" i="0" b="0" spc="220">
                 <a:solidFill>
                   <a:srgbClr val="1C1C1A"/>
                 </a:solidFill>
-                <a:latin typeface="Outfit 1"/>
+                <a:latin typeface="Outfit 2"/>
               </a:rPr>
               <a:t>REVELAÇÃO DE ESSÊNCIA</a:t>
             </a:r>
             <a:r>
-              <a:rPr sz="1500" i="0" b="0" spc="220">
+              <a:rPr sz="1700" i="0" b="0" spc="220">
                 <a:solidFill>
                   <a:srgbClr val="A5A49F"/>
                 </a:solidFill>
-                <a:latin typeface="Outfit 1"/>
+                <a:latin typeface="Outfit 2"/>
               </a:rPr>
               <a:t>   |   </a:t>
             </a:r>
             <a:r>
-              <a:rPr sz="1500" i="0" b="0" spc="220">
+              <a:rPr sz="1700" i="0" b="0" spc="220">
                 <a:solidFill>
                   <a:srgbClr val="1C1C1A"/>
                 </a:solidFill>
@@ -7865,7 +7865,7 @@
                 <a:solidFill>
                   <a:srgbClr val="A5A49F"/>
                 </a:solidFill>
-                <a:latin typeface="Outfit 2 Light"/>
+                <a:latin typeface="Outfit 1 Light"/>
               </a:rPr>
               <a:t>As situações são diferentes. A resposta da Flávia segue a mesma lógica.</a:t>
             </a:r>
@@ -7948,7 +7948,7 @@
                 <a:solidFill>
                   <a:srgbClr val="1C1C1A"/>
                 </a:solidFill>
-                <a:latin typeface="Outfit 2 Light"/>
+                <a:latin typeface="Outfit 1 Light"/>
               </a:rPr>
               <a:t>Ela encontra uma realidade ou um limite.</a:t>
             </a:r>
@@ -8075,7 +8075,7 @@
                 <a:solidFill>
                   <a:srgbClr val="1C1C1A"/>
                 </a:solidFill>
-                <a:latin typeface="Outfit 2 Light"/>
+                <a:latin typeface="Outfit 1 Light"/>
               </a:rPr>
               <a:t>Enxerga que aquilo pode ser diferente.</a:t>
             </a:r>
@@ -8202,7 +8202,7 @@
                 <a:solidFill>
                   <a:srgbClr val="1C1C1A"/>
                 </a:solidFill>
-                <a:latin typeface="Outfit 2 Light"/>
+                <a:latin typeface="Outfit 1 Light"/>
               </a:rPr>
               <a:t>Constrói um caminho para transformar essa possibilidade em realidade.</a:t>
             </a:r>
@@ -8285,7 +8285,7 @@
                 <a:solidFill>
                   <a:srgbClr val="6B6B66"/>
                 </a:solidFill>
-                <a:latin typeface="Outfit 2 Light"/>
+                <a:latin typeface="Outfit 1 Light"/>
               </a:rPr>
               <a:t>O padrão está na forma como a Flávia responde quando percebe que existe uma possibilidade além daquilo que está dado.</a:t>
             </a:r>
@@ -8445,7 +8445,7 @@
                 <a:solidFill>
                   <a:srgbClr val="A5A49F"/>
                 </a:solidFill>
-                <a:latin typeface="Outfit 1"/>
+                <a:latin typeface="Outfit 2"/>
               </a:rPr>
               <a:t>OS PADRÕES</a:t>
             </a:r>
@@ -8484,7 +8484,7 @@
                 <a:solidFill>
                   <a:srgbClr val="1C1C1A"/>
                 </a:solidFill>
-                <a:latin typeface="Outfit 2 Light"/>
+                <a:latin typeface="Outfit 1 Light"/>
               </a:rPr>
               <a:t>O movimento que se repete</a:t>
             </a:r>
@@ -8609,25 +8609,25 @@
               </a:lnSpc>
             </a:pPr>
             <a:r>
-              <a:rPr sz="1500" i="0" b="0" spc="220">
+              <a:rPr sz="1700" i="0" b="0" spc="220">
                 <a:solidFill>
                   <a:srgbClr val="1C1C1A"/>
                 </a:solidFill>
-                <a:latin typeface="Outfit 1"/>
+                <a:latin typeface="Outfit 2"/>
               </a:rPr>
               <a:t>REVELAÇÃO DE ESSÊNCIA</a:t>
             </a:r>
             <a:r>
-              <a:rPr sz="1500" i="0" b="0" spc="220">
+              <a:rPr sz="1700" i="0" b="0" spc="220">
                 <a:solidFill>
                   <a:srgbClr val="A5A49F"/>
                 </a:solidFill>
-                <a:latin typeface="Outfit 1"/>
+                <a:latin typeface="Outfit 2"/>
               </a:rPr>
               <a:t>   |   </a:t>
             </a:r>
             <a:r>
-              <a:rPr sz="1500" i="0" b="0" spc="220">
+              <a:rPr sz="1700" i="0" b="0" spc="220">
                 <a:solidFill>
                   <a:srgbClr val="1C1C1A"/>
                 </a:solidFill>
@@ -8714,7 +8714,7 @@
                 <a:solidFill>
                   <a:srgbClr val="1C1C1A"/>
                 </a:solidFill>
-                <a:latin typeface="Outfit 2 Light"/>
+                <a:latin typeface="Outfit 1 Light"/>
               </a:rPr>
               <a:t>Enxerga a realidade como ela é</a:t>
             </a:r>
@@ -8841,7 +8841,7 @@
                 <a:solidFill>
                   <a:srgbClr val="1C1C1A"/>
                 </a:solidFill>
-                <a:latin typeface="Outfit 2 Light"/>
+                <a:latin typeface="Outfit 1 Light"/>
               </a:rPr>
               <a:t>Percebe que aquilo não precisa ser definitivo</a:t>
             </a:r>
@@ -8968,7 +8968,7 @@
                 <a:solidFill>
                   <a:srgbClr val="1C1C1A"/>
                 </a:solidFill>
-                <a:latin typeface="Outfit 2 Light"/>
+                <a:latin typeface="Outfit 1 Light"/>
               </a:rPr>
               <a:t>Enxerga outra possibilidade</a:t>
             </a:r>
@@ -9095,7 +9095,7 @@
                 <a:solidFill>
                   <a:srgbClr val="1C1C1A"/>
                 </a:solidFill>
-                <a:latin typeface="Outfit 2 Light"/>
+                <a:latin typeface="Outfit 1 Light"/>
               </a:rPr>
               <a:t>Procura um caminho</a:t>
             </a:r>
@@ -9222,7 +9222,7 @@
                 <a:solidFill>
                   <a:srgbClr val="1C1C1A"/>
                 </a:solidFill>
-                <a:latin typeface="Outfit 2 Light"/>
+                <a:latin typeface="Outfit 1 Light"/>
               </a:rPr>
               <a:t>Busca conhecimento, mobiliza pessoas e recursos</a:t>
             </a:r>
@@ -9349,7 +9349,7 @@
                 <a:solidFill>
                   <a:srgbClr val="1C1C1A"/>
                 </a:solidFill>
-                <a:latin typeface="Outfit 2 Light"/>
+                <a:latin typeface="Outfit 1 Light"/>
               </a:rPr>
               <a:t>Transforma a possibilidade em realidade</a:t>
             </a:r>
@@ -9432,7 +9432,7 @@
                 <a:solidFill>
                   <a:srgbClr val="1C1C1A"/>
                 </a:solidFill>
-                <a:latin typeface="Outfit 2 Light"/>
+                <a:latin typeface="Outfit 1 Light"/>
               </a:rPr>
               <a:t>Enxergar além</a:t>
             </a:r>
@@ -9441,7 +9441,7 @@
                 <a:solidFill>
                   <a:srgbClr val="A9724A"/>
                 </a:solidFill>
-                <a:latin typeface="Outfit 2 Light"/>
+                <a:latin typeface="Outfit 1 Light"/>
               </a:rPr>
               <a:t>  →  </a:t>
             </a:r>
@@ -9450,7 +9450,7 @@
                 <a:solidFill>
                   <a:srgbClr val="1C1C1A"/>
                 </a:solidFill>
-                <a:latin typeface="Outfit 2 Light"/>
+                <a:latin typeface="Outfit 1 Light"/>
               </a:rPr>
               <a:t>colocar em movimento</a:t>
             </a:r>
@@ -9459,7 +9459,7 @@
                 <a:solidFill>
                   <a:srgbClr val="A9724A"/>
                 </a:solidFill>
-                <a:latin typeface="Outfit 2 Light"/>
+                <a:latin typeface="Outfit 1 Light"/>
               </a:rPr>
               <a:t>  →  </a:t>
             </a:r>
@@ -9468,7 +9468,7 @@
                 <a:solidFill>
                   <a:srgbClr val="1C1C1A"/>
                 </a:solidFill>
-                <a:latin typeface="Outfit 2 Light"/>
+                <a:latin typeface="Outfit 1 Light"/>
               </a:rPr>
               <a:t>fazer existir</a:t>
             </a:r>
@@ -9605,7 +9605,7 @@
                 <a:solidFill>
                   <a:srgbClr val="A5A49F"/>
                 </a:solidFill>
-                <a:latin typeface="Outfit 1"/>
+                <a:latin typeface="Outfit 2"/>
               </a:rPr>
               <a:t>OS PADRÕES</a:t>
             </a:r>
@@ -9644,7 +9644,7 @@
                 <a:solidFill>
                   <a:srgbClr val="A5A49F"/>
                 </a:solidFill>
-                <a:latin typeface="Outfit 2 Light"/>
+                <a:latin typeface="Outfit 1 Light"/>
               </a:rPr>
               <a:t>Ao longo da sua trajetória, a Flávia repete um mesmo movimento:</a:t>
             </a:r>
@@ -9683,7 +9683,7 @@
                 <a:solidFill>
                   <a:srgbClr val="1C1C1A"/>
                 </a:solidFill>
-                <a:latin typeface="Outfit 2 Light"/>
+                <a:latin typeface="Outfit 1 Light"/>
               </a:rPr>
               <a:t>A Flávia não aceita que aquilo que</a:t>
             </a:r>
@@ -9699,7 +9699,7 @@
                 <a:solidFill>
                   <a:srgbClr val="1C1C1A"/>
                 </a:solidFill>
-                <a:latin typeface="Outfit 2 Light"/>
+                <a:latin typeface="Outfit 1 Light"/>
               </a:rPr>
               <a:t>existe determine aquilo que pode existir.</a:t>
             </a:r>
@@ -10007,7 +10007,7 @@
                 <a:solidFill>
                   <a:srgbClr val="A9724A"/>
                 </a:solidFill>
-                <a:latin typeface="Outfit 2 Semi-Bold"/>
+                <a:latin typeface="Outfit 1 Semi-Bold"/>
               </a:rPr>
               <a:t>04</a:t>
             </a:r>
@@ -10046,7 +10046,7 @@
                 <a:solidFill>
                   <a:srgbClr val="1C1C1A"/>
                 </a:solidFill>
-                <a:latin typeface="Outfit 2 Light"/>
+                <a:latin typeface="Outfit 1 Light"/>
               </a:rPr>
               <a:t>O Ikigai</a:t>
             </a:r>
@@ -10431,7 +10431,7 @@
                 <a:solidFill>
                   <a:srgbClr val="1C1C1A"/>
                 </a:solidFill>
-                <a:latin typeface="Outfit 2 Light"/>
+                <a:latin typeface="Outfit 1 Light"/>
               </a:rPr>
               <a:t>Flávia Pereira Muccelin  |  Origem Identitária da Fundadora</a:t>
             </a:r>
@@ -10538,7 +10538,7 @@
                 <a:solidFill>
                   <a:srgbClr val="1C1C1A"/>
                 </a:solidFill>
-                <a:latin typeface="Outfit 2 Light"/>
+                <a:latin typeface="Outfit 1 Light"/>
               </a:rPr>
               <a:t>Método Marca</a:t>
             </a:r>
@@ -10554,7 +10554,7 @@
                 <a:solidFill>
                   <a:srgbClr val="1C1C1A"/>
                 </a:solidFill>
-                <a:latin typeface="Outfit 2 Light"/>
+                <a:latin typeface="Outfit 1 Light"/>
               </a:rPr>
               <a:t>com Essência ©</a:t>
             </a:r>
@@ -10637,7 +10637,7 @@
                 <a:solidFill>
                   <a:srgbClr val="1C1C1A"/>
                 </a:solidFill>
-                <a:latin typeface="Outfit 1"/>
+                <a:latin typeface="Outfit 2"/>
               </a:rPr>
               <a:t>SETEMBRO/2026</a:t>
             </a:r>
@@ -10797,7 +10797,7 @@
                 <a:solidFill>
                   <a:srgbClr val="A5A49F"/>
                 </a:solidFill>
-                <a:latin typeface="Outfit 1"/>
+                <a:latin typeface="Outfit 2"/>
               </a:rPr>
               <a:t>O IKIGAI</a:t>
             </a:r>
@@ -10836,7 +10836,7 @@
                 <a:solidFill>
                   <a:srgbClr val="1C1C1A"/>
                 </a:solidFill>
-                <a:latin typeface="Outfit 2 Light"/>
+                <a:latin typeface="Outfit 1 Light"/>
               </a:rPr>
               <a:t>O que move a Flávia?</a:t>
             </a:r>
@@ -10961,25 +10961,25 @@
               </a:lnSpc>
             </a:pPr>
             <a:r>
-              <a:rPr sz="1500" i="0" b="0" spc="220">
+              <a:rPr sz="1700" i="0" b="0" spc="220">
                 <a:solidFill>
                   <a:srgbClr val="1C1C1A"/>
                 </a:solidFill>
-                <a:latin typeface="Outfit 1"/>
+                <a:latin typeface="Outfit 2"/>
               </a:rPr>
               <a:t>REVELAÇÃO DE ESSÊNCIA</a:t>
             </a:r>
             <a:r>
-              <a:rPr sz="1500" i="0" b="0" spc="220">
+              <a:rPr sz="1700" i="0" b="0" spc="220">
                 <a:solidFill>
                   <a:srgbClr val="A5A49F"/>
                 </a:solidFill>
-                <a:latin typeface="Outfit 1"/>
+                <a:latin typeface="Outfit 2"/>
               </a:rPr>
               <a:t>   |   </a:t>
             </a:r>
             <a:r>
-              <a:rPr sz="1500" i="0" b="0" spc="220">
+              <a:rPr sz="1700" i="0" b="0" spc="220">
                 <a:solidFill>
                   <a:srgbClr val="1C1C1A"/>
                 </a:solidFill>
@@ -11022,7 +11022,7 @@
                 <a:solidFill>
                   <a:srgbClr val="6B6B66"/>
                 </a:solidFill>
-                <a:latin typeface="Outfit 2 Light"/>
+                <a:latin typeface="Outfit 1 Light"/>
               </a:rPr>
               <a:t>Até aqui, a história revelou como a Flávia responde à realidade e entra em movimento. O Ikigai acrescenta outra dimensão: o que faz esse movimento ter sentido para ela.</a:t>
             </a:r>
@@ -11105,7 +11105,7 @@
                 <a:solidFill>
                   <a:srgbClr val="1C1C1A"/>
                 </a:solidFill>
-                <a:latin typeface="Outfit 2 Light"/>
+                <a:latin typeface="Outfit 1 Light"/>
               </a:rPr>
               <a:t>O que a Flávia ama?</a:t>
             </a:r>
@@ -11188,7 +11188,7 @@
                 <a:solidFill>
                   <a:srgbClr val="1C1C1A"/>
                 </a:solidFill>
-                <a:latin typeface="Outfit 2 Light"/>
+                <a:latin typeface="Outfit 1 Light"/>
               </a:rPr>
               <a:t>No que reconhece as suas forças?</a:t>
             </a:r>
@@ -11271,7 +11271,7 @@
                 <a:solidFill>
                   <a:srgbClr val="1C1C1A"/>
                 </a:solidFill>
-                <a:latin typeface="Outfit 2 Light"/>
+                <a:latin typeface="Outfit 1 Light"/>
               </a:rPr>
               <a:t>Onde encontra realização?</a:t>
             </a:r>
@@ -11354,7 +11354,7 @@
                 <a:solidFill>
                   <a:srgbClr val="1C1C1A"/>
                 </a:solidFill>
-                <a:latin typeface="Outfit 2 Light"/>
+                <a:latin typeface="Outfit 1 Light"/>
               </a:rPr>
               <a:t>Como deseja contribuir para outras pessoas?</a:t>
             </a:r>
@@ -11437,7 +11437,7 @@
                 <a:solidFill>
                   <a:srgbClr val="6B6B66"/>
                 </a:solidFill>
-                <a:latin typeface="Outfit 2 Light"/>
+                <a:latin typeface="Outfit 1 Light"/>
               </a:rPr>
               <a:t>Não buscamos apenas aquilo que ela gosta de fazer, e sim o que faz uma realização ter significado para a Flávia.</a:t>
             </a:r>
@@ -11574,7 +11574,7 @@
                 <a:solidFill>
                   <a:srgbClr val="A5A49F"/>
                 </a:solidFill>
-                <a:latin typeface="Outfit 1"/>
+                <a:latin typeface="Outfit 2"/>
               </a:rPr>
               <a:t>O IKIGAI</a:t>
             </a:r>
@@ -11613,7 +11613,7 @@
                 <a:solidFill>
                   <a:srgbClr val="1C1C1A"/>
                 </a:solidFill>
-                <a:latin typeface="Outfit 2 Light"/>
+                <a:latin typeface="Outfit 1 Light"/>
               </a:rPr>
               <a:t>O mapa do Ikigai</a:t>
             </a:r>
@@ -11891,7 +11891,7 @@
                 <a:solidFill>
                   <a:srgbClr val="1C1C1A"/>
                 </a:solidFill>
-                <a:latin typeface="Outfit 2 Light"/>
+                <a:latin typeface="Outfit 1 Light"/>
               </a:rPr>
               <a:t>O que a Flávia ama</a:t>
             </a:r>
@@ -11930,7 +11930,7 @@
                 <a:solidFill>
                   <a:srgbClr val="6B6B66"/>
                 </a:solidFill>
-                <a:latin typeface="Outfit 2 Light"/>
+                <a:latin typeface="Outfit 1 Light"/>
               </a:rPr>
               <a:t>A família. As pessoas. Os momentos de qualidade. As conversas e as trocas verdadeiras. As conexões.</a:t>
             </a:r>
@@ -12013,7 +12013,7 @@
                 <a:solidFill>
                   <a:srgbClr val="1C1C1A"/>
                 </a:solidFill>
-                <a:latin typeface="Outfit 2 Light"/>
+                <a:latin typeface="Outfit 1 Light"/>
               </a:rPr>
               <a:t>No que a Flávia é boa</a:t>
             </a:r>
@@ -12052,7 +12052,7 @@
                 <a:solidFill>
                   <a:srgbClr val="6B6B66"/>
                 </a:solidFill>
-                <a:latin typeface="Outfit 2 Light"/>
+                <a:latin typeface="Outfit 1 Light"/>
               </a:rPr>
               <a:t>No conhecimento que construiu. Na persuasão. Na seriedade. Na persistência. No domínio daquilo que vende. Na capacidade de envolver pessoas.</a:t>
             </a:r>
@@ -12135,7 +12135,7 @@
                 <a:solidFill>
                   <a:srgbClr val="1C1C1A"/>
                 </a:solidFill>
-                <a:latin typeface="Outfit 2 Light"/>
+                <a:latin typeface="Outfit 1 Light"/>
               </a:rPr>
               <a:t>Como a Flávia gosta de contribuir</a:t>
             </a:r>
@@ -12174,7 +12174,7 @@
                 <a:solidFill>
                   <a:srgbClr val="6B6B66"/>
                 </a:solidFill>
-                <a:latin typeface="Outfit 2 Light"/>
+                <a:latin typeface="Outfit 1 Light"/>
               </a:rPr>
               <a:t>Sendo útil. Compartilhando conhecimentos e experiências. Ajudando pessoas e empresários. Criando oportunidades. Fazendo diferença na vida das pessoas.</a:t>
             </a:r>
@@ -12257,7 +12257,7 @@
                 <a:solidFill>
                   <a:srgbClr val="1C1C1A"/>
                 </a:solidFill>
-                <a:latin typeface="Outfit 2 Light"/>
+                <a:latin typeface="Outfit 1 Light"/>
               </a:rPr>
               <a:t>Onde a Flávia encontra realização</a:t>
             </a:r>
@@ -12296,7 +12296,7 @@
                 <a:solidFill>
                   <a:srgbClr val="6B6B66"/>
                 </a:solidFill>
-                <a:latin typeface="Outfit 2 Light"/>
+                <a:latin typeface="Outfit 1 Light"/>
               </a:rPr>
               <a:t>Ao ver algo ganhar forma. Ao transformar matéria em algo de valor. Ao perceber a alegria do cliente. Ao ver o sonho de outra pessoa se tornar concreto. Ao saber que aquilo que construiu também ampliou as possibilidades de alguém.</a:t>
             </a:r>
@@ -12456,7 +12456,7 @@
                 <a:solidFill>
                   <a:srgbClr val="A5A49F"/>
                 </a:solidFill>
-                <a:latin typeface="Outfit 1"/>
+                <a:latin typeface="Outfit 2"/>
               </a:rPr>
               <a:t>O IKIGAI</a:t>
             </a:r>
@@ -12495,7 +12495,7 @@
                 <a:solidFill>
                   <a:srgbClr val="1C1C1A"/>
                 </a:solidFill>
-                <a:latin typeface="Outfit 2 Light"/>
+                <a:latin typeface="Outfit 1 Light"/>
               </a:rPr>
               <a:t>O centro do Ikigai</a:t>
             </a:r>
@@ -12620,25 +12620,25 @@
               </a:lnSpc>
             </a:pPr>
             <a:r>
-              <a:rPr sz="1500" i="0" b="0" spc="220">
+              <a:rPr sz="1700" i="0" b="0" spc="220">
                 <a:solidFill>
                   <a:srgbClr val="1C1C1A"/>
                 </a:solidFill>
-                <a:latin typeface="Outfit 1"/>
+                <a:latin typeface="Outfit 2"/>
               </a:rPr>
               <a:t>REVELAÇÃO DE ESSÊNCIA</a:t>
             </a:r>
             <a:r>
-              <a:rPr sz="1500" i="0" b="0" spc="220">
+              <a:rPr sz="1700" i="0" b="0" spc="220">
                 <a:solidFill>
                   <a:srgbClr val="A5A49F"/>
                 </a:solidFill>
-                <a:latin typeface="Outfit 1"/>
+                <a:latin typeface="Outfit 2"/>
               </a:rPr>
               <a:t>   |   </a:t>
             </a:r>
             <a:r>
-              <a:rPr sz="1500" i="0" b="0" spc="220">
+              <a:rPr sz="1700" i="0" b="0" spc="220">
                 <a:solidFill>
                   <a:srgbClr val="1C1C1A"/>
                 </a:solidFill>
@@ -12681,7 +12681,7 @@
                 <a:solidFill>
                   <a:srgbClr val="1C1C1A"/>
                 </a:solidFill>
-                <a:latin typeface="Outfit 2 Light"/>
+                <a:latin typeface="Outfit 1 Light"/>
               </a:rPr>
               <a:t>A Flávia não se realiza apenas conquistando para si. Ela encontra realização quando vê uma possibilidade se tornar concreta e produzir algo na vida de outras pessoas.</a:t>
             </a:r>
@@ -12764,7 +12764,7 @@
                 <a:solidFill>
                   <a:srgbClr val="6B6B66"/>
                 </a:solidFill>
-                <a:latin typeface="Outfit 2 Light"/>
+                <a:latin typeface="Outfit 1 Light"/>
               </a:rPr>
               <a:t>Um cliente realiza um sonho.</a:t>
             </a:r>
@@ -12803,7 +12803,7 @@
                 <a:solidFill>
                   <a:srgbClr val="6B6B66"/>
                 </a:solidFill>
-                <a:latin typeface="Outfit 2 Light"/>
+                <a:latin typeface="Outfit 1 Light"/>
               </a:rPr>
               <a:t>Uma equipe cresce.</a:t>
             </a:r>
@@ -12842,7 +12842,7 @@
                 <a:solidFill>
                   <a:srgbClr val="6B6B66"/>
                 </a:solidFill>
-                <a:latin typeface="Outfit 2 Light"/>
+                <a:latin typeface="Outfit 1 Light"/>
               </a:rPr>
               <a:t>Uma ideia sai do papel.</a:t>
             </a:r>
@@ -12881,7 +12881,7 @@
                 <a:solidFill>
                   <a:srgbClr val="6B6B66"/>
                 </a:solidFill>
-                <a:latin typeface="Outfit 2 Light"/>
+                <a:latin typeface="Outfit 1 Light"/>
               </a:rPr>
               <a:t>Uma pessoa recebe uma oportunidade.</a:t>
             </a:r>
@@ -12920,7 +12920,7 @@
                 <a:solidFill>
                   <a:srgbClr val="A5A49F"/>
                 </a:solidFill>
-                <a:latin typeface="Outfit 2 Light"/>
+                <a:latin typeface="Outfit 1 Light"/>
               </a:rPr>
               <a:t>Sobre o legado que deseja deixar, a própria Flávia resume:</a:t>
             </a:r>
@@ -12959,7 +12959,7 @@
                 <a:solidFill>
                   <a:srgbClr val="A9724A"/>
                 </a:solidFill>
-                <a:latin typeface="Outfit 2 Light"/>
+                <a:latin typeface="Outfit 1 Light"/>
               </a:rPr>
               <a:t>“</a:t>
             </a:r>
@@ -12998,7 +12998,7 @@
                 <a:solidFill>
                   <a:srgbClr val="1C1C1A"/>
                 </a:solidFill>
-                <a:latin typeface="Outfit 2 Light"/>
+                <a:latin typeface="Outfit 1 Light"/>
               </a:rPr>
               <a:t>Fazer diferença na vida das pessoas.</a:t>
             </a:r>
@@ -13135,7 +13135,7 @@
                 <a:solidFill>
                   <a:srgbClr val="A5A49F"/>
                 </a:solidFill>
-                <a:latin typeface="Outfit 1"/>
+                <a:latin typeface="Outfit 2"/>
               </a:rPr>
               <a:t>O IKIGAI</a:t>
             </a:r>
@@ -13174,7 +13174,7 @@
                 <a:solidFill>
                   <a:srgbClr val="A9724A"/>
                 </a:solidFill>
-                <a:latin typeface="Outfit 2 Semi-Bold"/>
+                <a:latin typeface="Outfit 1 Semi-Bold"/>
               </a:rPr>
               <a:t>RAZÃO DE SER</a:t>
             </a:r>
@@ -13213,7 +13213,7 @@
                 <a:solidFill>
                   <a:srgbClr val="1C1C1A"/>
                 </a:solidFill>
-                <a:latin typeface="Outfit 2 Light"/>
+                <a:latin typeface="Outfit 1 Light"/>
               </a:rPr>
               <a:t>Transformar possibilidades em realizações</a:t>
             </a:r>
@@ -13229,7 +13229,7 @@
                 <a:solidFill>
                   <a:srgbClr val="1C1C1A"/>
                 </a:solidFill>
-                <a:latin typeface="Outfit 2 Light"/>
+                <a:latin typeface="Outfit 1 Light"/>
               </a:rPr>
               <a:t>concretas que também ampliem a vida</a:t>
             </a:r>
@@ -13245,7 +13245,7 @@
                 <a:solidFill>
                   <a:srgbClr val="1C1C1A"/>
                 </a:solidFill>
-                <a:latin typeface="Outfit 2 Light"/>
+                <a:latin typeface="Outfit 1 Light"/>
               </a:rPr>
               <a:t>de outras pessoas.</a:t>
             </a:r>
@@ -13328,7 +13328,7 @@
                 <a:solidFill>
                   <a:srgbClr val="6B6B66"/>
                 </a:solidFill>
-                <a:latin typeface="Outfit 2 Light"/>
+                <a:latin typeface="Outfit 1 Light"/>
               </a:rPr>
               <a:t>A realização ganha sentido quando aquilo que a Flávia constrói também amplia possibilidades para outras pessoas.</a:t>
             </a:r>
@@ -13592,7 +13592,7 @@
                 <a:solidFill>
                   <a:srgbClr val="A9724A"/>
                 </a:solidFill>
-                <a:latin typeface="Outfit 2 Semi-Bold"/>
+                <a:latin typeface="Outfit 1 Semi-Bold"/>
               </a:rPr>
               <a:t>05</a:t>
             </a:r>
@@ -13631,7 +13631,7 @@
                 <a:solidFill>
                   <a:srgbClr val="1C1C1A"/>
                 </a:solidFill>
-                <a:latin typeface="Outfit 2 Light"/>
+                <a:latin typeface="Outfit 1 Light"/>
               </a:rPr>
               <a:t>A essência</a:t>
             </a:r>
@@ -13939,7 +13939,7 @@
                 <a:solidFill>
                   <a:srgbClr val="A5A49F"/>
                 </a:solidFill>
-                <a:latin typeface="Outfit 1"/>
+                <a:latin typeface="Outfit 2"/>
               </a:rPr>
               <a:t>A ESSÊNCIA</a:t>
             </a:r>
@@ -13978,7 +13978,7 @@
                 <a:solidFill>
                   <a:srgbClr val="1C1C1A"/>
                 </a:solidFill>
-                <a:latin typeface="Outfit 2 Light"/>
+                <a:latin typeface="Outfit 1 Light"/>
               </a:rPr>
               <a:t>Onde a história e o Ikigai se encontram</a:t>
             </a:r>
@@ -14188,7 +14188,7 @@
                 <a:solidFill>
                   <a:srgbClr val="6B6B66"/>
                 </a:solidFill>
-                <a:latin typeface="Outfit 2 Light"/>
+                <a:latin typeface="Outfit 1 Light"/>
               </a:rPr>
               <a:t>A história revela como a Flávia se movimenta. O Ikigai revela o que dá sentido a esse movimento. Lado a lado, a mesma lógica aparece.</a:t>
             </a:r>
@@ -14271,7 +14271,7 @@
                 <a:solidFill>
                   <a:srgbClr val="1C1C1A"/>
                 </a:solidFill>
-                <a:latin typeface="Outfit 2 Light"/>
+                <a:latin typeface="Outfit 1 Light"/>
               </a:rPr>
               <a:t>Visão</a:t>
             </a:r>
@@ -14310,7 +14310,7 @@
                 <a:solidFill>
                   <a:srgbClr val="6B6B66"/>
                 </a:solidFill>
-                <a:latin typeface="Outfit 2 Light"/>
+                <a:latin typeface="Outfit 1 Light"/>
               </a:rPr>
               <a:t>A Flávia enxerga além da condição presente.</a:t>
             </a:r>
@@ -14393,7 +14393,7 @@
                 <a:solidFill>
                   <a:srgbClr val="1C1C1A"/>
                 </a:solidFill>
-                <a:latin typeface="Outfit 2 Light"/>
+                <a:latin typeface="Outfit 1 Light"/>
               </a:rPr>
               <a:t>Movimento</a:t>
             </a:r>
@@ -14432,7 +14432,7 @@
                 <a:solidFill>
                   <a:srgbClr val="6B6B66"/>
                 </a:solidFill>
-                <a:latin typeface="Outfit 2 Light"/>
+                <a:latin typeface="Outfit 1 Light"/>
               </a:rPr>
               <a:t>A distância entre aquilo que existe e aquilo que ela enxerga como possível a leva a buscar caminhos, conhecimento, pessoas e recursos.</a:t>
             </a:r>
@@ -14515,7 +14515,7 @@
                 <a:solidFill>
                   <a:srgbClr val="1C1C1A"/>
                 </a:solidFill>
-                <a:latin typeface="Outfit 2 Light"/>
+                <a:latin typeface="Outfit 1 Light"/>
               </a:rPr>
               <a:t>Pessoas</a:t>
             </a:r>
@@ -14554,7 +14554,7 @@
                 <a:solidFill>
                   <a:srgbClr val="6B6B66"/>
                 </a:solidFill>
-                <a:latin typeface="Outfit 2 Light"/>
+                <a:latin typeface="Outfit 1 Light"/>
               </a:rPr>
               <a:t>A família, a equipe, os clientes e as relações fazem parte daquilo que dá significado às suas realizações.</a:t>
             </a:r>
@@ -14637,7 +14637,7 @@
                 <a:solidFill>
                   <a:srgbClr val="1C1C1A"/>
                 </a:solidFill>
-                <a:latin typeface="Outfit 2 Light"/>
+                <a:latin typeface="Outfit 1 Light"/>
               </a:rPr>
               <a:t>Impacto</a:t>
             </a:r>
@@ -14676,7 +14676,7 @@
                 <a:solidFill>
                   <a:srgbClr val="6B6B66"/>
                 </a:solidFill>
-                <a:latin typeface="Outfit 2 Light"/>
+                <a:latin typeface="Outfit 1 Light"/>
               </a:rPr>
               <a:t>A conquista ganha mais sentido quando aquilo que ela constrói também amplia possibilidades para outras pessoas.</a:t>
             </a:r>
@@ -14715,7 +14715,7 @@
                 <a:solidFill>
                   <a:srgbClr val="1C1C1A"/>
                 </a:solidFill>
-                <a:latin typeface="Outfit 2 Light"/>
+                <a:latin typeface="Outfit 1 Light"/>
               </a:rPr>
               <a:t>Enxergar além.</a:t>
             </a:r>
@@ -14724,7 +14724,7 @@
                 <a:solidFill>
                   <a:srgbClr val="A9724A"/>
                 </a:solidFill>
-                <a:latin typeface="Outfit 2 Light"/>
+                <a:latin typeface="Outfit 1 Light"/>
               </a:rPr>
               <a:t>  ·  </a:t>
             </a:r>
@@ -14733,7 +14733,7 @@
                 <a:solidFill>
                   <a:srgbClr val="1C1C1A"/>
                 </a:solidFill>
-                <a:latin typeface="Outfit 2 Light"/>
+                <a:latin typeface="Outfit 1 Light"/>
               </a:rPr>
               <a:t>Colocar em movimento.</a:t>
             </a:r>
@@ -14742,7 +14742,7 @@
                 <a:solidFill>
                   <a:srgbClr val="A9724A"/>
                 </a:solidFill>
-                <a:latin typeface="Outfit 2 Light"/>
+                <a:latin typeface="Outfit 1 Light"/>
               </a:rPr>
               <a:t>  ·  </a:t>
             </a:r>
@@ -14751,7 +14751,7 @@
                 <a:solidFill>
                   <a:srgbClr val="1C1C1A"/>
                 </a:solidFill>
-                <a:latin typeface="Outfit 2 Light"/>
+                <a:latin typeface="Outfit 1 Light"/>
               </a:rPr>
               <a:t>Fazer existir.</a:t>
             </a:r>
@@ -14888,7 +14888,7 @@
                 <a:solidFill>
                   <a:srgbClr val="A5A49F"/>
                 </a:solidFill>
-                <a:latin typeface="Outfit 1"/>
+                <a:latin typeface="Outfit 2"/>
               </a:rPr>
               <a:t>A ESSÊNCIA DA FLÁVIA COMO FUNDADORA</a:t>
             </a:r>
@@ -14927,7 +14927,7 @@
                 <a:solidFill>
                   <a:srgbClr val="1C1C1A"/>
                 </a:solidFill>
-                <a:latin typeface="Outfit 2 Light"/>
+                <a:latin typeface="Outfit 1 Light"/>
               </a:rPr>
               <a:t>Enxergar além do que está posto e fazer</a:t>
             </a:r>
@@ -14943,7 +14943,7 @@
                 <a:solidFill>
                   <a:srgbClr val="1C1C1A"/>
                 </a:solidFill>
-                <a:latin typeface="Outfit 2 Light"/>
+                <a:latin typeface="Outfit 1 Light"/>
               </a:rPr>
               <a:t>existir o que ainda é possibilidade.</a:t>
             </a:r>
@@ -15026,7 +15026,7 @@
                 <a:solidFill>
                   <a:srgbClr val="A5A49F"/>
                 </a:solidFill>
-                <a:latin typeface="Outfit 2 Semi-Bold"/>
+                <a:latin typeface="Outfit 1 Semi-Bold"/>
               </a:rPr>
               <a:t>ENXERGAR ALÉM</a:t>
             </a:r>
@@ -15065,7 +15065,7 @@
                 <a:solidFill>
                   <a:srgbClr val="6B6B66"/>
                 </a:solidFill>
-                <a:latin typeface="Outfit 2 Light"/>
+                <a:latin typeface="Outfit 1 Light"/>
               </a:rPr>
               <a:t>A Flávia não considera a realidade presente como a única possibilidade. Ela consegue enxergar aquilo que ainda pode existir.</a:t>
             </a:r>
@@ -15104,7 +15104,7 @@
                 <a:solidFill>
                   <a:srgbClr val="A5A49F"/>
                 </a:solidFill>
-                <a:latin typeface="Outfit 2 Semi-Bold"/>
+                <a:latin typeface="Outfit 1 Semi-Bold"/>
               </a:rPr>
               <a:t>FAZER EXISTIR</a:t>
             </a:r>
@@ -15143,7 +15143,7 @@
                 <a:solidFill>
                   <a:srgbClr val="6B6B66"/>
                 </a:solidFill>
-                <a:latin typeface="Outfit 2 Light"/>
+                <a:latin typeface="Outfit 1 Light"/>
               </a:rPr>
               <a:t>Ela não permanece apenas no campo da imaginação. Procura caminhos e transforma a possibilidade em realidade.</a:t>
             </a:r>
@@ -15182,7 +15182,7 @@
                 <a:solidFill>
                   <a:srgbClr val="A5A49F"/>
                 </a:solidFill>
-                <a:latin typeface="Outfit 2 Semi-Bold"/>
+                <a:latin typeface="Outfit 1 Semi-Bold"/>
               </a:rPr>
               <a:t>AMPLIAR POSSIBILIDADES</a:t>
             </a:r>
@@ -15221,7 +15221,7 @@
                 <a:solidFill>
                   <a:srgbClr val="6B6B66"/>
                 </a:solidFill>
-                <a:latin typeface="Outfit 2 Light"/>
+                <a:latin typeface="Outfit 1 Light"/>
               </a:rPr>
               <a:t>A realização ganha sentido quando aquilo que ela constrói também cria valor, oportunidade ou transformação para outras pessoas.</a:t>
             </a:r>
@@ -15304,7 +15304,7 @@
                 <a:solidFill>
                   <a:srgbClr val="1C1C1A"/>
                 </a:solidFill>
-                <a:latin typeface="Outfit 2 Light"/>
+                <a:latin typeface="Outfit 1 Light"/>
               </a:rPr>
               <a:t>Forte, determinada, criativa, sonhadora e visionária são características da Flávia. Mas são manifestações de uma lógica mais profunda: enxergar além e fazer existir.</a:t>
             </a:r>
@@ -15568,7 +15568,7 @@
                 <a:solidFill>
                   <a:srgbClr val="A9724A"/>
                 </a:solidFill>
-                <a:latin typeface="Outfit 2 Semi-Bold"/>
+                <a:latin typeface="Outfit 1 Semi-Bold"/>
               </a:rPr>
               <a:t>06</a:t>
             </a:r>
@@ -15607,7 +15607,7 @@
                 <a:solidFill>
                   <a:srgbClr val="1C1C1A"/>
                 </a:solidFill>
-                <a:latin typeface="Outfit 2 Light"/>
+                <a:latin typeface="Outfit 1 Light"/>
               </a:rPr>
               <a:t>As marcas</a:t>
             </a:r>
@@ -15938,7 +15938,7 @@
                 <a:solidFill>
                   <a:srgbClr val="A5A49F"/>
                 </a:solidFill>
-                <a:latin typeface="Outfit 1"/>
+                <a:latin typeface="Outfit 2"/>
               </a:rPr>
               <a:t>AS MARCAS</a:t>
             </a:r>
@@ -15977,7 +15977,7 @@
                 <a:solidFill>
                   <a:srgbClr val="1C1C1A"/>
                 </a:solidFill>
-                <a:latin typeface="Outfit 2 Light"/>
+                <a:latin typeface="Outfit 1 Light"/>
               </a:rPr>
               <a:t>Como essa essência se manifesta nas marcas</a:t>
             </a:r>
@@ -16102,25 +16102,25 @@
               </a:lnSpc>
             </a:pPr>
             <a:r>
-              <a:rPr sz="1500" i="0" b="0" spc="220">
+              <a:rPr sz="1700" i="0" b="0" spc="220">
                 <a:solidFill>
                   <a:srgbClr val="1C1C1A"/>
                 </a:solidFill>
-                <a:latin typeface="Outfit 1"/>
+                <a:latin typeface="Outfit 2"/>
               </a:rPr>
               <a:t>REVELAÇÃO DE ESSÊNCIA</a:t>
             </a:r>
             <a:r>
-              <a:rPr sz="1500" i="0" b="0" spc="220">
+              <a:rPr sz="1700" i="0" b="0" spc="220">
                 <a:solidFill>
                   <a:srgbClr val="A5A49F"/>
                 </a:solidFill>
-                <a:latin typeface="Outfit 1"/>
+                <a:latin typeface="Outfit 2"/>
               </a:rPr>
               <a:t>   |   </a:t>
             </a:r>
             <a:r>
-              <a:rPr sz="1500" i="0" b="0" spc="220">
+              <a:rPr sz="1700" i="0" b="0" spc="220">
                 <a:solidFill>
                   <a:srgbClr val="1C1C1A"/>
                 </a:solidFill>
@@ -16163,7 +16163,7 @@
                 <a:solidFill>
                   <a:srgbClr val="A5A49F"/>
                 </a:solidFill>
-                <a:latin typeface="Outfit 2 Light"/>
+                <a:latin typeface="Outfit 1 Light"/>
               </a:rPr>
               <a:t>Uma mesma essência. Duas manifestações diferentes.</a:t>
             </a:r>
@@ -16246,7 +16246,7 @@
                 <a:solidFill>
                   <a:srgbClr val="A9724A"/>
                 </a:solidFill>
-                <a:latin typeface="Outfit 2 Semi-Bold"/>
+                <a:latin typeface="Outfit 1 Semi-Bold"/>
               </a:rPr>
               <a:t>A FORMA</a:t>
             </a:r>
@@ -16285,7 +16285,7 @@
                 <a:solidFill>
                   <a:srgbClr val="1C1C1A"/>
                 </a:solidFill>
-                <a:latin typeface="Outfit 2 Light"/>
+                <a:latin typeface="Outfit 1 Light"/>
               </a:rPr>
               <a:t>Dar forma ao que ainda é ideia.</a:t>
             </a:r>
@@ -16324,7 +16324,7 @@
                 <a:solidFill>
                   <a:srgbClr val="6B6B66"/>
                 </a:solidFill>
-                <a:latin typeface="Outfit 2 Light"/>
+                <a:latin typeface="Outfit 1 Light"/>
               </a:rPr>
               <a:t>A empresa representa o espaço que a Flávia buscava para criar, personalizar e construir segundo a sua própria visão. Esse mesmo movimento está na natureza do negócio: uma necessidade, uma ideia ou um sonho se transformam em projeto e ganham forma concreta.</a:t>
             </a:r>
@@ -16407,7 +16407,7 @@
                 <a:solidFill>
                   <a:srgbClr val="A9724A"/>
                 </a:solidFill>
-                <a:latin typeface="Outfit 2 Semi-Bold"/>
+                <a:latin typeface="Outfit 1 Semi-Bold"/>
               </a:rPr>
               <a:t>A MY HOME</a:t>
             </a:r>
@@ -16446,7 +16446,7 @@
                 <a:solidFill>
                   <a:srgbClr val="1C1C1A"/>
                 </a:solidFill>
-                <a:latin typeface="Outfit 2 Light"/>
+                <a:latin typeface="Outfit 1 Light"/>
               </a:rPr>
               <a:t>Reabrir possibilidades.</a:t>
             </a:r>
@@ -16485,7 +16485,7 @@
                 <a:solidFill>
                   <a:srgbClr val="6B6B66"/>
                 </a:solidFill>
-                <a:latin typeface="Outfit 2 Light"/>
+                <a:latin typeface="Outfit 1 Light"/>
               </a:rPr>
               <a:t>A marca nasce quando a Flávia questiona o destino dado às sobras da marcenaria. Onde havia descarte, ela enxergou matéria. Onde havia fim, ela enxergou um novo começo. Aquilo que havia encerrado a sua função ganhou uma nova possibilidade de existir.</a:t>
             </a:r>
@@ -16524,7 +16524,7 @@
                 <a:solidFill>
                   <a:srgbClr val="A5A49F"/>
                 </a:solidFill>
-                <a:latin typeface="Outfit 2 Light"/>
+                <a:latin typeface="Outfit 1 Light"/>
               </a:rPr>
               <a:t>A Forma e a My Home são marcas diferentes e terão estratégias próprias. Mas as duas carregam, na origem, uma mesma forma de enxergar e transformar a realidade.</a:t>
             </a:r>
@@ -16684,7 +16684,7 @@
                 <a:solidFill>
                   <a:srgbClr val="A5A49F"/>
                 </a:solidFill>
-                <a:latin typeface="Outfit 1"/>
+                <a:latin typeface="Outfit 2"/>
               </a:rPr>
               <a:t>PRÓXIMA ETAPA</a:t>
             </a:r>
@@ -16723,7 +16723,7 @@
                 <a:solidFill>
                   <a:srgbClr val="1C1C1A"/>
                 </a:solidFill>
-                <a:latin typeface="Outfit 2 Light"/>
+                <a:latin typeface="Outfit 1 Light"/>
               </a:rPr>
               <a:t>Da essência à estratégia</a:t>
             </a:r>
@@ -16848,25 +16848,25 @@
               </a:lnSpc>
             </a:pPr>
             <a:r>
-              <a:rPr sz="1500" i="0" b="0" spc="220">
+              <a:rPr sz="1700" i="0" b="0" spc="220">
                 <a:solidFill>
                   <a:srgbClr val="1C1C1A"/>
                 </a:solidFill>
-                <a:latin typeface="Outfit 1"/>
+                <a:latin typeface="Outfit 2"/>
               </a:rPr>
               <a:t>REVELAÇÃO DE ESSÊNCIA</a:t>
             </a:r>
             <a:r>
-              <a:rPr sz="1500" i="0" b="0" spc="220">
+              <a:rPr sz="1700" i="0" b="0" spc="220">
                 <a:solidFill>
                   <a:srgbClr val="A5A49F"/>
                 </a:solidFill>
-                <a:latin typeface="Outfit 1"/>
+                <a:latin typeface="Outfit 2"/>
               </a:rPr>
               <a:t>   |   </a:t>
             </a:r>
             <a:r>
-              <a:rPr sz="1500" i="0" b="0" spc="220">
+              <a:rPr sz="1700" i="0" b="0" spc="220">
                 <a:solidFill>
                   <a:srgbClr val="1C1C1A"/>
                 </a:solidFill>
@@ -16909,7 +16909,7 @@
                 <a:solidFill>
                   <a:srgbClr val="6B6B66"/>
                 </a:solidFill>
-                <a:latin typeface="Outfit 2 Light"/>
+                <a:latin typeface="Outfit 1 Light"/>
               </a:rPr>
               <a:t>Esta etapa revelou a essência da Flávia como fundadora: uma forma própria de enxergar e transformar a realidade que já existia antes da Forma e da My Home.</a:t>
             </a:r>
@@ -16992,7 +16992,7 @@
                 <a:solidFill>
                   <a:srgbClr val="A5A49F"/>
                 </a:solidFill>
-                <a:latin typeface="Outfit 2 Semi-Bold"/>
+                <a:latin typeface="Outfit 1 Semi-Bold"/>
               </a:rPr>
               <a:t>O QUE VEM A SEGUIR</a:t>
             </a:r>
@@ -17031,7 +17031,7 @@
                 <a:solidFill>
                   <a:srgbClr val="6B6B66"/>
                 </a:solidFill>
-                <a:latin typeface="Outfit 2 Light"/>
+                <a:latin typeface="Outfit 1 Light"/>
               </a:rPr>
               <a:t>Essa essência ajuda a compreender de onde as duas marcas vêm, mas não define, sozinha, quem cada marca precisa ser.</a:t>
             </a:r>
@@ -17070,7 +17070,7 @@
                 <a:solidFill>
                   <a:srgbClr val="1C1C1A"/>
                 </a:solidFill>
-                <a:latin typeface="Outfit 2 Light"/>
+                <a:latin typeface="Outfit 1 Light"/>
               </a:rPr>
               <a:t>A Base Estratégica vai definir como essa origem se traduz em uma direção própria, relevante e diferenciada para a Forma e para a My Home.</a:t>
             </a:r>
@@ -17207,7 +17207,7 @@
                 <a:solidFill>
                   <a:srgbClr val="A5A49F"/>
                 </a:solidFill>
-                <a:latin typeface="Outfit 1"/>
+                <a:latin typeface="Outfit 2"/>
               </a:rPr>
               <a:t>SUMÁRIO</a:t>
             </a:r>
@@ -17246,7 +17246,7 @@
                 <a:solidFill>
                   <a:srgbClr val="1C1C1A"/>
                 </a:solidFill>
-                <a:latin typeface="Outfit 2 Light"/>
+                <a:latin typeface="Outfit 1 Light"/>
               </a:rPr>
               <a:t>Sumário</a:t>
             </a:r>
@@ -17329,7 +17329,7 @@
                 <a:solidFill>
                   <a:srgbClr val="A9724A"/>
                 </a:solidFill>
-                <a:latin typeface="Outfit 2 Semi-Bold"/>
+                <a:latin typeface="Outfit 1 Semi-Bold"/>
               </a:rPr>
               <a:t>01</a:t>
             </a:r>
@@ -17368,7 +17368,7 @@
                 <a:solidFill>
                   <a:srgbClr val="1C1C1A"/>
                 </a:solidFill>
-                <a:latin typeface="Outfit 2 Light"/>
+                <a:latin typeface="Outfit 1 Light"/>
               </a:rPr>
               <a:t>A origem</a:t>
             </a:r>
@@ -17407,7 +17407,7 @@
                 <a:solidFill>
                   <a:srgbClr val="A5A49F"/>
                 </a:solidFill>
-                <a:latin typeface="Outfit 2 Light"/>
+                <a:latin typeface="Outfit 1 Light"/>
               </a:rPr>
               <a:t>As experiências que formaram a visão de mundo da Flávia.</a:t>
             </a:r>
@@ -17490,7 +17490,7 @@
                 <a:solidFill>
                   <a:srgbClr val="A9724A"/>
                 </a:solidFill>
-                <a:latin typeface="Outfit 2 Semi-Bold"/>
+                <a:latin typeface="Outfit 1 Semi-Bold"/>
               </a:rPr>
               <a:t>02</a:t>
             </a:r>
@@ -17529,7 +17529,7 @@
                 <a:solidFill>
                   <a:srgbClr val="1C1C1A"/>
                 </a:solidFill>
-                <a:latin typeface="Outfit 2 Light"/>
+                <a:latin typeface="Outfit 1 Light"/>
               </a:rPr>
               <a:t>As tensões</a:t>
             </a:r>
@@ -17568,7 +17568,7 @@
                 <a:solidFill>
                   <a:srgbClr val="A5A49F"/>
                 </a:solidFill>
-                <a:latin typeface="Outfit 2 Light"/>
+                <a:latin typeface="Outfit 1 Light"/>
               </a:rPr>
               <a:t>Os momentos que a colocaram em movimento.</a:t>
             </a:r>
@@ -17651,7 +17651,7 @@
                 <a:solidFill>
                   <a:srgbClr val="A9724A"/>
                 </a:solidFill>
-                <a:latin typeface="Outfit 2 Semi-Bold"/>
+                <a:latin typeface="Outfit 1 Semi-Bold"/>
               </a:rPr>
               <a:t>03</a:t>
             </a:r>
@@ -17690,7 +17690,7 @@
                 <a:solidFill>
                   <a:srgbClr val="1C1C1A"/>
                 </a:solidFill>
-                <a:latin typeface="Outfit 2 Light"/>
+                <a:latin typeface="Outfit 1 Light"/>
               </a:rPr>
               <a:t>Os padrões</a:t>
             </a:r>
@@ -17729,7 +17729,7 @@
                 <a:solidFill>
                   <a:srgbClr val="A5A49F"/>
                 </a:solidFill>
-                <a:latin typeface="Outfit 2 Light"/>
+                <a:latin typeface="Outfit 1 Light"/>
               </a:rPr>
               <a:t>A lógica que se repete ao longo da trajetória.</a:t>
             </a:r>
@@ -17812,7 +17812,7 @@
                 <a:solidFill>
                   <a:srgbClr val="A9724A"/>
                 </a:solidFill>
-                <a:latin typeface="Outfit 2 Semi-Bold"/>
+                <a:latin typeface="Outfit 1 Semi-Bold"/>
               </a:rPr>
               <a:t>04</a:t>
             </a:r>
@@ -17851,7 +17851,7 @@
                 <a:solidFill>
                   <a:srgbClr val="1C1C1A"/>
                 </a:solidFill>
-                <a:latin typeface="Outfit 2 Light"/>
+                <a:latin typeface="Outfit 1 Light"/>
               </a:rPr>
               <a:t>O Ikigai</a:t>
             </a:r>
@@ -17890,7 +17890,7 @@
                 <a:solidFill>
                   <a:srgbClr val="A5A49F"/>
                 </a:solidFill>
-                <a:latin typeface="Outfit 2 Light"/>
+                <a:latin typeface="Outfit 1 Light"/>
               </a:rPr>
               <a:t>O que gera sentido e realização para a Flávia.</a:t>
             </a:r>
@@ -17973,7 +17973,7 @@
                 <a:solidFill>
                   <a:srgbClr val="A9724A"/>
                 </a:solidFill>
-                <a:latin typeface="Outfit 2 Semi-Bold"/>
+                <a:latin typeface="Outfit 1 Semi-Bold"/>
               </a:rPr>
               <a:t>05</a:t>
             </a:r>
@@ -18012,7 +18012,7 @@
                 <a:solidFill>
                   <a:srgbClr val="1C1C1A"/>
                 </a:solidFill>
-                <a:latin typeface="Outfit 2 Light"/>
+                <a:latin typeface="Outfit 1 Light"/>
               </a:rPr>
               <a:t>A essência</a:t>
             </a:r>
@@ -18051,7 +18051,7 @@
                 <a:solidFill>
                   <a:srgbClr val="A5A49F"/>
                 </a:solidFill>
-                <a:latin typeface="Outfit 2 Light"/>
+                <a:latin typeface="Outfit 1 Light"/>
               </a:rPr>
               <a:t>O princípio que conecta a sua história.</a:t>
             </a:r>
@@ -18134,7 +18134,7 @@
                 <a:solidFill>
                   <a:srgbClr val="A9724A"/>
                 </a:solidFill>
-                <a:latin typeface="Outfit 2 Semi-Bold"/>
+                <a:latin typeface="Outfit 1 Semi-Bold"/>
               </a:rPr>
               <a:t>06</a:t>
             </a:r>
@@ -18173,7 +18173,7 @@
                 <a:solidFill>
                   <a:srgbClr val="1C1C1A"/>
                 </a:solidFill>
-                <a:latin typeface="Outfit 2 Light"/>
+                <a:latin typeface="Outfit 1 Light"/>
               </a:rPr>
               <a:t>As marcas</a:t>
             </a:r>
@@ -18212,7 +18212,7 @@
                 <a:solidFill>
                   <a:srgbClr val="A5A49F"/>
                 </a:solidFill>
-                <a:latin typeface="Outfit 2 Light"/>
+                <a:latin typeface="Outfit 1 Light"/>
               </a:rPr>
               <a:t>Como essa essência se manifesta na origem da Forma e da My Home.</a:t>
             </a:r>
@@ -18564,7 +18564,7 @@
                 <a:solidFill>
                   <a:srgbClr val="1C1C1A"/>
                 </a:solidFill>
-                <a:latin typeface="Outfit 2 Light"/>
+                <a:latin typeface="Outfit 1 Light"/>
               </a:rPr>
               <a:t>A essência revela a origem.</a:t>
             </a:r>
@@ -18580,7 +18580,7 @@
                 <a:solidFill>
                   <a:srgbClr val="1C1C1A"/>
                 </a:solidFill>
-                <a:latin typeface="Outfit 2 Light"/>
+                <a:latin typeface="Outfit 1 Light"/>
               </a:rPr>
               <a:t>A estratégia define a direção.</a:t>
             </a:r>
@@ -18798,7 +18798,7 @@
                 <a:solidFill>
                   <a:srgbClr val="1C1C1A"/>
                 </a:solidFill>
-                <a:latin typeface="Outfit 2 Light"/>
+                <a:latin typeface="Outfit 1 Light"/>
               </a:rPr>
               <a:t>MUITO OBRIGADA!</a:t>
             </a:r>
@@ -19050,7 +19050,7 @@
                 <a:solidFill>
                   <a:srgbClr val="A5A49F"/>
                 </a:solidFill>
-                <a:latin typeface="Outfit 1"/>
+                <a:latin typeface="Outfit 2"/>
               </a:rPr>
               <a:t>CONCEITO</a:t>
             </a:r>
@@ -19089,7 +19089,7 @@
                 <a:solidFill>
                   <a:srgbClr val="1C1C1A"/>
                 </a:solidFill>
-                <a:latin typeface="Outfit 2 Light"/>
+                <a:latin typeface="Outfit 1 Light"/>
               </a:rPr>
               <a:t>Por que começamos pela essência?</a:t>
             </a:r>
@@ -19214,25 +19214,25 @@
               </a:lnSpc>
             </a:pPr>
             <a:r>
-              <a:rPr sz="1500" i="0" b="0" spc="220">
+              <a:rPr sz="1700" i="0" b="0" spc="220">
                 <a:solidFill>
                   <a:srgbClr val="1C1C1A"/>
                 </a:solidFill>
-                <a:latin typeface="Outfit 1"/>
+                <a:latin typeface="Outfit 2"/>
               </a:rPr>
               <a:t>REVELAÇÃO DE ESSÊNCIA</a:t>
             </a:r>
             <a:r>
-              <a:rPr sz="1500" i="0" b="0" spc="220">
+              <a:rPr sz="1700" i="0" b="0" spc="220">
                 <a:solidFill>
                   <a:srgbClr val="A5A49F"/>
                 </a:solidFill>
-                <a:latin typeface="Outfit 1"/>
+                <a:latin typeface="Outfit 2"/>
               </a:rPr>
               <a:t>   |   </a:t>
             </a:r>
             <a:r>
-              <a:rPr sz="1500" i="0" b="0" spc="220">
+              <a:rPr sz="1700" i="0" b="0" spc="220">
                 <a:solidFill>
                   <a:srgbClr val="1C1C1A"/>
                 </a:solidFill>
@@ -19275,7 +19275,7 @@
                 <a:solidFill>
                   <a:srgbClr val="1C1C1A"/>
                 </a:solidFill>
-                <a:latin typeface="Outfit 2 Light"/>
+                <a:latin typeface="Outfit 1 Light"/>
               </a:rPr>
               <a:t>A Forma e a My Home são negócios distintos, mas nasceram e se desenvolveram a partir da visão de uma mesma fundadora.</a:t>
             </a:r>
@@ -19314,7 +19314,7 @@
                 <a:solidFill>
                   <a:srgbClr val="6B6B66"/>
                 </a:solidFill>
-                <a:latin typeface="Outfit 2 Light"/>
+                <a:latin typeface="Outfit 1 Light"/>
               </a:rPr>
               <a:t>Em marcas fortemente ligadas à fundadora, compreender a história de quem as criou ajuda a identificar crenças, princípios e formas de pensar e agir que influenciaram a construção dos negócios.</a:t>
             </a:r>
@@ -19397,7 +19397,7 @@
                 <a:solidFill>
                   <a:srgbClr val="A5A49F"/>
                 </a:solidFill>
-                <a:latin typeface="Outfit 2 Semi-Bold"/>
+                <a:latin typeface="Outfit 1 Semi-Bold"/>
               </a:rPr>
               <a:t>O QUE NÃO É</a:t>
             </a:r>
@@ -19436,7 +19436,7 @@
                 <a:solidFill>
                   <a:srgbClr val="6B6B66"/>
                 </a:solidFill>
-                <a:latin typeface="Outfit 2 Light"/>
+                <a:latin typeface="Outfit 1 Light"/>
               </a:rPr>
               <a:t>Uma análise psicológica da Flávia.</a:t>
             </a:r>
@@ -19475,7 +19475,7 @@
                 <a:solidFill>
                   <a:srgbClr val="A5A49F"/>
                 </a:solidFill>
-                <a:latin typeface="Outfit 2 Semi-Bold"/>
+                <a:latin typeface="Outfit 1 Semi-Bold"/>
               </a:rPr>
               <a:t>O QUE É</a:t>
             </a:r>
@@ -19514,7 +19514,7 @@
                 <a:solidFill>
                   <a:srgbClr val="1C1C1A"/>
                 </a:solidFill>
-                <a:latin typeface="Outfit 2 Light"/>
+                <a:latin typeface="Outfit 1 Light"/>
               </a:rPr>
               <a:t>A investigação da origem identitária das marcas a partir da fundadora.</a:t>
             </a:r>
@@ -19674,7 +19674,7 @@
                 <a:solidFill>
                   <a:srgbClr val="A5A49F"/>
                 </a:solidFill>
-                <a:latin typeface="Outfit 1"/>
+                <a:latin typeface="Outfit 2"/>
               </a:rPr>
               <a:t>A PERGUNTA QUE CONDUZ ESTA ETAPA</a:t>
             </a:r>
@@ -19713,7 +19713,7 @@
                 <a:solidFill>
                   <a:srgbClr val="1C1C1A"/>
                 </a:solidFill>
-                <a:latin typeface="Outfit 2 Light"/>
+                <a:latin typeface="Outfit 1 Light"/>
               </a:rPr>
               <a:t/>
             </a:r>
@@ -19838,25 +19838,25 @@
               </a:lnSpc>
             </a:pPr>
             <a:r>
-              <a:rPr sz="1500" i="0" b="0" spc="220">
+              <a:rPr sz="1700" i="0" b="0" spc="220">
                 <a:solidFill>
                   <a:srgbClr val="1C1C1A"/>
                 </a:solidFill>
-                <a:latin typeface="Outfit 1"/>
+                <a:latin typeface="Outfit 2"/>
               </a:rPr>
               <a:t>REVELAÇÃO DE ESSÊNCIA</a:t>
             </a:r>
             <a:r>
-              <a:rPr sz="1500" i="0" b="0" spc="220">
+              <a:rPr sz="1700" i="0" b="0" spc="220">
                 <a:solidFill>
                   <a:srgbClr val="A5A49F"/>
                 </a:solidFill>
-                <a:latin typeface="Outfit 1"/>
+                <a:latin typeface="Outfit 2"/>
               </a:rPr>
               <a:t>   |   </a:t>
             </a:r>
             <a:r>
-              <a:rPr sz="1500" i="0" b="0" spc="220">
+              <a:rPr sz="1700" i="0" b="0" spc="220">
                 <a:solidFill>
                   <a:srgbClr val="1C1C1A"/>
                 </a:solidFill>
@@ -19899,7 +19899,7 @@
                 <a:solidFill>
                   <a:srgbClr val="1C1C1A"/>
                 </a:solidFill>
-                <a:latin typeface="Outfit 2 Light"/>
+                <a:latin typeface="Outfit 1 Light"/>
               </a:rPr>
               <a:t>O que já fazia parte de quem</a:t>
             </a:r>
@@ -19915,7 +19915,7 @@
                 <a:solidFill>
                   <a:srgbClr val="1C1C1A"/>
                 </a:solidFill>
-                <a:latin typeface="Outfit 2 Light"/>
+                <a:latin typeface="Outfit 1 Light"/>
               </a:rPr>
               <a:t>a Flávia é antes da Forma</a:t>
             </a:r>
@@ -19931,7 +19931,7 @@
                 <a:solidFill>
                   <a:srgbClr val="1C1C1A"/>
                 </a:solidFill>
-                <a:latin typeface="Outfit 2 Light"/>
+                <a:latin typeface="Outfit 1 Light"/>
               </a:rPr>
               <a:t>e da My Home?</a:t>
             </a:r>
@@ -20068,7 +20068,7 @@
                 <a:solidFill>
                   <a:srgbClr val="A5A49F"/>
                 </a:solidFill>
-                <a:latin typeface="Outfit 1"/>
+                <a:latin typeface="Outfit 2"/>
               </a:rPr>
               <a:t>MÉTODO</a:t>
             </a:r>
@@ -20107,7 +20107,7 @@
                 <a:solidFill>
                   <a:srgbClr val="1C1C1A"/>
                 </a:solidFill>
-                <a:latin typeface="Outfit 2 Light"/>
+                <a:latin typeface="Outfit 1 Light"/>
               </a:rPr>
               <a:t>Como chegamos à revelação</a:t>
             </a:r>
@@ -20317,7 +20317,7 @@
                 <a:solidFill>
                   <a:srgbClr val="6B6B66"/>
                 </a:solidFill>
-                <a:latin typeface="Outfit 2 Light"/>
+                <a:latin typeface="Outfit 1 Light"/>
               </a:rPr>
               <a:t>A essência não é definida por uma característica isolada. Ela se revela quando diferentes momentos da trajetória apresentam uma mesma lógica.</a:t>
             </a:r>
@@ -20400,7 +20400,7 @@
                 <a:solidFill>
                   <a:srgbClr val="1C1C1A"/>
                 </a:solidFill>
-                <a:latin typeface="Outfit 2 Light"/>
+                <a:latin typeface="Outfit 1 Light"/>
               </a:rPr>
               <a:t>História</a:t>
             </a:r>
@@ -20439,7 +20439,7 @@
                 <a:solidFill>
                   <a:srgbClr val="6B6B66"/>
                 </a:solidFill>
-                <a:latin typeface="Outfit 2 Light"/>
+                <a:latin typeface="Outfit 1 Light"/>
               </a:rPr>
               <a:t>Mostra as experiências e as referências que formaram a visão de mundo da Flávia.</a:t>
             </a:r>
@@ -20522,7 +20522,7 @@
                 <a:solidFill>
                   <a:srgbClr val="1C1C1A"/>
                 </a:solidFill>
-                <a:latin typeface="Outfit 2 Light"/>
+                <a:latin typeface="Outfit 1 Light"/>
               </a:rPr>
               <a:t>Tensões</a:t>
             </a:r>
@@ -20561,7 +20561,7 @@
                 <a:solidFill>
                   <a:srgbClr val="6B6B66"/>
                 </a:solidFill>
-                <a:latin typeface="Outfit 2 Light"/>
+                <a:latin typeface="Outfit 1 Light"/>
               </a:rPr>
               <a:t>Mostram os momentos em que aquilo que existia entrou em conflito com aquilo que ela desejava ou conseguia enxergar.</a:t>
             </a:r>
@@ -20644,7 +20644,7 @@
                 <a:solidFill>
                   <a:srgbClr val="1C1C1A"/>
                 </a:solidFill>
-                <a:latin typeface="Outfit 2 Light"/>
+                <a:latin typeface="Outfit 1 Light"/>
               </a:rPr>
               <a:t>Padrões</a:t>
             </a:r>
@@ -20683,7 +20683,7 @@
                 <a:solidFill>
                   <a:srgbClr val="6B6B66"/>
                 </a:solidFill>
-                <a:latin typeface="Outfit 2 Light"/>
+                <a:latin typeface="Outfit 1 Light"/>
               </a:rPr>
               <a:t>Revelam como a Flávia responde, repetidamente, a essas situações.</a:t>
             </a:r>
@@ -20766,7 +20766,7 @@
                 <a:solidFill>
                   <a:srgbClr val="1C1C1A"/>
                 </a:solidFill>
-                <a:latin typeface="Outfit 2 Light"/>
+                <a:latin typeface="Outfit 1 Light"/>
               </a:rPr>
               <a:t>Ikigai</a:t>
             </a:r>
@@ -20805,7 +20805,7 @@
                 <a:solidFill>
                   <a:srgbClr val="6B6B66"/>
                 </a:solidFill>
-                <a:latin typeface="Outfit 2 Light"/>
+                <a:latin typeface="Outfit 1 Light"/>
               </a:rPr>
               <a:t>Revela o que gera sentido, realização e vontade de contribuir.</a:t>
             </a:r>
@@ -20844,7 +20844,7 @@
                 <a:solidFill>
                   <a:srgbClr val="6B6B66"/>
                 </a:solidFill>
-                <a:latin typeface="Outfit 2 Light"/>
+                <a:latin typeface="Outfit 1 Light"/>
               </a:rPr>
               <a:t>História</a:t>
             </a:r>
@@ -20853,7 +20853,7 @@
                 <a:solidFill>
                   <a:srgbClr val="A9724A"/>
                 </a:solidFill>
-                <a:latin typeface="Outfit 2 Light"/>
+                <a:latin typeface="Outfit 1 Light"/>
               </a:rPr>
               <a:t>  +  </a:t>
             </a:r>
@@ -20862,7 +20862,7 @@
                 <a:solidFill>
                   <a:srgbClr val="6B6B66"/>
                 </a:solidFill>
-                <a:latin typeface="Outfit 2 Light"/>
+                <a:latin typeface="Outfit 1 Light"/>
               </a:rPr>
               <a:t>tensões</a:t>
             </a:r>
@@ -20871,7 +20871,7 @@
                 <a:solidFill>
                   <a:srgbClr val="A9724A"/>
                 </a:solidFill>
-                <a:latin typeface="Outfit 2 Light"/>
+                <a:latin typeface="Outfit 1 Light"/>
               </a:rPr>
               <a:t>  +  </a:t>
             </a:r>
@@ -20880,7 +20880,7 @@
                 <a:solidFill>
                   <a:srgbClr val="6B6B66"/>
                 </a:solidFill>
-                <a:latin typeface="Outfit 2 Light"/>
+                <a:latin typeface="Outfit 1 Light"/>
               </a:rPr>
               <a:t>padrões</a:t>
             </a:r>
@@ -20889,7 +20889,7 @@
                 <a:solidFill>
                   <a:srgbClr val="A9724A"/>
                 </a:solidFill>
-                <a:latin typeface="Outfit 2 Light"/>
+                <a:latin typeface="Outfit 1 Light"/>
               </a:rPr>
               <a:t>  +  </a:t>
             </a:r>
@@ -20898,7 +20898,7 @@
                 <a:solidFill>
                   <a:srgbClr val="6B6B66"/>
                 </a:solidFill>
-                <a:latin typeface="Outfit 2 Light"/>
+                <a:latin typeface="Outfit 1 Light"/>
               </a:rPr>
               <a:t>Ikigai</a:t>
             </a:r>
@@ -20907,7 +20907,7 @@
                 <a:solidFill>
                   <a:srgbClr val="A9724A"/>
                 </a:solidFill>
-                <a:latin typeface="Outfit 2 Light"/>
+                <a:latin typeface="Outfit 1 Light"/>
               </a:rPr>
               <a:t>  =  </a:t>
             </a:r>
@@ -20916,7 +20916,7 @@
                 <a:solidFill>
                   <a:srgbClr val="1C1C1A"/>
                 </a:solidFill>
-                <a:latin typeface="Outfit 2 Semi-Bold"/>
+                <a:latin typeface="Outfit 1 Semi-Bold"/>
               </a:rPr>
               <a:t>essência</a:t>
             </a:r>
@@ -20955,7 +20955,7 @@
                 <a:solidFill>
                   <a:srgbClr val="A5A49F"/>
                 </a:solidFill>
-                <a:latin typeface="Outfit 2 Light"/>
+                <a:latin typeface="Outfit 1 Light"/>
               </a:rPr>
               <a:t>A essência é o princípio central que conecta essas dimensões e revela a lógica que orienta a forma como a Flávia enxerga, age e transforma.</a:t>
             </a:r>
@@ -21092,7 +21092,7 @@
                 <a:solidFill>
                   <a:srgbClr val="A9724A"/>
                 </a:solidFill>
-                <a:latin typeface="Outfit 2 Semi-Bold"/>
+                <a:latin typeface="Outfit 1 Semi-Bold"/>
               </a:rPr>
               <a:t>01</a:t>
             </a:r>
@@ -21131,7 +21131,7 @@
                 <a:solidFill>
                   <a:srgbClr val="1C1C1A"/>
                 </a:solidFill>
-                <a:latin typeface="Outfit 2 Light"/>
+                <a:latin typeface="Outfit 1 Light"/>
               </a:rPr>
               <a:t>A origem</a:t>
             </a:r>
@@ -21462,7 +21462,7 @@
                 <a:solidFill>
                   <a:srgbClr val="A5A49F"/>
                 </a:solidFill>
-                <a:latin typeface="Outfit 1"/>
+                <a:latin typeface="Outfit 2"/>
               </a:rPr>
               <a:t>A ORIGEM</a:t>
             </a:r>
@@ -21501,7 +21501,7 @@
                 <a:solidFill>
                   <a:srgbClr val="1C1C1A"/>
                 </a:solidFill>
-                <a:latin typeface="Outfit 2 Light"/>
+                <a:latin typeface="Outfit 1 Light"/>
               </a:rPr>
               <a:t>Onde essa história começa</a:t>
             </a:r>
@@ -21626,25 +21626,25 @@
               </a:lnSpc>
             </a:pPr>
             <a:r>
-              <a:rPr sz="1500" i="0" b="0" spc="220">
+              <a:rPr sz="1700" i="0" b="0" spc="220">
                 <a:solidFill>
                   <a:srgbClr val="1C1C1A"/>
                 </a:solidFill>
-                <a:latin typeface="Outfit 1"/>
+                <a:latin typeface="Outfit 2"/>
               </a:rPr>
               <a:t>REVELAÇÃO DE ESSÊNCIA</a:t>
             </a:r>
             <a:r>
-              <a:rPr sz="1500" i="0" b="0" spc="220">
+              <a:rPr sz="1700" i="0" b="0" spc="220">
                 <a:solidFill>
                   <a:srgbClr val="A5A49F"/>
                 </a:solidFill>
-                <a:latin typeface="Outfit 1"/>
+                <a:latin typeface="Outfit 2"/>
               </a:rPr>
               <a:t>   |   </a:t>
             </a:r>
             <a:r>
-              <a:rPr sz="1500" i="0" b="0" spc="220">
+              <a:rPr sz="1700" i="0" b="0" spc="220">
                 <a:solidFill>
                   <a:srgbClr val="1C1C1A"/>
                 </a:solidFill>
@@ -21687,7 +21687,7 @@
                 <a:solidFill>
                   <a:srgbClr val="1C1C1A"/>
                 </a:solidFill>
-                <a:latin typeface="Outfit 2 Light"/>
+                <a:latin typeface="Outfit 1 Light"/>
               </a:rPr>
               <a:t>A história familiar da Flávia é marcada por limitações, trabalho, fé e recomeços.</a:t>
             </a:r>
@@ -21726,7 +21726,7 @@
                 <a:solidFill>
                   <a:srgbClr val="6B6B66"/>
                 </a:solidFill>
-                <a:latin typeface="Outfit 2 Light"/>
+                <a:latin typeface="Outfit 1 Light"/>
               </a:rPr>
               <a:t>A família deixou Guiratinga e foi para Primavera do Leste em busca de uma vida melhor. O pai da Flávia passou a trabalhar como caseiro justamente na propriedade onde, décadas depois, ela viveria como proprietária.</a:t>
             </a:r>
@@ -21765,7 +21765,7 @@
                 <a:solidFill>
                   <a:srgbClr val="1C1C1A"/>
                 </a:solidFill>
-                <a:latin typeface="Outfit 2 Light"/>
+                <a:latin typeface="Outfit 1 Light"/>
               </a:rPr>
               <a:t>A Flávia chegou àquele lugar como “a filha do peão”.</a:t>
             </a:r>
@@ -21848,7 +21848,7 @@
                 <a:solidFill>
                   <a:srgbClr val="A5A49F"/>
                 </a:solidFill>
-                <a:latin typeface="Outfit 2 Semi-Bold"/>
+                <a:latin typeface="Outfit 1 Semi-Bold"/>
               </a:rPr>
               <a:t>TRABALHO   ·   FAMÍLIA   ·   FÉ   ·   HONESTIDADE   ·   GRATIDÃO</a:t>
             </a:r>
@@ -22008,7 +22008,7 @@
                 <a:solidFill>
                   <a:srgbClr val="A5A49F"/>
                 </a:solidFill>
-                <a:latin typeface="Outfit 1"/>
+                <a:latin typeface="Outfit 2"/>
               </a:rPr>
               <a:t>A ORIGEM</a:t>
             </a:r>
@@ -22047,7 +22047,7 @@
                 <a:solidFill>
                   <a:srgbClr val="1C1C1A"/>
                 </a:solidFill>
-                <a:latin typeface="Outfit 2 Light"/>
+                <a:latin typeface="Outfit 1 Light"/>
               </a:rPr>
               <a:t>Os primeiros sinais</a:t>
             </a:r>
@@ -22172,25 +22172,25 @@
               </a:lnSpc>
             </a:pPr>
             <a:r>
-              <a:rPr sz="1500" i="0" b="0" spc="220">
+              <a:rPr sz="1700" i="0" b="0" spc="220">
                 <a:solidFill>
                   <a:srgbClr val="1C1C1A"/>
                 </a:solidFill>
-                <a:latin typeface="Outfit 1"/>
+                <a:latin typeface="Outfit 2"/>
               </a:rPr>
               <a:t>REVELAÇÃO DE ESSÊNCIA</a:t>
             </a:r>
             <a:r>
-              <a:rPr sz="1500" i="0" b="0" spc="220">
+              <a:rPr sz="1700" i="0" b="0" spc="220">
                 <a:solidFill>
                   <a:srgbClr val="A5A49F"/>
                 </a:solidFill>
-                <a:latin typeface="Outfit 1"/>
+                <a:latin typeface="Outfit 2"/>
               </a:rPr>
               <a:t>   |   </a:t>
             </a:r>
             <a:r>
-              <a:rPr sz="1500" i="0" b="0" spc="220">
+              <a:rPr sz="1700" i="0" b="0" spc="220">
                 <a:solidFill>
                   <a:srgbClr val="1C1C1A"/>
                 </a:solidFill>
@@ -22233,7 +22233,7 @@
                 <a:solidFill>
                   <a:srgbClr val="1C1C1A"/>
                 </a:solidFill>
-                <a:latin typeface="Outfit 2 Light"/>
+                <a:latin typeface="Outfit 1 Light"/>
               </a:rPr>
               <a:t>A vontade de construir uma realidade diferente aparece muito antes da criação das empresas.</a:t>
             </a:r>
@@ -22272,7 +22272,7 @@
                 <a:solidFill>
                   <a:srgbClr val="6B6B66"/>
                 </a:solidFill>
-                <a:latin typeface="Outfit 2 Light"/>
+                <a:latin typeface="Outfit 1 Light"/>
               </a:rPr>
               <a:t>Ainda criança, a Flávia acompanhava o pai no garimpo e chegou a cozinhar para os trabalhadores. Mais tarde, ia de bicicleta da chácara até o centro para trabalhar. Também estudava e jogava futsal para conquistar uma bolsa que ajudasse a manter a faculdade.</a:t>
             </a:r>
@@ -22311,7 +22311,7 @@
                 <a:solidFill>
                   <a:srgbClr val="A5A49F"/>
                 </a:solidFill>
-                <a:latin typeface="Outfit 2 Light"/>
+                <a:latin typeface="Outfit 1 Light"/>
               </a:rPr>
               <a:t>Ela mesma diz:</a:t>
             </a:r>
@@ -22350,7 +22350,7 @@
                 <a:solidFill>
                   <a:srgbClr val="A9724A"/>
                 </a:solidFill>
-                <a:latin typeface="Outfit 2 Light"/>
+                <a:latin typeface="Outfit 1 Light"/>
               </a:rPr>
               <a:t>“</a:t>
             </a:r>
@@ -22389,7 +22389,7 @@
                 <a:solidFill>
                   <a:srgbClr val="1C1C1A"/>
                 </a:solidFill>
-                <a:latin typeface="Outfit 2 Light"/>
+                <a:latin typeface="Outfit 1 Light"/>
               </a:rPr>
               <a:t>Eu não quero isso para mim.</a:t>
             </a:r>
@@ -22428,7 +22428,7 @@
                 <a:solidFill>
                   <a:srgbClr val="A5A49F"/>
                 </a:solidFill>
-                <a:latin typeface="Outfit 2 Light"/>
+                <a:latin typeface="Outfit 1 Light"/>
               </a:rPr>
               <a:t>E, mais tarde, ao perceber que o cargo limitaria o seu crescimento:</a:t>
             </a:r>
@@ -22467,7 +22467,7 @@
                 <a:solidFill>
                   <a:srgbClr val="A9724A"/>
                 </a:solidFill>
-                <a:latin typeface="Outfit 2 Light"/>
+                <a:latin typeface="Outfit 1 Light"/>
               </a:rPr>
               <a:t>“</a:t>
             </a:r>
@@ -22506,7 +22506,7 @@
                 <a:solidFill>
                   <a:srgbClr val="1C1C1A"/>
                 </a:solidFill>
-                <a:latin typeface="Outfit 2 Light"/>
+                <a:latin typeface="Outfit 1 Light"/>
               </a:rPr>
               <a:t>Eu queria mais.</a:t>
             </a:r>

--- a/clientes/flavia-muccelin/Revelacao-de-Essencia-Flavia-Pereira-Muccelin.pptx
+++ b/clientes/flavia-muccelin/Revelacao-de-Essencia-Flavia-Pereira-Muccelin.pptx
@@ -11439,7 +11439,7 @@
                 </a:solidFill>
                 <a:latin typeface="Outfit 1 Light"/>
               </a:rPr>
-              <a:t>Não buscamos apenas aquilo que ela gosta de fazer, e sim o que faz uma realização ter significado para a Flávia.</a:t>
+              <a:t>Não se busca apenas aquilo que ela gosta de fazer, e sim o que faz uma realização ter significado para a Flávia.</a:t>
             </a:r>
           </a:p>
         </p:txBody>
@@ -19091,7 +19091,7 @@
                 </a:solidFill>
                 <a:latin typeface="Outfit 1 Light"/>
               </a:rPr>
-              <a:t>Por que começamos pela essência?</a:t>
+              <a:t>Por que a essência vem primeiro?</a:t>
             </a:r>
           </a:p>
         </p:txBody>
@@ -20109,7 +20109,7 @@
                 </a:solidFill>
                 <a:latin typeface="Outfit 1 Light"/>
               </a:rPr>
-              <a:t>Como chegamos à revelação</a:t>
+              <a:t>Como se chega à revelação</a:t>
             </a:r>
           </a:p>
         </p:txBody>

--- a/clientes/flavia-muccelin/Revelacao-de-Essencia-Flavia-Pereira-Muccelin.pptx
+++ b/clientes/flavia-muccelin/Revelacao-de-Essencia-Flavia-Pereira-Muccelin.pptx
@@ -3407,7 +3407,7 @@
           <a:p>
             <a:pPr algn="l">
               <a:lnSpc>
-                <a:spcPct val="140000"/>
+                <a:spcPts val="1330"/>
               </a:lnSpc>
             </a:pPr>
             <a:r>
@@ -3431,7 +3431,7 @@
         <p:spPr>
           <a:xfrm>
             <a:off x="8503920" y="2331720"/>
-            <a:ext cx="8961120" cy="824484"/>
+            <a:ext cx="8961120" cy="935482"/>
           </a:xfrm>
           <a:prstGeom prst="rect">
             <a:avLst/>
@@ -3446,7 +3446,7 @@
           <a:p>
             <a:pPr algn="l">
               <a:lnSpc>
-                <a:spcPct val="114000"/>
+                <a:spcPts val="5206"/>
               </a:lnSpc>
             </a:pPr>
             <a:r>
@@ -3456,7 +3456,7 @@
                 </a:solidFill>
                 <a:latin typeface="Outfit 1 Light"/>
               </a:rPr>
-              <a:t>As experiências que a formaram</a:t>
+              <a:t>AS EXPERIÊNCIAS QUE A FORMARAM</a:t>
             </a:r>
           </a:p>
         </p:txBody>
@@ -3476,7 +3476,7 @@
             <a:avLst/>
           </a:prstGeom>
           <a:solidFill>
-            <a:srgbClr val="DFDDD7"/>
+            <a:srgbClr val="A5A49F"/>
           </a:solidFill>
           <a:ln>
             <a:noFill/>
@@ -3623,7 +3623,7 @@
             <a:avLst/>
           </a:prstGeom>
           <a:solidFill>
-            <a:srgbClr val="DFDDD7"/>
+            <a:srgbClr val="A5A49F"/>
           </a:solidFill>
           <a:ln>
             <a:noFill/>
@@ -3676,13 +3676,13 @@
           <a:p>
             <a:pPr algn="l">
               <a:lnSpc>
-                <a:spcPct val="140000"/>
+                <a:spcPts val="1679"/>
               </a:lnSpc>
             </a:pPr>
             <a:r>
               <a:rPr sz="1200" i="0" b="0" spc="240">
                 <a:solidFill>
-                  <a:srgbClr val="A9724A"/>
+                  <a:srgbClr val="CC754E"/>
                 </a:solidFill>
                 <a:latin typeface="Outfit 1 Semi-Bold"/>
               </a:rPr>
@@ -3715,7 +3715,7 @@
           <a:p>
             <a:pPr algn="l">
               <a:lnSpc>
-                <a:spcPct val="140000"/>
+                <a:spcPts val="3079"/>
               </a:lnSpc>
             </a:pPr>
             <a:r>
@@ -3754,7 +3754,7 @@
           <a:p>
             <a:pPr algn="l">
               <a:lnSpc>
-                <a:spcPct val="140000"/>
+                <a:spcPts val="2029"/>
               </a:lnSpc>
             </a:pPr>
             <a:r>
@@ -3793,7 +3793,7 @@
           <a:p>
             <a:pPr algn="l">
               <a:lnSpc>
-                <a:spcPct val="140000"/>
+                <a:spcPts val="1330"/>
               </a:lnSpc>
             </a:pPr>
             <a:r>
@@ -3832,7 +3832,7 @@
           <a:p>
             <a:pPr algn="l">
               <a:lnSpc>
-                <a:spcPct val="140000"/>
+                <a:spcPts val="2029"/>
               </a:lnSpc>
             </a:pPr>
             <a:r>
@@ -3862,7 +3862,7 @@
             <a:avLst/>
           </a:prstGeom>
           <a:solidFill>
-            <a:srgbClr val="DFDDD7"/>
+            <a:srgbClr val="A5A49F"/>
           </a:solidFill>
           <a:ln>
             <a:noFill/>
@@ -3915,13 +3915,13 @@
           <a:p>
             <a:pPr algn="l">
               <a:lnSpc>
-                <a:spcPct val="140000"/>
+                <a:spcPts val="1679"/>
               </a:lnSpc>
             </a:pPr>
             <a:r>
               <a:rPr sz="1200" i="0" b="0" spc="240">
                 <a:solidFill>
-                  <a:srgbClr val="A9724A"/>
+                  <a:srgbClr val="CC754E"/>
                 </a:solidFill>
                 <a:latin typeface="Outfit 1 Semi-Bold"/>
               </a:rPr>
@@ -3954,7 +3954,7 @@
           <a:p>
             <a:pPr algn="l">
               <a:lnSpc>
-                <a:spcPct val="140000"/>
+                <a:spcPts val="3079"/>
               </a:lnSpc>
             </a:pPr>
             <a:r>
@@ -3993,7 +3993,7 @@
           <a:p>
             <a:pPr algn="l">
               <a:lnSpc>
-                <a:spcPct val="140000"/>
+                <a:spcPts val="2029"/>
               </a:lnSpc>
             </a:pPr>
             <a:r>
@@ -4032,7 +4032,7 @@
           <a:p>
             <a:pPr algn="l">
               <a:lnSpc>
-                <a:spcPct val="140000"/>
+                <a:spcPts val="1330"/>
               </a:lnSpc>
             </a:pPr>
             <a:r>
@@ -4071,7 +4071,7 @@
           <a:p>
             <a:pPr algn="l">
               <a:lnSpc>
-                <a:spcPct val="140000"/>
+                <a:spcPts val="2029"/>
               </a:lnSpc>
             </a:pPr>
             <a:r>
@@ -4231,7 +4231,7 @@
           <a:p>
             <a:pPr algn="l">
               <a:lnSpc>
-                <a:spcPct val="140000"/>
+                <a:spcPts val="1330"/>
               </a:lnSpc>
             </a:pPr>
             <a:r>
@@ -4255,7 +4255,7 @@
         <p:spPr>
           <a:xfrm>
             <a:off x="2011680" y="2331720"/>
-            <a:ext cx="7772400" cy="824484"/>
+            <a:ext cx="7772400" cy="935482"/>
           </a:xfrm>
           <a:prstGeom prst="rect">
             <a:avLst/>
@@ -4270,7 +4270,7 @@
           <a:p>
             <a:pPr algn="l">
               <a:lnSpc>
-                <a:spcPct val="114000"/>
+                <a:spcPts val="5206"/>
               </a:lnSpc>
             </a:pPr>
             <a:r>
@@ -4280,7 +4280,7 @@
                 </a:solidFill>
                 <a:latin typeface="Outfit 1 Light"/>
               </a:rPr>
-              <a:t>As experiências que a formaram</a:t>
+              <a:t>AS EXPERIÊNCIAS QUE A FORMARAM</a:t>
             </a:r>
           </a:p>
         </p:txBody>
@@ -4300,7 +4300,7 @@
             <a:avLst/>
           </a:prstGeom>
           <a:solidFill>
-            <a:srgbClr val="DFDDD7"/>
+            <a:srgbClr val="A5A49F"/>
           </a:solidFill>
           <a:ln>
             <a:noFill/>
@@ -4447,7 +4447,7 @@
             <a:avLst/>
           </a:prstGeom>
           <a:solidFill>
-            <a:srgbClr val="DFDDD7"/>
+            <a:srgbClr val="A5A49F"/>
           </a:solidFill>
           <a:ln>
             <a:noFill/>
@@ -4500,13 +4500,13 @@
           <a:p>
             <a:pPr algn="l">
               <a:lnSpc>
-                <a:spcPct val="140000"/>
+                <a:spcPts val="1679"/>
               </a:lnSpc>
             </a:pPr>
             <a:r>
               <a:rPr sz="1200" i="0" b="0" spc="240">
                 <a:solidFill>
-                  <a:srgbClr val="A9724A"/>
+                  <a:srgbClr val="CC754E"/>
                 </a:solidFill>
                 <a:latin typeface="Outfit 1 Semi-Bold"/>
               </a:rPr>
@@ -4539,7 +4539,7 @@
           <a:p>
             <a:pPr algn="l">
               <a:lnSpc>
-                <a:spcPct val="140000"/>
+                <a:spcPts val="3079"/>
               </a:lnSpc>
             </a:pPr>
             <a:r>
@@ -4578,7 +4578,7 @@
           <a:p>
             <a:pPr algn="l">
               <a:lnSpc>
-                <a:spcPct val="140000"/>
+                <a:spcPts val="2029"/>
               </a:lnSpc>
             </a:pPr>
             <a:r>
@@ -4617,7 +4617,7 @@
           <a:p>
             <a:pPr algn="l">
               <a:lnSpc>
-                <a:spcPct val="140000"/>
+                <a:spcPts val="1330"/>
               </a:lnSpc>
             </a:pPr>
             <a:r>
@@ -4656,7 +4656,7 @@
           <a:p>
             <a:pPr algn="l">
               <a:lnSpc>
-                <a:spcPct val="140000"/>
+                <a:spcPts val="2029"/>
               </a:lnSpc>
             </a:pPr>
             <a:r>
@@ -4686,7 +4686,7 @@
             <a:avLst/>
           </a:prstGeom>
           <a:solidFill>
-            <a:srgbClr val="DFDDD7"/>
+            <a:srgbClr val="A5A49F"/>
           </a:solidFill>
           <a:ln>
             <a:noFill/>
@@ -4739,13 +4739,13 @@
           <a:p>
             <a:pPr algn="l">
               <a:lnSpc>
-                <a:spcPct val="140000"/>
+                <a:spcPts val="1679"/>
               </a:lnSpc>
             </a:pPr>
             <a:r>
               <a:rPr sz="1200" i="0" b="0" spc="240">
                 <a:solidFill>
-                  <a:srgbClr val="A9724A"/>
+                  <a:srgbClr val="CC754E"/>
                 </a:solidFill>
                 <a:latin typeface="Outfit 1 Semi-Bold"/>
               </a:rPr>
@@ -4778,7 +4778,7 @@
           <a:p>
             <a:pPr algn="l">
               <a:lnSpc>
-                <a:spcPct val="140000"/>
+                <a:spcPts val="3079"/>
               </a:lnSpc>
             </a:pPr>
             <a:r>
@@ -4817,7 +4817,7 @@
           <a:p>
             <a:pPr algn="l">
               <a:lnSpc>
-                <a:spcPct val="140000"/>
+                <a:spcPts val="2029"/>
               </a:lnSpc>
             </a:pPr>
             <a:r>
@@ -4856,7 +4856,7 @@
           <a:p>
             <a:pPr algn="l">
               <a:lnSpc>
-                <a:spcPct val="140000"/>
+                <a:spcPts val="1330"/>
               </a:lnSpc>
             </a:pPr>
             <a:r>
@@ -4895,7 +4895,7 @@
           <a:p>
             <a:pPr algn="l">
               <a:lnSpc>
-                <a:spcPct val="140000"/>
+                <a:spcPts val="2029"/>
               </a:lnSpc>
             </a:pPr>
             <a:r>
@@ -5032,13 +5032,13 @@
           <a:p>
             <a:pPr algn="l">
               <a:lnSpc>
-                <a:spcPct val="140000"/>
+                <a:spcPts val="1330"/>
               </a:lnSpc>
             </a:pPr>
             <a:r>
               <a:rPr sz="950" i="0" b="0" spc="300">
                 <a:solidFill>
-                  <a:srgbClr val="A9724A"/>
+                  <a:srgbClr val="CC754E"/>
                 </a:solidFill>
                 <a:latin typeface="Outfit 1 Semi-Bold"/>
               </a:rPr>
@@ -5071,7 +5071,7 @@
           <a:p>
             <a:pPr algn="l">
               <a:lnSpc>
-                <a:spcPct val="100000"/>
+                <a:spcPts val="6200"/>
               </a:lnSpc>
             </a:pPr>
             <a:r>
@@ -5101,7 +5101,7 @@
             <a:avLst/>
           </a:prstGeom>
           <a:solidFill>
-            <a:srgbClr val="DFDDD7"/>
+            <a:srgbClr val="A5A49F"/>
           </a:solidFill>
           <a:ln>
             <a:noFill/>
@@ -5402,7 +5402,7 @@
           <a:p>
             <a:pPr algn="l">
               <a:lnSpc>
-                <a:spcPct val="140000"/>
+                <a:spcPts val="1330"/>
               </a:lnSpc>
             </a:pPr>
             <a:r>
@@ -5426,7 +5426,7 @@
         <p:spPr>
           <a:xfrm>
             <a:off x="8503920" y="2331720"/>
-            <a:ext cx="8961120" cy="824484"/>
+            <a:ext cx="8961120" cy="935482"/>
           </a:xfrm>
           <a:prstGeom prst="rect">
             <a:avLst/>
@@ -5441,7 +5441,7 @@
           <a:p>
             <a:pPr algn="l">
               <a:lnSpc>
-                <a:spcPct val="114000"/>
+                <a:spcPts val="5206"/>
               </a:lnSpc>
             </a:pPr>
             <a:r>
@@ -5451,7 +5451,7 @@
                 </a:solidFill>
                 <a:latin typeface="Outfit 1 Light"/>
               </a:rPr>
-              <a:t>As tensões que a colocaram em movimento</a:t>
+              <a:t>AS TENSÕES QUE A COLOCARAM EM MOVIMENTO</a:t>
             </a:r>
           </a:p>
         </p:txBody>
@@ -5471,7 +5471,7 @@
             <a:avLst/>
           </a:prstGeom>
           <a:solidFill>
-            <a:srgbClr val="DFDDD7"/>
+            <a:srgbClr val="A5A49F"/>
           </a:solidFill>
           <a:ln>
             <a:noFill/>
@@ -5627,7 +5627,7 @@
           <a:p>
             <a:pPr algn="l">
               <a:lnSpc>
-                <a:spcPct val="140000"/>
+                <a:spcPts val="1679"/>
               </a:lnSpc>
             </a:pPr>
             <a:r>
@@ -5652,128 +5652,6 @@
           <a:xfrm>
             <a:off x="8503920" y="4434840"/>
             <a:ext cx="8961120" cy="10973"/>
-          </a:xfrm>
-          <a:prstGeom prst="rect">
-            <a:avLst/>
-          </a:prstGeom>
-          <a:solidFill>
-            <a:srgbClr val="DFDDD7"/>
-          </a:solidFill>
-          <a:ln>
-            <a:noFill/>
-          </a:ln>
-          <a:effectLst/>
-        </p:spPr>
-        <p:style>
-          <a:lnRef idx="1">
-            <a:schemeClr val="accent1"/>
-          </a:lnRef>
-          <a:fillRef idx="3">
-            <a:schemeClr val="accent1"/>
-          </a:fillRef>
-          <a:effectRef idx="2">
-            <a:schemeClr val="accent1"/>
-          </a:effectRef>
-          <a:fontRef idx="minor">
-            <a:schemeClr val="lt1"/>
-          </a:fontRef>
-        </p:style>
-        <p:txBody>
-          <a:bodyPr rtlCol="0" anchor="ctr"/>
-          <a:lstStyle/>
-          <a:p>
-            <a:pPr algn="ctr"/>
-          </a:p>
-        </p:txBody>
-      </p:sp>
-      <p:sp>
-        <p:nvSpPr>
-          <p:cNvPr id="12" name="TextBox 11"/>
-          <p:cNvSpPr txBox="1"/>
-          <p:nvPr/>
-        </p:nvSpPr>
-        <p:spPr>
-          <a:xfrm>
-            <a:off x="8503920" y="4690872"/>
-            <a:ext cx="3763670" cy="256032"/>
-          </a:xfrm>
-          <a:prstGeom prst="rect">
-            <a:avLst/>
-          </a:prstGeom>
-          <a:noFill/>
-        </p:spPr>
-        <p:txBody>
-          <a:bodyPr wrap="square" anchor="t" lIns="0" rIns="0" tIns="0" bIns="0">
-            <a:spAutoFit/>
-          </a:bodyPr>
-          <a:lstStyle/>
-          <a:p>
-            <a:pPr algn="l">
-              <a:lnSpc>
-                <a:spcPct val="140000"/>
-              </a:lnSpc>
-            </a:pPr>
-            <a:r>
-              <a:rPr sz="950" i="0" b="0" spc="220">
-                <a:solidFill>
-                  <a:srgbClr val="A5A49F"/>
-                </a:solidFill>
-                <a:latin typeface="Outfit 1 Semi-Bold"/>
-              </a:rPr>
-              <a:t>A REALIDADE DIZIA</a:t>
-            </a:r>
-          </a:p>
-        </p:txBody>
-      </p:sp>
-      <p:sp>
-        <p:nvSpPr>
-          <p:cNvPr id="13" name="TextBox 12"/>
-          <p:cNvSpPr txBox="1"/>
-          <p:nvPr/>
-        </p:nvSpPr>
-        <p:spPr>
-          <a:xfrm>
-            <a:off x="8503920" y="4983480"/>
-            <a:ext cx="4928616" cy="502920"/>
-          </a:xfrm>
-          <a:prstGeom prst="rect">
-            <a:avLst/>
-          </a:prstGeom>
-          <a:noFill/>
-        </p:spPr>
-        <p:txBody>
-          <a:bodyPr wrap="square" anchor="t" lIns="0" rIns="0" tIns="0" bIns="0">
-            <a:spAutoFit/>
-          </a:bodyPr>
-          <a:lstStyle/>
-          <a:p>
-            <a:pPr algn="l">
-              <a:lnSpc>
-                <a:spcPct val="140000"/>
-              </a:lnSpc>
-            </a:pPr>
-            <a:r>
-              <a:rPr sz="1450" i="1" b="0">
-                <a:solidFill>
-                  <a:srgbClr val="6B6B66"/>
-                </a:solidFill>
-                <a:latin typeface="Outfit 1 Light"/>
-              </a:rPr>
-              <a:t>“Essa é a sua condição.”</a:t>
-            </a:r>
-          </a:p>
-        </p:txBody>
-      </p:sp>
-      <p:sp>
-        <p:nvSpPr>
-          <p:cNvPr id="14" name="Rectangle 13"/>
-          <p:cNvSpPr/>
-          <p:nvPr/>
-        </p:nvSpPr>
-        <p:spPr>
-          <a:xfrm>
-            <a:off x="13880592" y="5020056"/>
-            <a:ext cx="274320" cy="12802"/>
           </a:xfrm>
           <a:prstGeom prst="rect">
             <a:avLst/>
@@ -5810,14 +5688,14 @@
       </p:sp>
       <p:sp>
         <p:nvSpPr>
-          <p:cNvPr id="15" name="TextBox 14"/>
-          <p:cNvSpPr txBox="1"/>
-          <p:nvPr/>
-        </p:nvSpPr>
-        <p:spPr>
-          <a:xfrm>
-            <a:off x="14597482" y="4892040"/>
-            <a:ext cx="2867558" cy="594360"/>
+          <p:cNvPr id="12" name="TextBox 11"/>
+          <p:cNvSpPr txBox="1"/>
+          <p:nvPr/>
+        </p:nvSpPr>
+        <p:spPr>
+          <a:xfrm>
+            <a:off x="8503920" y="4690872"/>
+            <a:ext cx="3763670" cy="256032"/>
           </a:xfrm>
           <a:prstGeom prst="rect">
             <a:avLst/>
@@ -5832,152 +5710,69 @@
           <a:p>
             <a:pPr algn="l">
               <a:lnSpc>
-                <a:spcPct val="140000"/>
-              </a:lnSpc>
-            </a:pPr>
-            <a:r>
-              <a:rPr sz="1450" i="0" b="0">
-                <a:solidFill>
-                  <a:srgbClr val="1C1C1A"/>
+                <a:spcPts val="1330"/>
+              </a:lnSpc>
+            </a:pPr>
+            <a:r>
+              <a:rPr sz="950" i="0" b="0" spc="220">
+                <a:solidFill>
+                  <a:srgbClr val="A5A49F"/>
+                </a:solidFill>
+                <a:latin typeface="Outfit 1 Semi-Bold"/>
+              </a:rPr>
+              <a:t>A REALIDADE DIZIA</a:t>
+            </a:r>
+          </a:p>
+        </p:txBody>
+      </p:sp>
+      <p:sp>
+        <p:nvSpPr>
+          <p:cNvPr id="13" name="TextBox 12"/>
+          <p:cNvSpPr txBox="1"/>
+          <p:nvPr/>
+        </p:nvSpPr>
+        <p:spPr>
+          <a:xfrm>
+            <a:off x="8503920" y="4983480"/>
+            <a:ext cx="4928616" cy="502920"/>
+          </a:xfrm>
+          <a:prstGeom prst="rect">
+            <a:avLst/>
+          </a:prstGeom>
+          <a:noFill/>
+        </p:spPr>
+        <p:txBody>
+          <a:bodyPr wrap="square" anchor="t" lIns="0" rIns="0" tIns="0" bIns="0">
+            <a:spAutoFit/>
+          </a:bodyPr>
+          <a:lstStyle/>
+          <a:p>
+            <a:pPr algn="l">
+              <a:lnSpc>
+                <a:spcPts val="2029"/>
+              </a:lnSpc>
+            </a:pPr>
+            <a:r>
+              <a:rPr sz="1450" i="1" b="0">
+                <a:solidFill>
+                  <a:srgbClr val="6B6B66"/>
                 </a:solidFill>
                 <a:latin typeface="Outfit 1 Light"/>
               </a:rPr>
-              <a:t>A Flávia enxergava outra.</a:t>
-            </a:r>
-          </a:p>
-        </p:txBody>
-      </p:sp>
-      <p:sp>
-        <p:nvSpPr>
-          <p:cNvPr id="16" name="Rectangle 15"/>
+              <a:t>“Essa é a sua condição.”</a:t>
+            </a:r>
+          </a:p>
+        </p:txBody>
+      </p:sp>
+      <p:sp>
+        <p:nvSpPr>
+          <p:cNvPr id="14" name="Rectangle 13"/>
           <p:cNvSpPr/>
           <p:nvPr/>
         </p:nvSpPr>
         <p:spPr>
           <a:xfrm>
-            <a:off x="8503920" y="5440680"/>
-            <a:ext cx="8961120" cy="10973"/>
-          </a:xfrm>
-          <a:prstGeom prst="rect">
-            <a:avLst/>
-          </a:prstGeom>
-          <a:solidFill>
-            <a:srgbClr val="DFDDD7"/>
-          </a:solidFill>
-          <a:ln>
-            <a:noFill/>
-          </a:ln>
-          <a:effectLst/>
-        </p:spPr>
-        <p:style>
-          <a:lnRef idx="1">
-            <a:schemeClr val="accent1"/>
-          </a:lnRef>
-          <a:fillRef idx="3">
-            <a:schemeClr val="accent1"/>
-          </a:fillRef>
-          <a:effectRef idx="2">
-            <a:schemeClr val="accent1"/>
-          </a:effectRef>
-          <a:fontRef idx="minor">
-            <a:schemeClr val="lt1"/>
-          </a:fontRef>
-        </p:style>
-        <p:txBody>
-          <a:bodyPr rtlCol="0" anchor="ctr"/>
-          <a:lstStyle/>
-          <a:p>
-            <a:pPr algn="ctr"/>
-          </a:p>
-        </p:txBody>
-      </p:sp>
-      <p:sp>
-        <p:nvSpPr>
-          <p:cNvPr id="17" name="TextBox 16"/>
-          <p:cNvSpPr txBox="1"/>
-          <p:nvPr/>
-        </p:nvSpPr>
-        <p:spPr>
-          <a:xfrm>
-            <a:off x="8503920" y="5696712"/>
-            <a:ext cx="3763670" cy="256032"/>
-          </a:xfrm>
-          <a:prstGeom prst="rect">
-            <a:avLst/>
-          </a:prstGeom>
-          <a:noFill/>
-        </p:spPr>
-        <p:txBody>
-          <a:bodyPr wrap="square" anchor="t" lIns="0" rIns="0" tIns="0" bIns="0">
-            <a:spAutoFit/>
-          </a:bodyPr>
-          <a:lstStyle/>
-          <a:p>
-            <a:pPr algn="l">
-              <a:lnSpc>
-                <a:spcPct val="140000"/>
-              </a:lnSpc>
-            </a:pPr>
-            <a:r>
-              <a:rPr sz="950" i="0" b="0" spc="220">
-                <a:solidFill>
-                  <a:srgbClr val="A5A49F"/>
-                </a:solidFill>
-                <a:latin typeface="Outfit 1 Semi-Bold"/>
-              </a:rPr>
-              <a:t>O CARGO DIZIA</a:t>
-            </a:r>
-          </a:p>
-        </p:txBody>
-      </p:sp>
-      <p:sp>
-        <p:nvSpPr>
-          <p:cNvPr id="18" name="TextBox 17"/>
-          <p:cNvSpPr txBox="1"/>
-          <p:nvPr/>
-        </p:nvSpPr>
-        <p:spPr>
-          <a:xfrm>
-            <a:off x="8503920" y="5989320"/>
-            <a:ext cx="4928616" cy="502920"/>
-          </a:xfrm>
-          <a:prstGeom prst="rect">
-            <a:avLst/>
-          </a:prstGeom>
-          <a:noFill/>
-        </p:spPr>
-        <p:txBody>
-          <a:bodyPr wrap="square" anchor="t" lIns="0" rIns="0" tIns="0" bIns="0">
-            <a:spAutoFit/>
-          </a:bodyPr>
-          <a:lstStyle/>
-          <a:p>
-            <a:pPr algn="l">
-              <a:lnSpc>
-                <a:spcPct val="140000"/>
-              </a:lnSpc>
-            </a:pPr>
-            <a:r>
-              <a:rPr sz="1450" i="1" b="0">
-                <a:solidFill>
-                  <a:srgbClr val="6B6B66"/>
-                </a:solidFill>
-                <a:latin typeface="Outfit 1 Light"/>
-              </a:rPr>
-              <a:t>“Até aqui você pode chegar.”</a:t>
-            </a:r>
-          </a:p>
-        </p:txBody>
-      </p:sp>
-      <p:sp>
-        <p:nvSpPr>
-          <p:cNvPr id="19" name="Rectangle 18"/>
-          <p:cNvSpPr/>
-          <p:nvPr/>
-        </p:nvSpPr>
-        <p:spPr>
-          <a:xfrm>
-            <a:off x="13880592" y="6025896"/>
+            <a:off x="13880592" y="5020056"/>
             <a:ext cx="274320" cy="12802"/>
           </a:xfrm>
           <a:prstGeom prst="rect">
@@ -6015,13 +5810,13 @@
       </p:sp>
       <p:sp>
         <p:nvSpPr>
-          <p:cNvPr id="20" name="TextBox 19"/>
-          <p:cNvSpPr txBox="1"/>
-          <p:nvPr/>
-        </p:nvSpPr>
-        <p:spPr>
-          <a:xfrm>
-            <a:off x="14597482" y="5897880"/>
+          <p:cNvPr id="15" name="TextBox 14"/>
+          <p:cNvSpPr txBox="1"/>
+          <p:nvPr/>
+        </p:nvSpPr>
+        <p:spPr>
+          <a:xfrm>
+            <a:off x="14597482" y="4892040"/>
             <a:ext cx="2867558" cy="594360"/>
           </a:xfrm>
           <a:prstGeom prst="rect">
@@ -6037,7 +5832,7 @@
           <a:p>
             <a:pPr algn="l">
               <a:lnSpc>
-                <a:spcPct val="140000"/>
+                <a:spcPts val="2029"/>
               </a:lnSpc>
             </a:pPr>
             <a:r>
@@ -6047,143 +5842,21 @@
                 </a:solidFill>
                 <a:latin typeface="Outfit 1 Light"/>
               </a:rPr>
-              <a:t>A Flávia queria mais.</a:t>
-            </a:r>
-          </a:p>
-        </p:txBody>
-      </p:sp>
-      <p:sp>
-        <p:nvSpPr>
-          <p:cNvPr id="21" name="Rectangle 20"/>
+              <a:t>A Flávia enxergava outra.</a:t>
+            </a:r>
+          </a:p>
+        </p:txBody>
+      </p:sp>
+      <p:sp>
+        <p:nvSpPr>
+          <p:cNvPr id="16" name="Rectangle 15"/>
           <p:cNvSpPr/>
           <p:nvPr/>
         </p:nvSpPr>
         <p:spPr>
           <a:xfrm>
-            <a:off x="8503920" y="6446520"/>
+            <a:off x="8503920" y="5440680"/>
             <a:ext cx="8961120" cy="10973"/>
-          </a:xfrm>
-          <a:prstGeom prst="rect">
-            <a:avLst/>
-          </a:prstGeom>
-          <a:solidFill>
-            <a:srgbClr val="DFDDD7"/>
-          </a:solidFill>
-          <a:ln>
-            <a:noFill/>
-          </a:ln>
-          <a:effectLst/>
-        </p:spPr>
-        <p:style>
-          <a:lnRef idx="1">
-            <a:schemeClr val="accent1"/>
-          </a:lnRef>
-          <a:fillRef idx="3">
-            <a:schemeClr val="accent1"/>
-          </a:fillRef>
-          <a:effectRef idx="2">
-            <a:schemeClr val="accent1"/>
-          </a:effectRef>
-          <a:fontRef idx="minor">
-            <a:schemeClr val="lt1"/>
-          </a:fontRef>
-        </p:style>
-        <p:txBody>
-          <a:bodyPr rtlCol="0" anchor="ctr"/>
-          <a:lstStyle/>
-          <a:p>
-            <a:pPr algn="ctr"/>
-          </a:p>
-        </p:txBody>
-      </p:sp>
-      <p:sp>
-        <p:nvSpPr>
-          <p:cNvPr id="22" name="TextBox 21"/>
-          <p:cNvSpPr txBox="1"/>
-          <p:nvPr/>
-        </p:nvSpPr>
-        <p:spPr>
-          <a:xfrm>
-            <a:off x="8503920" y="6702552"/>
-            <a:ext cx="3763670" cy="256032"/>
-          </a:xfrm>
-          <a:prstGeom prst="rect">
-            <a:avLst/>
-          </a:prstGeom>
-          <a:noFill/>
-        </p:spPr>
-        <p:txBody>
-          <a:bodyPr wrap="square" anchor="t" lIns="0" rIns="0" tIns="0" bIns="0">
-            <a:spAutoFit/>
-          </a:bodyPr>
-          <a:lstStyle/>
-          <a:p>
-            <a:pPr algn="l">
-              <a:lnSpc>
-                <a:spcPct val="140000"/>
-              </a:lnSpc>
-            </a:pPr>
-            <a:r>
-              <a:rPr sz="950" i="0" b="0" spc="220">
-                <a:solidFill>
-                  <a:srgbClr val="A5A49F"/>
-                </a:solidFill>
-                <a:latin typeface="Outfit 1 Semi-Bold"/>
-              </a:rPr>
-              <a:t>AS MARCAS PRONTAS DIZIAM</a:t>
-            </a:r>
-          </a:p>
-        </p:txBody>
-      </p:sp>
-      <p:sp>
-        <p:nvSpPr>
-          <p:cNvPr id="23" name="TextBox 22"/>
-          <p:cNvSpPr txBox="1"/>
-          <p:nvPr/>
-        </p:nvSpPr>
-        <p:spPr>
-          <a:xfrm>
-            <a:off x="8503920" y="6995160"/>
-            <a:ext cx="4928616" cy="502920"/>
-          </a:xfrm>
-          <a:prstGeom prst="rect">
-            <a:avLst/>
-          </a:prstGeom>
-          <a:noFill/>
-        </p:spPr>
-        <p:txBody>
-          <a:bodyPr wrap="square" anchor="t" lIns="0" rIns="0" tIns="0" bIns="0">
-            <a:spAutoFit/>
-          </a:bodyPr>
-          <a:lstStyle/>
-          <a:p>
-            <a:pPr algn="l">
-              <a:lnSpc>
-                <a:spcPct val="140000"/>
-              </a:lnSpc>
-            </a:pPr>
-            <a:r>
-              <a:rPr sz="1450" i="1" b="0">
-                <a:solidFill>
-                  <a:srgbClr val="6B6B66"/>
-                </a:solidFill>
-                <a:latin typeface="Outfit 1 Light"/>
-              </a:rPr>
-              <a:t>“É assim que deve ser feito.”</a:t>
-            </a:r>
-          </a:p>
-        </p:txBody>
-      </p:sp>
-      <p:sp>
-        <p:nvSpPr>
-          <p:cNvPr id="24" name="Rectangle 23"/>
-          <p:cNvSpPr/>
-          <p:nvPr/>
-        </p:nvSpPr>
-        <p:spPr>
-          <a:xfrm>
-            <a:off x="13880592" y="7031736"/>
-            <a:ext cx="274320" cy="12802"/>
           </a:xfrm>
           <a:prstGeom prst="rect">
             <a:avLst/>
@@ -6220,6 +5893,333 @@
       </p:sp>
       <p:sp>
         <p:nvSpPr>
+          <p:cNvPr id="17" name="TextBox 16"/>
+          <p:cNvSpPr txBox="1"/>
+          <p:nvPr/>
+        </p:nvSpPr>
+        <p:spPr>
+          <a:xfrm>
+            <a:off x="8503920" y="5696712"/>
+            <a:ext cx="3763670" cy="256032"/>
+          </a:xfrm>
+          <a:prstGeom prst="rect">
+            <a:avLst/>
+          </a:prstGeom>
+          <a:noFill/>
+        </p:spPr>
+        <p:txBody>
+          <a:bodyPr wrap="square" anchor="t" lIns="0" rIns="0" tIns="0" bIns="0">
+            <a:spAutoFit/>
+          </a:bodyPr>
+          <a:lstStyle/>
+          <a:p>
+            <a:pPr algn="l">
+              <a:lnSpc>
+                <a:spcPts val="1330"/>
+              </a:lnSpc>
+            </a:pPr>
+            <a:r>
+              <a:rPr sz="950" i="0" b="0" spc="220">
+                <a:solidFill>
+                  <a:srgbClr val="A5A49F"/>
+                </a:solidFill>
+                <a:latin typeface="Outfit 1 Semi-Bold"/>
+              </a:rPr>
+              <a:t>O CARGO DIZIA</a:t>
+            </a:r>
+          </a:p>
+        </p:txBody>
+      </p:sp>
+      <p:sp>
+        <p:nvSpPr>
+          <p:cNvPr id="18" name="TextBox 17"/>
+          <p:cNvSpPr txBox="1"/>
+          <p:nvPr/>
+        </p:nvSpPr>
+        <p:spPr>
+          <a:xfrm>
+            <a:off x="8503920" y="5989320"/>
+            <a:ext cx="4928616" cy="502920"/>
+          </a:xfrm>
+          <a:prstGeom prst="rect">
+            <a:avLst/>
+          </a:prstGeom>
+          <a:noFill/>
+        </p:spPr>
+        <p:txBody>
+          <a:bodyPr wrap="square" anchor="t" lIns="0" rIns="0" tIns="0" bIns="0">
+            <a:spAutoFit/>
+          </a:bodyPr>
+          <a:lstStyle/>
+          <a:p>
+            <a:pPr algn="l">
+              <a:lnSpc>
+                <a:spcPts val="2029"/>
+              </a:lnSpc>
+            </a:pPr>
+            <a:r>
+              <a:rPr sz="1450" i="1" b="0">
+                <a:solidFill>
+                  <a:srgbClr val="6B6B66"/>
+                </a:solidFill>
+                <a:latin typeface="Outfit 1 Light"/>
+              </a:rPr>
+              <a:t>“Até aqui você pode chegar.”</a:t>
+            </a:r>
+          </a:p>
+        </p:txBody>
+      </p:sp>
+      <p:sp>
+        <p:nvSpPr>
+          <p:cNvPr id="19" name="Rectangle 18"/>
+          <p:cNvSpPr/>
+          <p:nvPr/>
+        </p:nvSpPr>
+        <p:spPr>
+          <a:xfrm>
+            <a:off x="13880592" y="6025896"/>
+            <a:ext cx="274320" cy="12802"/>
+          </a:xfrm>
+          <a:prstGeom prst="rect">
+            <a:avLst/>
+          </a:prstGeom>
+          <a:solidFill>
+            <a:srgbClr val="A5A49F"/>
+          </a:solidFill>
+          <a:ln>
+            <a:noFill/>
+          </a:ln>
+          <a:effectLst/>
+        </p:spPr>
+        <p:style>
+          <a:lnRef idx="1">
+            <a:schemeClr val="accent1"/>
+          </a:lnRef>
+          <a:fillRef idx="3">
+            <a:schemeClr val="accent1"/>
+          </a:fillRef>
+          <a:effectRef idx="2">
+            <a:schemeClr val="accent1"/>
+          </a:effectRef>
+          <a:fontRef idx="minor">
+            <a:schemeClr val="lt1"/>
+          </a:fontRef>
+        </p:style>
+        <p:txBody>
+          <a:bodyPr rtlCol="0" anchor="ctr"/>
+          <a:lstStyle/>
+          <a:p>
+            <a:pPr algn="ctr"/>
+          </a:p>
+        </p:txBody>
+      </p:sp>
+      <p:sp>
+        <p:nvSpPr>
+          <p:cNvPr id="20" name="TextBox 19"/>
+          <p:cNvSpPr txBox="1"/>
+          <p:nvPr/>
+        </p:nvSpPr>
+        <p:spPr>
+          <a:xfrm>
+            <a:off x="14597482" y="5897880"/>
+            <a:ext cx="2867558" cy="594360"/>
+          </a:xfrm>
+          <a:prstGeom prst="rect">
+            <a:avLst/>
+          </a:prstGeom>
+          <a:noFill/>
+        </p:spPr>
+        <p:txBody>
+          <a:bodyPr wrap="square" anchor="t" lIns="0" rIns="0" tIns="0" bIns="0">
+            <a:spAutoFit/>
+          </a:bodyPr>
+          <a:lstStyle/>
+          <a:p>
+            <a:pPr algn="l">
+              <a:lnSpc>
+                <a:spcPts val="2029"/>
+              </a:lnSpc>
+            </a:pPr>
+            <a:r>
+              <a:rPr sz="1450" i="0" b="0">
+                <a:solidFill>
+                  <a:srgbClr val="1C1C1A"/>
+                </a:solidFill>
+                <a:latin typeface="Outfit 1 Light"/>
+              </a:rPr>
+              <a:t>A Flávia queria mais.</a:t>
+            </a:r>
+          </a:p>
+        </p:txBody>
+      </p:sp>
+      <p:sp>
+        <p:nvSpPr>
+          <p:cNvPr id="21" name="Rectangle 20"/>
+          <p:cNvSpPr/>
+          <p:nvPr/>
+        </p:nvSpPr>
+        <p:spPr>
+          <a:xfrm>
+            <a:off x="8503920" y="6446520"/>
+            <a:ext cx="8961120" cy="10973"/>
+          </a:xfrm>
+          <a:prstGeom prst="rect">
+            <a:avLst/>
+          </a:prstGeom>
+          <a:solidFill>
+            <a:srgbClr val="A5A49F"/>
+          </a:solidFill>
+          <a:ln>
+            <a:noFill/>
+          </a:ln>
+          <a:effectLst/>
+        </p:spPr>
+        <p:style>
+          <a:lnRef idx="1">
+            <a:schemeClr val="accent1"/>
+          </a:lnRef>
+          <a:fillRef idx="3">
+            <a:schemeClr val="accent1"/>
+          </a:fillRef>
+          <a:effectRef idx="2">
+            <a:schemeClr val="accent1"/>
+          </a:effectRef>
+          <a:fontRef idx="minor">
+            <a:schemeClr val="lt1"/>
+          </a:fontRef>
+        </p:style>
+        <p:txBody>
+          <a:bodyPr rtlCol="0" anchor="ctr"/>
+          <a:lstStyle/>
+          <a:p>
+            <a:pPr algn="ctr"/>
+          </a:p>
+        </p:txBody>
+      </p:sp>
+      <p:sp>
+        <p:nvSpPr>
+          <p:cNvPr id="22" name="TextBox 21"/>
+          <p:cNvSpPr txBox="1"/>
+          <p:nvPr/>
+        </p:nvSpPr>
+        <p:spPr>
+          <a:xfrm>
+            <a:off x="8503920" y="6702552"/>
+            <a:ext cx="3763670" cy="256032"/>
+          </a:xfrm>
+          <a:prstGeom prst="rect">
+            <a:avLst/>
+          </a:prstGeom>
+          <a:noFill/>
+        </p:spPr>
+        <p:txBody>
+          <a:bodyPr wrap="square" anchor="t" lIns="0" rIns="0" tIns="0" bIns="0">
+            <a:spAutoFit/>
+          </a:bodyPr>
+          <a:lstStyle/>
+          <a:p>
+            <a:pPr algn="l">
+              <a:lnSpc>
+                <a:spcPts val="1330"/>
+              </a:lnSpc>
+            </a:pPr>
+            <a:r>
+              <a:rPr sz="950" i="0" b="0" spc="220">
+                <a:solidFill>
+                  <a:srgbClr val="A5A49F"/>
+                </a:solidFill>
+                <a:latin typeface="Outfit 1 Semi-Bold"/>
+              </a:rPr>
+              <a:t>AS MARCAS PRONTAS DIZIAM</a:t>
+            </a:r>
+          </a:p>
+        </p:txBody>
+      </p:sp>
+      <p:sp>
+        <p:nvSpPr>
+          <p:cNvPr id="23" name="TextBox 22"/>
+          <p:cNvSpPr txBox="1"/>
+          <p:nvPr/>
+        </p:nvSpPr>
+        <p:spPr>
+          <a:xfrm>
+            <a:off x="8503920" y="6995160"/>
+            <a:ext cx="4928616" cy="502920"/>
+          </a:xfrm>
+          <a:prstGeom prst="rect">
+            <a:avLst/>
+          </a:prstGeom>
+          <a:noFill/>
+        </p:spPr>
+        <p:txBody>
+          <a:bodyPr wrap="square" anchor="t" lIns="0" rIns="0" tIns="0" bIns="0">
+            <a:spAutoFit/>
+          </a:bodyPr>
+          <a:lstStyle/>
+          <a:p>
+            <a:pPr algn="l">
+              <a:lnSpc>
+                <a:spcPts val="2029"/>
+              </a:lnSpc>
+            </a:pPr>
+            <a:r>
+              <a:rPr sz="1450" i="1" b="0">
+                <a:solidFill>
+                  <a:srgbClr val="6B6B66"/>
+                </a:solidFill>
+                <a:latin typeface="Outfit 1 Light"/>
+              </a:rPr>
+              <a:t>“É assim que deve ser feito.”</a:t>
+            </a:r>
+          </a:p>
+        </p:txBody>
+      </p:sp>
+      <p:sp>
+        <p:nvSpPr>
+          <p:cNvPr id="24" name="Rectangle 23"/>
+          <p:cNvSpPr/>
+          <p:nvPr/>
+        </p:nvSpPr>
+        <p:spPr>
+          <a:xfrm>
+            <a:off x="13880592" y="7031736"/>
+            <a:ext cx="274320" cy="12802"/>
+          </a:xfrm>
+          <a:prstGeom prst="rect">
+            <a:avLst/>
+          </a:prstGeom>
+          <a:solidFill>
+            <a:srgbClr val="A5A49F"/>
+          </a:solidFill>
+          <a:ln>
+            <a:noFill/>
+          </a:ln>
+          <a:effectLst/>
+        </p:spPr>
+        <p:style>
+          <a:lnRef idx="1">
+            <a:schemeClr val="accent1"/>
+          </a:lnRef>
+          <a:fillRef idx="3">
+            <a:schemeClr val="accent1"/>
+          </a:fillRef>
+          <a:effectRef idx="2">
+            <a:schemeClr val="accent1"/>
+          </a:effectRef>
+          <a:fontRef idx="minor">
+            <a:schemeClr val="lt1"/>
+          </a:fontRef>
+        </p:style>
+        <p:txBody>
+          <a:bodyPr rtlCol="0" anchor="ctr"/>
+          <a:lstStyle/>
+          <a:p>
+            <a:pPr algn="ctr"/>
+          </a:p>
+        </p:txBody>
+      </p:sp>
+      <p:sp>
+        <p:nvSpPr>
           <p:cNvPr id="25" name="TextBox 24"/>
           <p:cNvSpPr txBox="1"/>
           <p:nvPr/>
@@ -6242,7 +6242,7 @@
           <a:p>
             <a:pPr algn="l">
               <a:lnSpc>
-                <a:spcPct val="140000"/>
+                <a:spcPts val="2029"/>
               </a:lnSpc>
             </a:pPr>
             <a:r>
@@ -6272,7 +6272,7 @@
             <a:avLst/>
           </a:prstGeom>
           <a:solidFill>
-            <a:srgbClr val="DFDDD7"/>
+            <a:srgbClr val="A5A49F"/>
           </a:solidFill>
           <a:ln>
             <a:noFill/>
@@ -6446,7 +6446,7 @@
           <a:p>
             <a:pPr algn="l">
               <a:lnSpc>
-                <a:spcPct val="140000"/>
+                <a:spcPts val="1330"/>
               </a:lnSpc>
             </a:pPr>
             <a:r>
@@ -6470,7 +6470,7 @@
         <p:spPr>
           <a:xfrm>
             <a:off x="2011680" y="2331720"/>
-            <a:ext cx="7772400" cy="824484"/>
+            <a:ext cx="7772400" cy="935482"/>
           </a:xfrm>
           <a:prstGeom prst="rect">
             <a:avLst/>
@@ -6485,7 +6485,7 @@
           <a:p>
             <a:pPr algn="l">
               <a:lnSpc>
-                <a:spcPct val="114000"/>
+                <a:spcPts val="5206"/>
               </a:lnSpc>
             </a:pPr>
             <a:r>
@@ -6495,7 +6495,7 @@
                 </a:solidFill>
                 <a:latin typeface="Outfit 1 Light"/>
               </a:rPr>
-              <a:t>As tensões que a colocaram em movimento</a:t>
+              <a:t>AS TENSÕES QUE A COLOCARAM EM MOVIMENTO</a:t>
             </a:r>
           </a:p>
         </p:txBody>
@@ -6515,7 +6515,7 @@
             <a:avLst/>
           </a:prstGeom>
           <a:solidFill>
-            <a:srgbClr val="DFDDD7"/>
+            <a:srgbClr val="A5A49F"/>
           </a:solidFill>
           <a:ln>
             <a:noFill/>
@@ -6662,7 +6662,7 @@
             <a:avLst/>
           </a:prstGeom>
           <a:solidFill>
-            <a:srgbClr val="DFDDD7"/>
+            <a:srgbClr val="A5A49F"/>
           </a:solidFill>
           <a:ln>
             <a:noFill/>
@@ -6715,7 +6715,7 @@
           <a:p>
             <a:pPr algn="l">
               <a:lnSpc>
-                <a:spcPct val="140000"/>
+                <a:spcPts val="1330"/>
               </a:lnSpc>
             </a:pPr>
             <a:r>
@@ -6754,7 +6754,7 @@
           <a:p>
             <a:pPr algn="l">
               <a:lnSpc>
-                <a:spcPct val="140000"/>
+                <a:spcPts val="2029"/>
               </a:lnSpc>
             </a:pPr>
             <a:r>
@@ -6837,7 +6837,7 @@
           <a:p>
             <a:pPr algn="l">
               <a:lnSpc>
-                <a:spcPct val="140000"/>
+                <a:spcPts val="2029"/>
               </a:lnSpc>
             </a:pPr>
             <a:r>
@@ -6862,128 +6862,6 @@
           <a:xfrm>
             <a:off x="2011680" y="5303520"/>
             <a:ext cx="7772400" cy="10973"/>
-          </a:xfrm>
-          <a:prstGeom prst="rect">
-            <a:avLst/>
-          </a:prstGeom>
-          <a:solidFill>
-            <a:srgbClr val="DFDDD7"/>
-          </a:solidFill>
-          <a:ln>
-            <a:noFill/>
-          </a:ln>
-          <a:effectLst/>
-        </p:spPr>
-        <p:style>
-          <a:lnRef idx="1">
-            <a:schemeClr val="accent1"/>
-          </a:lnRef>
-          <a:fillRef idx="3">
-            <a:schemeClr val="accent1"/>
-          </a:fillRef>
-          <a:effectRef idx="2">
-            <a:schemeClr val="accent1"/>
-          </a:effectRef>
-          <a:fontRef idx="minor">
-            <a:schemeClr val="lt1"/>
-          </a:fontRef>
-        </p:style>
-        <p:txBody>
-          <a:bodyPr rtlCol="0" anchor="ctr"/>
-          <a:lstStyle/>
-          <a:p>
-            <a:pPr algn="ctr"/>
-          </a:p>
-        </p:txBody>
-      </p:sp>
-      <p:sp>
-        <p:nvSpPr>
-          <p:cNvPr id="16" name="TextBox 15"/>
-          <p:cNvSpPr txBox="1"/>
-          <p:nvPr/>
-        </p:nvSpPr>
-        <p:spPr>
-          <a:xfrm>
-            <a:off x="2011680" y="5559552"/>
-            <a:ext cx="3264408" cy="256032"/>
-          </a:xfrm>
-          <a:prstGeom prst="rect">
-            <a:avLst/>
-          </a:prstGeom>
-          <a:noFill/>
-        </p:spPr>
-        <p:txBody>
-          <a:bodyPr wrap="square" anchor="t" lIns="0" rIns="0" tIns="0" bIns="0">
-            <a:spAutoFit/>
-          </a:bodyPr>
-          <a:lstStyle/>
-          <a:p>
-            <a:pPr algn="l">
-              <a:lnSpc>
-                <a:spcPct val="140000"/>
-              </a:lnSpc>
-            </a:pPr>
-            <a:r>
-              <a:rPr sz="950" i="0" b="0" spc="220">
-                <a:solidFill>
-                  <a:srgbClr val="A5A49F"/>
-                </a:solidFill>
-                <a:latin typeface="Outfit 1 Semi-Bold"/>
-              </a:rPr>
-              <a:t>AS SOBRAS TINHAM UM DESTINO</a:t>
-            </a:r>
-          </a:p>
-        </p:txBody>
-      </p:sp>
-      <p:sp>
-        <p:nvSpPr>
-          <p:cNvPr id="17" name="TextBox 16"/>
-          <p:cNvSpPr txBox="1"/>
-          <p:nvPr/>
-        </p:nvSpPr>
-        <p:spPr>
-          <a:xfrm>
-            <a:off x="2011680" y="5852160"/>
-            <a:ext cx="4274820" cy="502920"/>
-          </a:xfrm>
-          <a:prstGeom prst="rect">
-            <a:avLst/>
-          </a:prstGeom>
-          <a:noFill/>
-        </p:spPr>
-        <p:txBody>
-          <a:bodyPr wrap="square" anchor="t" lIns="0" rIns="0" tIns="0" bIns="0">
-            <a:spAutoFit/>
-          </a:bodyPr>
-          <a:lstStyle/>
-          <a:p>
-            <a:pPr algn="l">
-              <a:lnSpc>
-                <a:spcPct val="140000"/>
-              </a:lnSpc>
-            </a:pPr>
-            <a:r>
-              <a:rPr sz="1450" i="1" b="0">
-                <a:solidFill>
-                  <a:srgbClr val="6B6B66"/>
-                </a:solidFill>
-                <a:latin typeface="Outfit 1 Light"/>
-              </a:rPr>
-              <a:t>“O descarte.”</a:t>
-            </a:r>
-          </a:p>
-        </p:txBody>
-      </p:sp>
-      <p:sp>
-        <p:nvSpPr>
-          <p:cNvPr id="18" name="Rectangle 17"/>
-          <p:cNvSpPr/>
-          <p:nvPr/>
-        </p:nvSpPr>
-        <p:spPr>
-          <a:xfrm>
-            <a:off x="6675120" y="5888736"/>
-            <a:ext cx="274320" cy="12802"/>
           </a:xfrm>
           <a:prstGeom prst="rect">
             <a:avLst/>
@@ -7020,14 +6898,14 @@
       </p:sp>
       <p:sp>
         <p:nvSpPr>
-          <p:cNvPr id="19" name="TextBox 18"/>
-          <p:cNvSpPr txBox="1"/>
-          <p:nvPr/>
-        </p:nvSpPr>
-        <p:spPr>
-          <a:xfrm>
-            <a:off x="7296912" y="5760720"/>
-            <a:ext cx="2487168" cy="594360"/>
+          <p:cNvPr id="16" name="TextBox 15"/>
+          <p:cNvSpPr txBox="1"/>
+          <p:nvPr/>
+        </p:nvSpPr>
+        <p:spPr>
+          <a:xfrm>
+            <a:off x="2011680" y="5559552"/>
+            <a:ext cx="3264408" cy="256032"/>
           </a:xfrm>
           <a:prstGeom prst="rect">
             <a:avLst/>
@@ -7042,37 +6920,76 @@
           <a:p>
             <a:pPr algn="l">
               <a:lnSpc>
-                <a:spcPct val="140000"/>
-              </a:lnSpc>
-            </a:pPr>
-            <a:r>
-              <a:rPr sz="1450" i="0" b="0">
-                <a:solidFill>
-                  <a:srgbClr val="1C1C1A"/>
+                <a:spcPts val="1330"/>
+              </a:lnSpc>
+            </a:pPr>
+            <a:r>
+              <a:rPr sz="950" i="0" b="0" spc="220">
+                <a:solidFill>
+                  <a:srgbClr val="A5A49F"/>
+                </a:solidFill>
+                <a:latin typeface="Outfit 1 Semi-Bold"/>
+              </a:rPr>
+              <a:t>AS SOBRAS TINHAM UM DESTINO</a:t>
+            </a:r>
+          </a:p>
+        </p:txBody>
+      </p:sp>
+      <p:sp>
+        <p:nvSpPr>
+          <p:cNvPr id="17" name="TextBox 16"/>
+          <p:cNvSpPr txBox="1"/>
+          <p:nvPr/>
+        </p:nvSpPr>
+        <p:spPr>
+          <a:xfrm>
+            <a:off x="2011680" y="5852160"/>
+            <a:ext cx="4274820" cy="502920"/>
+          </a:xfrm>
+          <a:prstGeom prst="rect">
+            <a:avLst/>
+          </a:prstGeom>
+          <a:noFill/>
+        </p:spPr>
+        <p:txBody>
+          <a:bodyPr wrap="square" anchor="t" lIns="0" rIns="0" tIns="0" bIns="0">
+            <a:spAutoFit/>
+          </a:bodyPr>
+          <a:lstStyle/>
+          <a:p>
+            <a:pPr algn="l">
+              <a:lnSpc>
+                <a:spcPts val="2029"/>
+              </a:lnSpc>
+            </a:pPr>
+            <a:r>
+              <a:rPr sz="1450" i="1" b="0">
+                <a:solidFill>
+                  <a:srgbClr val="6B6B66"/>
                 </a:solidFill>
                 <a:latin typeface="Outfit 1 Light"/>
               </a:rPr>
-              <a:t>A Flávia enxergou matéria para uma nova criação.</a:t>
-            </a:r>
-          </a:p>
-        </p:txBody>
-      </p:sp>
-      <p:sp>
-        <p:nvSpPr>
-          <p:cNvPr id="20" name="Rectangle 19"/>
+              <a:t>“O descarte.”</a:t>
+            </a:r>
+          </a:p>
+        </p:txBody>
+      </p:sp>
+      <p:sp>
+        <p:nvSpPr>
+          <p:cNvPr id="18" name="Rectangle 17"/>
           <p:cNvSpPr/>
           <p:nvPr/>
         </p:nvSpPr>
         <p:spPr>
           <a:xfrm>
-            <a:off x="2011680" y="6309360"/>
-            <a:ext cx="7772400" cy="10973"/>
+            <a:off x="6675120" y="5888736"/>
+            <a:ext cx="274320" cy="12802"/>
           </a:xfrm>
           <a:prstGeom prst="rect">
             <a:avLst/>
           </a:prstGeom>
           <a:solidFill>
-            <a:srgbClr val="DFDDD7"/>
+            <a:srgbClr val="A5A49F"/>
           </a:solidFill>
           <a:ln>
             <a:noFill/>
@@ -7103,6 +7020,89 @@
       </p:sp>
       <p:sp>
         <p:nvSpPr>
+          <p:cNvPr id="19" name="TextBox 18"/>
+          <p:cNvSpPr txBox="1"/>
+          <p:nvPr/>
+        </p:nvSpPr>
+        <p:spPr>
+          <a:xfrm>
+            <a:off x="7296912" y="5760720"/>
+            <a:ext cx="2487168" cy="594360"/>
+          </a:xfrm>
+          <a:prstGeom prst="rect">
+            <a:avLst/>
+          </a:prstGeom>
+          <a:noFill/>
+        </p:spPr>
+        <p:txBody>
+          <a:bodyPr wrap="square" anchor="t" lIns="0" rIns="0" tIns="0" bIns="0">
+            <a:spAutoFit/>
+          </a:bodyPr>
+          <a:lstStyle/>
+          <a:p>
+            <a:pPr algn="l">
+              <a:lnSpc>
+                <a:spcPts val="2029"/>
+              </a:lnSpc>
+            </a:pPr>
+            <a:r>
+              <a:rPr sz="1450" i="0" b="0">
+                <a:solidFill>
+                  <a:srgbClr val="1C1C1A"/>
+                </a:solidFill>
+                <a:latin typeface="Outfit 1 Light"/>
+              </a:rPr>
+              <a:t>A Flávia enxergou matéria para uma nova criação.</a:t>
+            </a:r>
+          </a:p>
+        </p:txBody>
+      </p:sp>
+      <p:sp>
+        <p:nvSpPr>
+          <p:cNvPr id="20" name="Rectangle 19"/>
+          <p:cNvSpPr/>
+          <p:nvPr/>
+        </p:nvSpPr>
+        <p:spPr>
+          <a:xfrm>
+            <a:off x="2011680" y="6309360"/>
+            <a:ext cx="7772400" cy="10973"/>
+          </a:xfrm>
+          <a:prstGeom prst="rect">
+            <a:avLst/>
+          </a:prstGeom>
+          <a:solidFill>
+            <a:srgbClr val="A5A49F"/>
+          </a:solidFill>
+          <a:ln>
+            <a:noFill/>
+          </a:ln>
+          <a:effectLst/>
+        </p:spPr>
+        <p:style>
+          <a:lnRef idx="1">
+            <a:schemeClr val="accent1"/>
+          </a:lnRef>
+          <a:fillRef idx="3">
+            <a:schemeClr val="accent1"/>
+          </a:fillRef>
+          <a:effectRef idx="2">
+            <a:schemeClr val="accent1"/>
+          </a:effectRef>
+          <a:fontRef idx="minor">
+            <a:schemeClr val="lt1"/>
+          </a:fontRef>
+        </p:style>
+        <p:txBody>
+          <a:bodyPr rtlCol="0" anchor="ctr"/>
+          <a:lstStyle/>
+          <a:p>
+            <a:pPr algn="ctr"/>
+          </a:p>
+        </p:txBody>
+      </p:sp>
+      <p:sp>
+        <p:nvSpPr>
           <p:cNvPr id="21" name="TextBox 20"/>
           <p:cNvSpPr txBox="1"/>
           <p:nvPr/>
@@ -7125,7 +7125,7 @@
           <a:p>
             <a:pPr algn="l">
               <a:lnSpc>
-                <a:spcPct val="140000"/>
+                <a:spcPts val="2029"/>
               </a:lnSpc>
             </a:pPr>
             <a:r>
@@ -7262,13 +7262,13 @@
           <a:p>
             <a:pPr algn="l">
               <a:lnSpc>
-                <a:spcPct val="140000"/>
+                <a:spcPts val="1330"/>
               </a:lnSpc>
             </a:pPr>
             <a:r>
               <a:rPr sz="950" i="0" b="0" spc="300">
                 <a:solidFill>
-                  <a:srgbClr val="A9724A"/>
+                  <a:srgbClr val="CC754E"/>
                 </a:solidFill>
                 <a:latin typeface="Outfit 1 Semi-Bold"/>
               </a:rPr>
@@ -7301,7 +7301,7 @@
           <a:p>
             <a:pPr algn="l">
               <a:lnSpc>
-                <a:spcPct val="100000"/>
+                <a:spcPts val="6200"/>
               </a:lnSpc>
             </a:pPr>
             <a:r>
@@ -7331,7 +7331,7 @@
             <a:avLst/>
           </a:prstGeom>
           <a:solidFill>
-            <a:srgbClr val="DFDDD7"/>
+            <a:srgbClr val="A5A49F"/>
           </a:solidFill>
           <a:ln>
             <a:noFill/>
@@ -7632,7 +7632,7 @@
           <a:p>
             <a:pPr algn="l">
               <a:lnSpc>
-                <a:spcPct val="140000"/>
+                <a:spcPts val="1330"/>
               </a:lnSpc>
             </a:pPr>
             <a:r>
@@ -7656,7 +7656,7 @@
         <p:spPr>
           <a:xfrm>
             <a:off x="8503920" y="2331720"/>
-            <a:ext cx="8961120" cy="824484"/>
+            <a:ext cx="8961120" cy="935482"/>
           </a:xfrm>
           <a:prstGeom prst="rect">
             <a:avLst/>
@@ -7671,7 +7671,7 @@
           <a:p>
             <a:pPr algn="l">
               <a:lnSpc>
-                <a:spcPct val="114000"/>
+                <a:spcPts val="5206"/>
               </a:lnSpc>
             </a:pPr>
             <a:r>
@@ -7681,7 +7681,7 @@
                 </a:solidFill>
                 <a:latin typeface="Outfit 1 Light"/>
               </a:rPr>
-              <a:t>O padrão invisível</a:t>
+              <a:t>O PADRÃO INVISÍVEL</a:t>
             </a:r>
           </a:p>
         </p:txBody>
@@ -7701,7 +7701,7 @@
             <a:avLst/>
           </a:prstGeom>
           <a:solidFill>
-            <a:srgbClr val="DFDDD7"/>
+            <a:srgbClr val="A5A49F"/>
           </a:solidFill>
           <a:ln>
             <a:noFill/>
@@ -7857,7 +7857,7 @@
           <a:p>
             <a:pPr algn="l">
               <a:lnSpc>
-                <a:spcPct val="140000"/>
+                <a:spcPts val="1679"/>
               </a:lnSpc>
             </a:pPr>
             <a:r>
@@ -7887,7 +7887,7 @@
             <a:avLst/>
           </a:prstGeom>
           <a:solidFill>
-            <a:srgbClr val="A9724A"/>
+            <a:srgbClr val="CC754E"/>
           </a:solidFill>
           <a:ln>
             <a:noFill/>
@@ -7940,7 +7940,7 @@
           <a:p>
             <a:pPr algn="l">
               <a:lnSpc>
-                <a:spcPct val="140000"/>
+                <a:spcPts val="3079"/>
               </a:lnSpc>
             </a:pPr>
             <a:r>
@@ -8014,7 +8014,7 @@
             <a:avLst/>
           </a:prstGeom>
           <a:solidFill>
-            <a:srgbClr val="A9724A"/>
+            <a:srgbClr val="CC754E"/>
           </a:solidFill>
           <a:ln>
             <a:noFill/>
@@ -8067,7 +8067,7 @@
           <a:p>
             <a:pPr algn="l">
               <a:lnSpc>
-                <a:spcPct val="140000"/>
+                <a:spcPts val="3079"/>
               </a:lnSpc>
             </a:pPr>
             <a:r>
@@ -8141,7 +8141,7 @@
             <a:avLst/>
           </a:prstGeom>
           <a:solidFill>
-            <a:srgbClr val="A9724A"/>
+            <a:srgbClr val="CC754E"/>
           </a:solidFill>
           <a:ln>
             <a:noFill/>
@@ -8194,7 +8194,7 @@
           <a:p>
             <a:pPr algn="l">
               <a:lnSpc>
-                <a:spcPct val="140000"/>
+                <a:spcPts val="3079"/>
               </a:lnSpc>
             </a:pPr>
             <a:r>
@@ -8224,7 +8224,7 @@
             <a:avLst/>
           </a:prstGeom>
           <a:solidFill>
-            <a:srgbClr val="A9724A"/>
+            <a:srgbClr val="CC754E"/>
           </a:solidFill>
           <a:ln>
             <a:noFill/>
@@ -8277,7 +8277,7 @@
           <a:p>
             <a:pPr algn="l">
               <a:lnSpc>
-                <a:spcPct val="140000"/>
+                <a:spcPts val="2029"/>
               </a:lnSpc>
             </a:pPr>
             <a:r>
@@ -8437,7 +8437,7 @@
           <a:p>
             <a:pPr algn="l">
               <a:lnSpc>
-                <a:spcPct val="140000"/>
+                <a:spcPts val="1330"/>
               </a:lnSpc>
             </a:pPr>
             <a:r>
@@ -8461,7 +8461,7 @@
         <p:spPr>
           <a:xfrm>
             <a:off x="2011680" y="2331720"/>
-            <a:ext cx="7772400" cy="824484"/>
+            <a:ext cx="7772400" cy="935482"/>
           </a:xfrm>
           <a:prstGeom prst="rect">
             <a:avLst/>
@@ -8476,7 +8476,7 @@
           <a:p>
             <a:pPr algn="l">
               <a:lnSpc>
-                <a:spcPct val="114000"/>
+                <a:spcPts val="5206"/>
               </a:lnSpc>
             </a:pPr>
             <a:r>
@@ -8486,7 +8486,7 @@
                 </a:solidFill>
                 <a:latin typeface="Outfit 1 Light"/>
               </a:rPr>
-              <a:t>O movimento que se repete</a:t>
+              <a:t>O MOVIMENTO QUE SE REPETE</a:t>
             </a:r>
           </a:p>
         </p:txBody>
@@ -8506,7 +8506,7 @@
             <a:avLst/>
           </a:prstGeom>
           <a:solidFill>
-            <a:srgbClr val="DFDDD7"/>
+            <a:srgbClr val="A5A49F"/>
           </a:solidFill>
           <a:ln>
             <a:noFill/>
@@ -8706,7 +8706,7 @@
           <a:p>
             <a:pPr algn="l">
               <a:lnSpc>
-                <a:spcPct val="140000"/>
+                <a:spcPts val="2029"/>
               </a:lnSpc>
             </a:pPr>
             <a:r>
@@ -8833,7 +8833,7 @@
           <a:p>
             <a:pPr algn="l">
               <a:lnSpc>
-                <a:spcPct val="140000"/>
+                <a:spcPts val="2029"/>
               </a:lnSpc>
             </a:pPr>
             <a:r>
@@ -8960,7 +8960,7 @@
           <a:p>
             <a:pPr algn="l">
               <a:lnSpc>
-                <a:spcPct val="140000"/>
+                <a:spcPts val="2029"/>
               </a:lnSpc>
             </a:pPr>
             <a:r>
@@ -9087,7 +9087,7 @@
           <a:p>
             <a:pPr algn="l">
               <a:lnSpc>
-                <a:spcPct val="140000"/>
+                <a:spcPts val="2029"/>
               </a:lnSpc>
             </a:pPr>
             <a:r>
@@ -9214,7 +9214,7 @@
           <a:p>
             <a:pPr algn="l">
               <a:lnSpc>
-                <a:spcPct val="140000"/>
+                <a:spcPts val="2029"/>
               </a:lnSpc>
             </a:pPr>
             <a:r>
@@ -9288,7 +9288,7 @@
             <a:avLst/>
           </a:prstGeom>
           <a:solidFill>
-            <a:srgbClr val="A9724A"/>
+            <a:srgbClr val="CC754E"/>
           </a:solidFill>
           <a:ln>
             <a:noFill/>
@@ -9341,7 +9341,7 @@
           <a:p>
             <a:pPr algn="l">
               <a:lnSpc>
-                <a:spcPct val="140000"/>
+                <a:spcPts val="2029"/>
               </a:lnSpc>
             </a:pPr>
             <a:r>
@@ -9371,7 +9371,7 @@
             <a:avLst/>
           </a:prstGeom>
           <a:solidFill>
-            <a:srgbClr val="DFDDD7"/>
+            <a:srgbClr val="A5A49F"/>
           </a:solidFill>
           <a:ln>
             <a:noFill/>
@@ -9439,7 +9439,7 @@
             <a:r>
               <a:rPr sz="2200" i="0" b="0">
                 <a:solidFill>
-                  <a:srgbClr val="A9724A"/>
+                  <a:srgbClr val="CC754E"/>
                 </a:solidFill>
                 <a:latin typeface="Outfit 1 Light"/>
               </a:rPr>
@@ -9457,7 +9457,7 @@
             <a:r>
               <a:rPr sz="2200" i="0" b="0">
                 <a:solidFill>
-                  <a:srgbClr val="A9724A"/>
+                  <a:srgbClr val="CC754E"/>
                 </a:solidFill>
                 <a:latin typeface="Outfit 1 Light"/>
               </a:rPr>
@@ -9597,7 +9597,7 @@
           <a:p>
             <a:pPr algn="l">
               <a:lnSpc>
-                <a:spcPct val="140000"/>
+                <a:spcPts val="1330"/>
               </a:lnSpc>
             </a:pPr>
             <a:r>
@@ -9636,7 +9636,7 @@
           <a:p>
             <a:pPr algn="l">
               <a:lnSpc>
-                <a:spcPct val="140000"/>
+                <a:spcPts val="2379"/>
               </a:lnSpc>
             </a:pPr>
             <a:r>
@@ -9675,7 +9675,7 @@
           <a:p>
             <a:pPr algn="l">
               <a:lnSpc>
-                <a:spcPct val="126000"/>
+                <a:spcPts val="5796"/>
               </a:lnSpc>
             </a:pPr>
             <a:r>
@@ -9691,7 +9691,7 @@
           <a:p>
             <a:pPr algn="l">
               <a:lnSpc>
-                <a:spcPct val="126000"/>
+                <a:spcPts val="5796"/>
               </a:lnSpc>
             </a:pPr>
             <a:r>
@@ -9721,7 +9721,7 @@
             <a:avLst/>
           </a:prstGeom>
           <a:solidFill>
-            <a:srgbClr val="A9724A"/>
+            <a:srgbClr val="CC754E"/>
           </a:solidFill>
           <a:ln>
             <a:noFill/>
@@ -9999,13 +9999,13 @@
           <a:p>
             <a:pPr algn="l">
               <a:lnSpc>
-                <a:spcPct val="140000"/>
+                <a:spcPts val="1330"/>
               </a:lnSpc>
             </a:pPr>
             <a:r>
               <a:rPr sz="950" i="0" b="0" spc="300">
                 <a:solidFill>
-                  <a:srgbClr val="A9724A"/>
+                  <a:srgbClr val="CC754E"/>
                 </a:solidFill>
                 <a:latin typeface="Outfit 1 Semi-Bold"/>
               </a:rPr>
@@ -10038,7 +10038,7 @@
           <a:p>
             <a:pPr algn="l">
               <a:lnSpc>
-                <a:spcPct val="100000"/>
+                <a:spcPts val="6200"/>
               </a:lnSpc>
             </a:pPr>
             <a:r>
@@ -10068,7 +10068,7 @@
             <a:avLst/>
           </a:prstGeom>
           <a:solidFill>
-            <a:srgbClr val="DFDDD7"/>
+            <a:srgbClr val="A5A49F"/>
           </a:solidFill>
           <a:ln>
             <a:noFill/>
@@ -10324,7 +10324,7 @@
           <a:p>
             <a:pPr algn="l">
               <a:lnSpc>
-                <a:spcPct val="106000"/>
+                <a:spcPts val="8056"/>
               </a:lnSpc>
             </a:pPr>
             <a:r>
@@ -10340,7 +10340,7 @@
           <a:p>
             <a:pPr algn="l">
               <a:lnSpc>
-                <a:spcPct val="106000"/>
+                <a:spcPts val="8056"/>
               </a:lnSpc>
             </a:pPr>
             <a:r>
@@ -10370,7 +10370,7 @@
             <a:avLst/>
           </a:prstGeom>
           <a:solidFill>
-            <a:srgbClr val="A9724A"/>
+            <a:srgbClr val="CC754E"/>
           </a:solidFill>
           <a:ln>
             <a:noFill/>
@@ -10423,7 +10423,7 @@
           <a:p>
             <a:pPr algn="l">
               <a:lnSpc>
-                <a:spcPct val="140000"/>
+                <a:spcPts val="3079"/>
               </a:lnSpc>
             </a:pPr>
             <a:r>
@@ -10530,7 +10530,7 @@
           <a:p>
             <a:pPr algn="l">
               <a:lnSpc>
-                <a:spcPct val="125000"/>
+                <a:spcPts val="2125"/>
               </a:lnSpc>
             </a:pPr>
             <a:r>
@@ -10546,7 +10546,7 @@
           <a:p>
             <a:pPr algn="l">
               <a:lnSpc>
-                <a:spcPct val="125000"/>
+                <a:spcPts val="2125"/>
               </a:lnSpc>
             </a:pPr>
             <a:r>
@@ -10629,7 +10629,7 @@
           <a:p>
             <a:pPr algn="l">
               <a:lnSpc>
-                <a:spcPct val="140000"/>
+                <a:spcPts val="1679"/>
               </a:lnSpc>
             </a:pPr>
             <a:r>
@@ -10789,7 +10789,7 @@
           <a:p>
             <a:pPr algn="l">
               <a:lnSpc>
-                <a:spcPct val="140000"/>
+                <a:spcPts val="1330"/>
               </a:lnSpc>
             </a:pPr>
             <a:r>
@@ -10813,7 +10813,7 @@
         <p:spPr>
           <a:xfrm>
             <a:off x="8503920" y="2331720"/>
-            <a:ext cx="8961120" cy="824484"/>
+            <a:ext cx="8961120" cy="935482"/>
           </a:xfrm>
           <a:prstGeom prst="rect">
             <a:avLst/>
@@ -10828,7 +10828,7 @@
           <a:p>
             <a:pPr algn="l">
               <a:lnSpc>
-                <a:spcPct val="114000"/>
+                <a:spcPts val="5206"/>
               </a:lnSpc>
             </a:pPr>
             <a:r>
@@ -10838,7 +10838,7 @@
                 </a:solidFill>
                 <a:latin typeface="Outfit 1 Light"/>
               </a:rPr>
-              <a:t>O que move a Flávia?</a:t>
+              <a:t>O QUE MOVE A FLÁVIA?</a:t>
             </a:r>
           </a:p>
         </p:txBody>
@@ -10858,7 +10858,7 @@
             <a:avLst/>
           </a:prstGeom>
           <a:solidFill>
-            <a:srgbClr val="DFDDD7"/>
+            <a:srgbClr val="A5A49F"/>
           </a:solidFill>
           <a:ln>
             <a:noFill/>
@@ -11014,7 +11014,7 @@
           <a:p>
             <a:pPr algn="l">
               <a:lnSpc>
-                <a:spcPct val="140000"/>
+                <a:spcPts val="2029"/>
               </a:lnSpc>
             </a:pPr>
             <a:r>
@@ -11097,7 +11097,7 @@
           <a:p>
             <a:pPr algn="l">
               <a:lnSpc>
-                <a:spcPct val="140000"/>
+                <a:spcPts val="2379"/>
               </a:lnSpc>
             </a:pPr>
             <a:r>
@@ -11180,7 +11180,7 @@
           <a:p>
             <a:pPr algn="l">
               <a:lnSpc>
-                <a:spcPct val="140000"/>
+                <a:spcPts val="2379"/>
               </a:lnSpc>
             </a:pPr>
             <a:r>
@@ -11263,7 +11263,7 @@
           <a:p>
             <a:pPr algn="l">
               <a:lnSpc>
-                <a:spcPct val="140000"/>
+                <a:spcPts val="2379"/>
               </a:lnSpc>
             </a:pPr>
             <a:r>
@@ -11346,7 +11346,7 @@
           <a:p>
             <a:pPr algn="l">
               <a:lnSpc>
-                <a:spcPct val="140000"/>
+                <a:spcPts val="2379"/>
               </a:lnSpc>
             </a:pPr>
             <a:r>
@@ -11376,7 +11376,7 @@
             <a:avLst/>
           </a:prstGeom>
           <a:solidFill>
-            <a:srgbClr val="A9724A"/>
+            <a:srgbClr val="CC754E"/>
           </a:solidFill>
           <a:ln>
             <a:noFill/>
@@ -11429,7 +11429,7 @@
           <a:p>
             <a:pPr algn="l">
               <a:lnSpc>
-                <a:spcPct val="140000"/>
+                <a:spcPts val="2029"/>
               </a:lnSpc>
             </a:pPr>
             <a:r>
@@ -11566,7 +11566,7 @@
           <a:p>
             <a:pPr algn="l">
               <a:lnSpc>
-                <a:spcPct val="140000"/>
+                <a:spcPts val="1330"/>
               </a:lnSpc>
             </a:pPr>
             <a:r>
@@ -11590,7 +11590,7 @@
         <p:spPr>
           <a:xfrm>
             <a:off x="2011680" y="2331720"/>
-            <a:ext cx="14264640" cy="824484"/>
+            <a:ext cx="14264640" cy="935482"/>
           </a:xfrm>
           <a:prstGeom prst="rect">
             <a:avLst/>
@@ -11605,7 +11605,7 @@
           <a:p>
             <a:pPr algn="l">
               <a:lnSpc>
-                <a:spcPct val="114000"/>
+                <a:spcPts val="5206"/>
               </a:lnSpc>
             </a:pPr>
             <a:r>
@@ -11615,7 +11615,7 @@
                 </a:solidFill>
                 <a:latin typeface="Outfit 1 Light"/>
               </a:rPr>
-              <a:t>O mapa do Ikigai</a:t>
+              <a:t>O MAPA DO IKIGAI</a:t>
             </a:r>
           </a:p>
         </p:txBody>
@@ -11635,7 +11635,7 @@
             <a:avLst/>
           </a:prstGeom>
           <a:solidFill>
-            <a:srgbClr val="DFDDD7"/>
+            <a:srgbClr val="A5A49F"/>
           </a:solidFill>
           <a:ln>
             <a:noFill/>
@@ -11830,7 +11830,7 @@
             <a:avLst/>
           </a:prstGeom>
           <a:solidFill>
-            <a:srgbClr val="DFDDD7"/>
+            <a:srgbClr val="A5A49F"/>
           </a:solidFill>
           <a:ln>
             <a:noFill/>
@@ -11883,7 +11883,7 @@
           <a:p>
             <a:pPr algn="l">
               <a:lnSpc>
-                <a:spcPct val="140000"/>
+                <a:spcPts val="2379"/>
               </a:lnSpc>
             </a:pPr>
             <a:r>
@@ -11922,7 +11922,7 @@
           <a:p>
             <a:pPr algn="l">
               <a:lnSpc>
-                <a:spcPct val="140000"/>
+                <a:spcPts val="2029"/>
               </a:lnSpc>
             </a:pPr>
             <a:r>
@@ -11952,7 +11952,7 @@
             <a:avLst/>
           </a:prstGeom>
           <a:solidFill>
-            <a:srgbClr val="DFDDD7"/>
+            <a:srgbClr val="A5A49F"/>
           </a:solidFill>
           <a:ln>
             <a:noFill/>
@@ -12005,7 +12005,7 @@
           <a:p>
             <a:pPr algn="l">
               <a:lnSpc>
-                <a:spcPct val="140000"/>
+                <a:spcPts val="2379"/>
               </a:lnSpc>
             </a:pPr>
             <a:r>
@@ -12044,7 +12044,7 @@
           <a:p>
             <a:pPr algn="l">
               <a:lnSpc>
-                <a:spcPct val="140000"/>
+                <a:spcPts val="2029"/>
               </a:lnSpc>
             </a:pPr>
             <a:r>
@@ -12074,7 +12074,7 @@
             <a:avLst/>
           </a:prstGeom>
           <a:solidFill>
-            <a:srgbClr val="DFDDD7"/>
+            <a:srgbClr val="A5A49F"/>
           </a:solidFill>
           <a:ln>
             <a:noFill/>
@@ -12127,7 +12127,7 @@
           <a:p>
             <a:pPr algn="l">
               <a:lnSpc>
-                <a:spcPct val="140000"/>
+                <a:spcPts val="2379"/>
               </a:lnSpc>
             </a:pPr>
             <a:r>
@@ -12166,7 +12166,7 @@
           <a:p>
             <a:pPr algn="l">
               <a:lnSpc>
-                <a:spcPct val="140000"/>
+                <a:spcPts val="2029"/>
               </a:lnSpc>
             </a:pPr>
             <a:r>
@@ -12196,7 +12196,7 @@
             <a:avLst/>
           </a:prstGeom>
           <a:solidFill>
-            <a:srgbClr val="DFDDD7"/>
+            <a:srgbClr val="A5A49F"/>
           </a:solidFill>
           <a:ln>
             <a:noFill/>
@@ -12249,7 +12249,7 @@
           <a:p>
             <a:pPr algn="l">
               <a:lnSpc>
-                <a:spcPct val="140000"/>
+                <a:spcPts val="2379"/>
               </a:lnSpc>
             </a:pPr>
             <a:r>
@@ -12288,7 +12288,7 @@
           <a:p>
             <a:pPr algn="l">
               <a:lnSpc>
-                <a:spcPct val="140000"/>
+                <a:spcPts val="2029"/>
               </a:lnSpc>
             </a:pPr>
             <a:r>
@@ -12448,7 +12448,7 @@
           <a:p>
             <a:pPr algn="l">
               <a:lnSpc>
-                <a:spcPct val="140000"/>
+                <a:spcPts val="1330"/>
               </a:lnSpc>
             </a:pPr>
             <a:r>
@@ -12472,7 +12472,7 @@
         <p:spPr>
           <a:xfrm>
             <a:off x="2011680" y="2331720"/>
-            <a:ext cx="7772400" cy="824484"/>
+            <a:ext cx="7772400" cy="935482"/>
           </a:xfrm>
           <a:prstGeom prst="rect">
             <a:avLst/>
@@ -12487,7 +12487,7 @@
           <a:p>
             <a:pPr algn="l">
               <a:lnSpc>
-                <a:spcPct val="114000"/>
+                <a:spcPts val="5206"/>
               </a:lnSpc>
             </a:pPr>
             <a:r>
@@ -12497,7 +12497,7 @@
                 </a:solidFill>
                 <a:latin typeface="Outfit 1 Light"/>
               </a:rPr>
-              <a:t>O centro do Ikigai</a:t>
+              <a:t>O CENTRO DO IKIGAI</a:t>
             </a:r>
           </a:p>
         </p:txBody>
@@ -12517,7 +12517,7 @@
             <a:avLst/>
           </a:prstGeom>
           <a:solidFill>
-            <a:srgbClr val="DFDDD7"/>
+            <a:srgbClr val="A5A49F"/>
           </a:solidFill>
           <a:ln>
             <a:noFill/>
@@ -12673,7 +12673,7 @@
           <a:p>
             <a:pPr algn="l">
               <a:lnSpc>
-                <a:spcPct val="140000"/>
+                <a:spcPts val="2379"/>
               </a:lnSpc>
             </a:pPr>
             <a:r>
@@ -12703,7 +12703,7 @@
             <a:avLst/>
           </a:prstGeom>
           <a:solidFill>
-            <a:srgbClr val="DFDDD7"/>
+            <a:srgbClr val="A5A49F"/>
           </a:solidFill>
           <a:ln>
             <a:noFill/>
@@ -12756,7 +12756,7 @@
           <a:p>
             <a:pPr algn="l">
               <a:lnSpc>
-                <a:spcPct val="140000"/>
+                <a:spcPts val="2029"/>
               </a:lnSpc>
             </a:pPr>
             <a:r>
@@ -12795,7 +12795,7 @@
           <a:p>
             <a:pPr algn="l">
               <a:lnSpc>
-                <a:spcPct val="140000"/>
+                <a:spcPts val="2029"/>
               </a:lnSpc>
             </a:pPr>
             <a:r>
@@ -12834,7 +12834,7 @@
           <a:p>
             <a:pPr algn="l">
               <a:lnSpc>
-                <a:spcPct val="140000"/>
+                <a:spcPts val="2029"/>
               </a:lnSpc>
             </a:pPr>
             <a:r>
@@ -12873,7 +12873,7 @@
           <a:p>
             <a:pPr algn="l">
               <a:lnSpc>
-                <a:spcPct val="140000"/>
+                <a:spcPts val="2029"/>
               </a:lnSpc>
             </a:pPr>
             <a:r>
@@ -12912,7 +12912,7 @@
           <a:p>
             <a:pPr algn="l">
               <a:lnSpc>
-                <a:spcPct val="140000"/>
+                <a:spcPts val="1679"/>
               </a:lnSpc>
             </a:pPr>
             <a:r>
@@ -12951,13 +12951,13 @@
           <a:p>
             <a:pPr algn="l">
               <a:lnSpc>
-                <a:spcPct val="140000"/>
-              </a:lnSpc>
-            </a:pPr>
-            <a:r>
-              <a:rPr sz="2900" i="0" b="0">
-                <a:solidFill>
-                  <a:srgbClr val="A9724A"/>
+                <a:spcPts val="3919"/>
+              </a:lnSpc>
+            </a:pPr>
+            <a:r>
+              <a:rPr sz="2800" i="0" b="0">
+                <a:solidFill>
+                  <a:srgbClr val="CC754E"/>
                 </a:solidFill>
                 <a:latin typeface="Outfit 1 Light"/>
               </a:rPr>
@@ -12990,7 +12990,7 @@
           <a:p>
             <a:pPr algn="l">
               <a:lnSpc>
-                <a:spcPct val="140000"/>
+                <a:spcPts val="3079"/>
               </a:lnSpc>
             </a:pPr>
             <a:r>
@@ -13127,7 +13127,7 @@
           <a:p>
             <a:pPr algn="l">
               <a:lnSpc>
-                <a:spcPct val="140000"/>
+                <a:spcPts val="1330"/>
               </a:lnSpc>
             </a:pPr>
             <a:r>
@@ -13166,13 +13166,13 @@
           <a:p>
             <a:pPr algn="l">
               <a:lnSpc>
-                <a:spcPct val="140000"/>
+                <a:spcPts val="1679"/>
               </a:lnSpc>
             </a:pPr>
             <a:r>
               <a:rPr sz="1200" i="0" b="0" spc="240">
                 <a:solidFill>
-                  <a:srgbClr val="A9724A"/>
+                  <a:srgbClr val="CC754E"/>
                 </a:solidFill>
                 <a:latin typeface="Outfit 1 Semi-Bold"/>
               </a:rPr>
@@ -13205,7 +13205,7 @@
           <a:p>
             <a:pPr algn="l">
               <a:lnSpc>
-                <a:spcPct val="126000"/>
+                <a:spcPts val="5796"/>
               </a:lnSpc>
             </a:pPr>
             <a:r>
@@ -13221,7 +13221,7 @@
           <a:p>
             <a:pPr algn="l">
               <a:lnSpc>
-                <a:spcPct val="126000"/>
+                <a:spcPts val="5796"/>
               </a:lnSpc>
             </a:pPr>
             <a:r>
@@ -13237,7 +13237,7 @@
           <a:p>
             <a:pPr algn="l">
               <a:lnSpc>
-                <a:spcPct val="126000"/>
+                <a:spcPts val="5796"/>
               </a:lnSpc>
             </a:pPr>
             <a:r>
@@ -13267,7 +13267,7 @@
             <a:avLst/>
           </a:prstGeom>
           <a:solidFill>
-            <a:srgbClr val="A9724A"/>
+            <a:srgbClr val="CC754E"/>
           </a:solidFill>
           <a:ln>
             <a:noFill/>
@@ -13320,7 +13320,7 @@
           <a:p>
             <a:pPr algn="l">
               <a:lnSpc>
-                <a:spcPct val="140000"/>
+                <a:spcPts val="2029"/>
               </a:lnSpc>
             </a:pPr>
             <a:r>
@@ -13584,13 +13584,13 @@
           <a:p>
             <a:pPr algn="l">
               <a:lnSpc>
-                <a:spcPct val="140000"/>
+                <a:spcPts val="1330"/>
               </a:lnSpc>
             </a:pPr>
             <a:r>
               <a:rPr sz="950" i="0" b="0" spc="300">
                 <a:solidFill>
-                  <a:srgbClr val="A9724A"/>
+                  <a:srgbClr val="CC754E"/>
                 </a:solidFill>
                 <a:latin typeface="Outfit 1 Semi-Bold"/>
               </a:rPr>
@@ -13623,7 +13623,7 @@
           <a:p>
             <a:pPr algn="l">
               <a:lnSpc>
-                <a:spcPct val="100000"/>
+                <a:spcPts val="6200"/>
               </a:lnSpc>
             </a:pPr>
             <a:r>
@@ -13653,7 +13653,7 @@
             <a:avLst/>
           </a:prstGeom>
           <a:solidFill>
-            <a:srgbClr val="DFDDD7"/>
+            <a:srgbClr val="A5A49F"/>
           </a:solidFill>
           <a:ln>
             <a:noFill/>
@@ -13931,7 +13931,7 @@
           <a:p>
             <a:pPr algn="l">
               <a:lnSpc>
-                <a:spcPct val="140000"/>
+                <a:spcPts val="1330"/>
               </a:lnSpc>
             </a:pPr>
             <a:r>
@@ -13955,7 +13955,7 @@
         <p:spPr>
           <a:xfrm>
             <a:off x="2011680" y="2331720"/>
-            <a:ext cx="14264640" cy="824484"/>
+            <a:ext cx="14264640" cy="935482"/>
           </a:xfrm>
           <a:prstGeom prst="rect">
             <a:avLst/>
@@ -13970,7 +13970,7 @@
           <a:p>
             <a:pPr algn="l">
               <a:lnSpc>
-                <a:spcPct val="114000"/>
+                <a:spcPts val="5206"/>
               </a:lnSpc>
             </a:pPr>
             <a:r>
@@ -13980,7 +13980,7 @@
                 </a:solidFill>
                 <a:latin typeface="Outfit 1 Light"/>
               </a:rPr>
-              <a:t>Onde a história e o Ikigai se encontram</a:t>
+              <a:t>ONDE A HISTÓRIA E O IKIGAI SE ENCONTRAM</a:t>
             </a:r>
           </a:p>
         </p:txBody>
@@ -14000,7 +14000,7 @@
             <a:avLst/>
           </a:prstGeom>
           <a:solidFill>
-            <a:srgbClr val="DFDDD7"/>
+            <a:srgbClr val="A5A49F"/>
           </a:solidFill>
           <a:ln>
             <a:noFill/>
@@ -14180,7 +14180,7 @@
           <a:p>
             <a:pPr algn="l">
               <a:lnSpc>
-                <a:spcPct val="140000"/>
+                <a:spcPts val="2029"/>
               </a:lnSpc>
             </a:pPr>
             <a:r>
@@ -14210,7 +14210,7 @@
             <a:avLst/>
           </a:prstGeom>
           <a:solidFill>
-            <a:srgbClr val="DFDDD7"/>
+            <a:srgbClr val="A5A49F"/>
           </a:solidFill>
           <a:ln>
             <a:noFill/>
@@ -14263,7 +14263,7 @@
           <a:p>
             <a:pPr algn="l">
               <a:lnSpc>
-                <a:spcPct val="140000"/>
+                <a:spcPts val="3079"/>
               </a:lnSpc>
             </a:pPr>
             <a:r>
@@ -14302,7 +14302,7 @@
           <a:p>
             <a:pPr algn="l">
               <a:lnSpc>
-                <a:spcPct val="140000"/>
+                <a:spcPts val="2029"/>
               </a:lnSpc>
             </a:pPr>
             <a:r>
@@ -14332,7 +14332,7 @@
             <a:avLst/>
           </a:prstGeom>
           <a:solidFill>
-            <a:srgbClr val="DFDDD7"/>
+            <a:srgbClr val="A5A49F"/>
           </a:solidFill>
           <a:ln>
             <a:noFill/>
@@ -14385,7 +14385,7 @@
           <a:p>
             <a:pPr algn="l">
               <a:lnSpc>
-                <a:spcPct val="140000"/>
+                <a:spcPts val="3079"/>
               </a:lnSpc>
             </a:pPr>
             <a:r>
@@ -14424,7 +14424,7 @@
           <a:p>
             <a:pPr algn="l">
               <a:lnSpc>
-                <a:spcPct val="140000"/>
+                <a:spcPts val="2029"/>
               </a:lnSpc>
             </a:pPr>
             <a:r>
@@ -14454,7 +14454,7 @@
             <a:avLst/>
           </a:prstGeom>
           <a:solidFill>
-            <a:srgbClr val="DFDDD7"/>
+            <a:srgbClr val="A5A49F"/>
           </a:solidFill>
           <a:ln>
             <a:noFill/>
@@ -14507,7 +14507,7 @@
           <a:p>
             <a:pPr algn="l">
               <a:lnSpc>
-                <a:spcPct val="140000"/>
+                <a:spcPts val="3079"/>
               </a:lnSpc>
             </a:pPr>
             <a:r>
@@ -14546,7 +14546,7 @@
           <a:p>
             <a:pPr algn="l">
               <a:lnSpc>
-                <a:spcPct val="140000"/>
+                <a:spcPts val="2029"/>
               </a:lnSpc>
             </a:pPr>
             <a:r>
@@ -14576,7 +14576,7 @@
             <a:avLst/>
           </a:prstGeom>
           <a:solidFill>
-            <a:srgbClr val="DFDDD7"/>
+            <a:srgbClr val="A5A49F"/>
           </a:solidFill>
           <a:ln>
             <a:noFill/>
@@ -14629,7 +14629,7 @@
           <a:p>
             <a:pPr algn="l">
               <a:lnSpc>
-                <a:spcPct val="140000"/>
+                <a:spcPts val="3079"/>
               </a:lnSpc>
             </a:pPr>
             <a:r>
@@ -14668,7 +14668,7 @@
           <a:p>
             <a:pPr algn="l">
               <a:lnSpc>
-                <a:spcPct val="140000"/>
+                <a:spcPts val="2029"/>
               </a:lnSpc>
             </a:pPr>
             <a:r>
@@ -14722,7 +14722,7 @@
             <a:r>
               <a:rPr sz="2200" i="0" b="0">
                 <a:solidFill>
-                  <a:srgbClr val="A9724A"/>
+                  <a:srgbClr val="CC754E"/>
                 </a:solidFill>
                 <a:latin typeface="Outfit 1 Light"/>
               </a:rPr>
@@ -14740,7 +14740,7 @@
             <a:r>
               <a:rPr sz="2200" i="0" b="0">
                 <a:solidFill>
-                  <a:srgbClr val="A9724A"/>
+                  <a:srgbClr val="CC754E"/>
                 </a:solidFill>
                 <a:latin typeface="Outfit 1 Light"/>
               </a:rPr>
@@ -14880,7 +14880,7 @@
           <a:p>
             <a:pPr algn="l">
               <a:lnSpc>
-                <a:spcPct val="140000"/>
+                <a:spcPts val="1330"/>
               </a:lnSpc>
             </a:pPr>
             <a:r>
@@ -14919,7 +14919,7 @@
           <a:p>
             <a:pPr algn="l">
               <a:lnSpc>
-                <a:spcPct val="124000"/>
+                <a:spcPts val="5704"/>
               </a:lnSpc>
             </a:pPr>
             <a:r>
@@ -14935,7 +14935,7 @@
           <a:p>
             <a:pPr algn="l">
               <a:lnSpc>
-                <a:spcPct val="124000"/>
+                <a:spcPts val="5704"/>
               </a:lnSpc>
             </a:pPr>
             <a:r>
@@ -14965,7 +14965,7 @@
             <a:avLst/>
           </a:prstGeom>
           <a:solidFill>
-            <a:srgbClr val="DFDDD7"/>
+            <a:srgbClr val="A5A49F"/>
           </a:solidFill>
           <a:ln>
             <a:noFill/>
@@ -15018,7 +15018,7 @@
           <a:p>
             <a:pPr algn="l">
               <a:lnSpc>
-                <a:spcPct val="140000"/>
+                <a:spcPts val="1330"/>
               </a:lnSpc>
             </a:pPr>
             <a:r>
@@ -15057,7 +15057,7 @@
           <a:p>
             <a:pPr algn="l">
               <a:lnSpc>
-                <a:spcPct val="140000"/>
+                <a:spcPts val="2029"/>
               </a:lnSpc>
             </a:pPr>
             <a:r>
@@ -15096,7 +15096,7 @@
           <a:p>
             <a:pPr algn="l">
               <a:lnSpc>
-                <a:spcPct val="140000"/>
+                <a:spcPts val="1330"/>
               </a:lnSpc>
             </a:pPr>
             <a:r>
@@ -15135,7 +15135,7 @@
           <a:p>
             <a:pPr algn="l">
               <a:lnSpc>
-                <a:spcPct val="140000"/>
+                <a:spcPts val="2029"/>
               </a:lnSpc>
             </a:pPr>
             <a:r>
@@ -15174,7 +15174,7 @@
           <a:p>
             <a:pPr algn="l">
               <a:lnSpc>
-                <a:spcPct val="140000"/>
+                <a:spcPts val="1330"/>
               </a:lnSpc>
             </a:pPr>
             <a:r>
@@ -15213,7 +15213,7 @@
           <a:p>
             <a:pPr algn="l">
               <a:lnSpc>
-                <a:spcPct val="140000"/>
+                <a:spcPts val="2029"/>
               </a:lnSpc>
             </a:pPr>
             <a:r>
@@ -15243,7 +15243,7 @@
             <a:avLst/>
           </a:prstGeom>
           <a:solidFill>
-            <a:srgbClr val="DFDDD7"/>
+            <a:srgbClr val="A5A49F"/>
           </a:solidFill>
           <a:ln>
             <a:noFill/>
@@ -15296,7 +15296,7 @@
           <a:p>
             <a:pPr algn="l">
               <a:lnSpc>
-                <a:spcPct val="140000"/>
+                <a:spcPts val="2029"/>
               </a:lnSpc>
             </a:pPr>
             <a:r>
@@ -15560,13 +15560,13 @@
           <a:p>
             <a:pPr algn="l">
               <a:lnSpc>
-                <a:spcPct val="140000"/>
+                <a:spcPts val="1330"/>
               </a:lnSpc>
             </a:pPr>
             <a:r>
               <a:rPr sz="950" i="0" b="0" spc="300">
                 <a:solidFill>
-                  <a:srgbClr val="A9724A"/>
+                  <a:srgbClr val="CC754E"/>
                 </a:solidFill>
                 <a:latin typeface="Outfit 1 Semi-Bold"/>
               </a:rPr>
@@ -15599,7 +15599,7 @@
           <a:p>
             <a:pPr algn="l">
               <a:lnSpc>
-                <a:spcPct val="100000"/>
+                <a:spcPts val="6200"/>
               </a:lnSpc>
             </a:pPr>
             <a:r>
@@ -15629,7 +15629,7 @@
             <a:avLst/>
           </a:prstGeom>
           <a:solidFill>
-            <a:srgbClr val="DFDDD7"/>
+            <a:srgbClr val="A5A49F"/>
           </a:solidFill>
           <a:ln>
             <a:noFill/>
@@ -15930,7 +15930,7 @@
           <a:p>
             <a:pPr algn="l">
               <a:lnSpc>
-                <a:spcPct val="140000"/>
+                <a:spcPts val="1330"/>
               </a:lnSpc>
             </a:pPr>
             <a:r>
@@ -15954,7 +15954,7 @@
         <p:spPr>
           <a:xfrm>
             <a:off x="7040880" y="2331720"/>
-            <a:ext cx="10424160" cy="824484"/>
+            <a:ext cx="10424160" cy="935482"/>
           </a:xfrm>
           <a:prstGeom prst="rect">
             <a:avLst/>
@@ -15969,7 +15969,7 @@
           <a:p>
             <a:pPr algn="l">
               <a:lnSpc>
-                <a:spcPct val="114000"/>
+                <a:spcPts val="5206"/>
               </a:lnSpc>
             </a:pPr>
             <a:r>
@@ -15979,7 +15979,7 @@
                 </a:solidFill>
                 <a:latin typeface="Outfit 1 Light"/>
               </a:rPr>
-              <a:t>Como essa essência se manifesta nas marcas</a:t>
+              <a:t>COMO ESSA ESSÊNCIA SE MANIFESTA NAS MARCAS</a:t>
             </a:r>
           </a:p>
         </p:txBody>
@@ -15999,7 +15999,7 @@
             <a:avLst/>
           </a:prstGeom>
           <a:solidFill>
-            <a:srgbClr val="DFDDD7"/>
+            <a:srgbClr val="A5A49F"/>
           </a:solidFill>
           <a:ln>
             <a:noFill/>
@@ -16155,7 +16155,7 @@
           <a:p>
             <a:pPr algn="l">
               <a:lnSpc>
-                <a:spcPct val="140000"/>
+                <a:spcPts val="1679"/>
               </a:lnSpc>
             </a:pPr>
             <a:r>
@@ -16185,7 +16185,7 @@
             <a:avLst/>
           </a:prstGeom>
           <a:solidFill>
-            <a:srgbClr val="DFDDD7"/>
+            <a:srgbClr val="A5A49F"/>
           </a:solidFill>
           <a:ln>
             <a:noFill/>
@@ -16238,13 +16238,13 @@
           <a:p>
             <a:pPr algn="l">
               <a:lnSpc>
-                <a:spcPct val="140000"/>
+                <a:spcPts val="1330"/>
               </a:lnSpc>
             </a:pPr>
             <a:r>
               <a:rPr sz="950" i="0" b="0" spc="220">
                 <a:solidFill>
-                  <a:srgbClr val="A9724A"/>
+                  <a:srgbClr val="CC754E"/>
                 </a:solidFill>
                 <a:latin typeface="Outfit 1 Semi-Bold"/>
               </a:rPr>
@@ -16277,7 +16277,7 @@
           <a:p>
             <a:pPr algn="l">
               <a:lnSpc>
-                <a:spcPct val="140000"/>
+                <a:spcPts val="3079"/>
               </a:lnSpc>
             </a:pPr>
             <a:r>
@@ -16316,7 +16316,7 @@
           <a:p>
             <a:pPr algn="l">
               <a:lnSpc>
-                <a:spcPct val="140000"/>
+                <a:spcPts val="2029"/>
               </a:lnSpc>
             </a:pPr>
             <a:r>
@@ -16346,7 +16346,7 @@
             <a:avLst/>
           </a:prstGeom>
           <a:solidFill>
-            <a:srgbClr val="DFDDD7"/>
+            <a:srgbClr val="A5A49F"/>
           </a:solidFill>
           <a:ln>
             <a:noFill/>
@@ -16399,13 +16399,13 @@
           <a:p>
             <a:pPr algn="l">
               <a:lnSpc>
-                <a:spcPct val="140000"/>
+                <a:spcPts val="1330"/>
               </a:lnSpc>
             </a:pPr>
             <a:r>
               <a:rPr sz="950" i="0" b="0" spc="220">
                 <a:solidFill>
-                  <a:srgbClr val="A9724A"/>
+                  <a:srgbClr val="CC754E"/>
                 </a:solidFill>
                 <a:latin typeface="Outfit 1 Semi-Bold"/>
               </a:rPr>
@@ -16438,7 +16438,7 @@
           <a:p>
             <a:pPr algn="l">
               <a:lnSpc>
-                <a:spcPct val="140000"/>
+                <a:spcPts val="3079"/>
               </a:lnSpc>
             </a:pPr>
             <a:r>
@@ -16477,7 +16477,7 @@
           <a:p>
             <a:pPr algn="l">
               <a:lnSpc>
-                <a:spcPct val="140000"/>
+                <a:spcPts val="2029"/>
               </a:lnSpc>
             </a:pPr>
             <a:r>
@@ -16516,7 +16516,7 @@
           <a:p>
             <a:pPr algn="l">
               <a:lnSpc>
-                <a:spcPct val="140000"/>
+                <a:spcPts val="1679"/>
               </a:lnSpc>
             </a:pPr>
             <a:r>
@@ -16676,7 +16676,7 @@
           <a:p>
             <a:pPr algn="l">
               <a:lnSpc>
-                <a:spcPct val="140000"/>
+                <a:spcPts val="1330"/>
               </a:lnSpc>
             </a:pPr>
             <a:r>
@@ -16700,7 +16700,7 @@
         <p:spPr>
           <a:xfrm>
             <a:off x="2011680" y="2331720"/>
-            <a:ext cx="7772400" cy="824484"/>
+            <a:ext cx="7772400" cy="935482"/>
           </a:xfrm>
           <a:prstGeom prst="rect">
             <a:avLst/>
@@ -16715,7 +16715,7 @@
           <a:p>
             <a:pPr algn="l">
               <a:lnSpc>
-                <a:spcPct val="114000"/>
+                <a:spcPts val="5206"/>
               </a:lnSpc>
             </a:pPr>
             <a:r>
@@ -16725,7 +16725,7 @@
                 </a:solidFill>
                 <a:latin typeface="Outfit 1 Light"/>
               </a:rPr>
-              <a:t>Da essência à estratégia</a:t>
+              <a:t>DA ESSÊNCIA À ESTRATÉGIA</a:t>
             </a:r>
           </a:p>
         </p:txBody>
@@ -16745,7 +16745,7 @@
             <a:avLst/>
           </a:prstGeom>
           <a:solidFill>
-            <a:srgbClr val="DFDDD7"/>
+            <a:srgbClr val="A5A49F"/>
           </a:solidFill>
           <a:ln>
             <a:noFill/>
@@ -16901,7 +16901,7 @@
           <a:p>
             <a:pPr algn="l">
               <a:lnSpc>
-                <a:spcPct val="140000"/>
+                <a:spcPts val="2029"/>
               </a:lnSpc>
             </a:pPr>
             <a:r>
@@ -16931,7 +16931,7 @@
             <a:avLst/>
           </a:prstGeom>
           <a:solidFill>
-            <a:srgbClr val="DFDDD7"/>
+            <a:srgbClr val="A5A49F"/>
           </a:solidFill>
           <a:ln>
             <a:noFill/>
@@ -16984,7 +16984,7 @@
           <a:p>
             <a:pPr algn="l">
               <a:lnSpc>
-                <a:spcPct val="140000"/>
+                <a:spcPts val="1330"/>
               </a:lnSpc>
             </a:pPr>
             <a:r>
@@ -17023,7 +17023,7 @@
           <a:p>
             <a:pPr algn="l">
               <a:lnSpc>
-                <a:spcPct val="140000"/>
+                <a:spcPts val="2029"/>
               </a:lnSpc>
             </a:pPr>
             <a:r>
@@ -17062,7 +17062,7 @@
           <a:p>
             <a:pPr algn="l">
               <a:lnSpc>
-                <a:spcPct val="140000"/>
+                <a:spcPts val="2379"/>
               </a:lnSpc>
             </a:pPr>
             <a:r>
@@ -17199,7 +17199,7 @@
           <a:p>
             <a:pPr algn="l">
               <a:lnSpc>
-                <a:spcPct val="140000"/>
+                <a:spcPts val="1330"/>
               </a:lnSpc>
             </a:pPr>
             <a:r>
@@ -17223,7 +17223,7 @@
         <p:spPr>
           <a:xfrm>
             <a:off x="2011680" y="2240280"/>
-            <a:ext cx="14264640" cy="911352"/>
+            <a:ext cx="14264640" cy="1039876"/>
           </a:xfrm>
           <a:prstGeom prst="rect">
             <a:avLst/>
@@ -17238,7 +17238,7 @@
           <a:p>
             <a:pPr algn="l">
               <a:lnSpc>
-                <a:spcPct val="114000"/>
+                <a:spcPts val="6028"/>
               </a:lnSpc>
             </a:pPr>
             <a:r>
@@ -17248,7 +17248,7 @@
                 </a:solidFill>
                 <a:latin typeface="Outfit 1 Light"/>
               </a:rPr>
-              <a:t>Sumário</a:t>
+              <a:t>SUMÁRIO</a:t>
             </a:r>
           </a:p>
         </p:txBody>
@@ -17268,7 +17268,7 @@
             <a:avLst/>
           </a:prstGeom>
           <a:solidFill>
-            <a:srgbClr val="DFDDD7"/>
+            <a:srgbClr val="A5A49F"/>
           </a:solidFill>
           <a:ln>
             <a:noFill/>
@@ -17321,13 +17321,13 @@
           <a:p>
             <a:pPr algn="l">
               <a:lnSpc>
-                <a:spcPct val="140000"/>
+                <a:spcPts val="1679"/>
               </a:lnSpc>
             </a:pPr>
             <a:r>
               <a:rPr sz="1200" i="0" b="0" spc="240">
                 <a:solidFill>
-                  <a:srgbClr val="A9724A"/>
+                  <a:srgbClr val="CC754E"/>
                 </a:solidFill>
                 <a:latin typeface="Outfit 1 Semi-Bold"/>
               </a:rPr>
@@ -17360,7 +17360,7 @@
           <a:p>
             <a:pPr algn="l">
               <a:lnSpc>
-                <a:spcPct val="140000"/>
+                <a:spcPts val="3079"/>
               </a:lnSpc>
             </a:pPr>
             <a:r>
@@ -17399,7 +17399,7 @@
           <a:p>
             <a:pPr algn="l">
               <a:lnSpc>
-                <a:spcPct val="140000"/>
+                <a:spcPts val="2029"/>
               </a:lnSpc>
             </a:pPr>
             <a:r>
@@ -17429,7 +17429,7 @@
             <a:avLst/>
           </a:prstGeom>
           <a:solidFill>
-            <a:srgbClr val="DFDDD7"/>
+            <a:srgbClr val="A5A49F"/>
           </a:solidFill>
           <a:ln>
             <a:noFill/>
@@ -17482,13 +17482,13 @@
           <a:p>
             <a:pPr algn="l">
               <a:lnSpc>
-                <a:spcPct val="140000"/>
+                <a:spcPts val="1679"/>
               </a:lnSpc>
             </a:pPr>
             <a:r>
               <a:rPr sz="1200" i="0" b="0" spc="240">
                 <a:solidFill>
-                  <a:srgbClr val="A9724A"/>
+                  <a:srgbClr val="CC754E"/>
                 </a:solidFill>
                 <a:latin typeface="Outfit 1 Semi-Bold"/>
               </a:rPr>
@@ -17521,7 +17521,7 @@
           <a:p>
             <a:pPr algn="l">
               <a:lnSpc>
-                <a:spcPct val="140000"/>
+                <a:spcPts val="3079"/>
               </a:lnSpc>
             </a:pPr>
             <a:r>
@@ -17560,7 +17560,7 @@
           <a:p>
             <a:pPr algn="l">
               <a:lnSpc>
-                <a:spcPct val="140000"/>
+                <a:spcPts val="2029"/>
               </a:lnSpc>
             </a:pPr>
             <a:r>
@@ -17590,7 +17590,7 @@
             <a:avLst/>
           </a:prstGeom>
           <a:solidFill>
-            <a:srgbClr val="DFDDD7"/>
+            <a:srgbClr val="A5A49F"/>
           </a:solidFill>
           <a:ln>
             <a:noFill/>
@@ -17643,13 +17643,13 @@
           <a:p>
             <a:pPr algn="l">
               <a:lnSpc>
-                <a:spcPct val="140000"/>
+                <a:spcPts val="1679"/>
               </a:lnSpc>
             </a:pPr>
             <a:r>
               <a:rPr sz="1200" i="0" b="0" spc="240">
                 <a:solidFill>
-                  <a:srgbClr val="A9724A"/>
+                  <a:srgbClr val="CC754E"/>
                 </a:solidFill>
                 <a:latin typeface="Outfit 1 Semi-Bold"/>
               </a:rPr>
@@ -17682,7 +17682,7 @@
           <a:p>
             <a:pPr algn="l">
               <a:lnSpc>
-                <a:spcPct val="140000"/>
+                <a:spcPts val="3079"/>
               </a:lnSpc>
             </a:pPr>
             <a:r>
@@ -17721,7 +17721,7 @@
           <a:p>
             <a:pPr algn="l">
               <a:lnSpc>
-                <a:spcPct val="140000"/>
+                <a:spcPts val="2029"/>
               </a:lnSpc>
             </a:pPr>
             <a:r>
@@ -17751,7 +17751,7 @@
             <a:avLst/>
           </a:prstGeom>
           <a:solidFill>
-            <a:srgbClr val="DFDDD7"/>
+            <a:srgbClr val="A5A49F"/>
           </a:solidFill>
           <a:ln>
             <a:noFill/>
@@ -17804,13 +17804,13 @@
           <a:p>
             <a:pPr algn="l">
               <a:lnSpc>
-                <a:spcPct val="140000"/>
+                <a:spcPts val="1679"/>
               </a:lnSpc>
             </a:pPr>
             <a:r>
               <a:rPr sz="1200" i="0" b="0" spc="240">
                 <a:solidFill>
-                  <a:srgbClr val="A9724A"/>
+                  <a:srgbClr val="CC754E"/>
                 </a:solidFill>
                 <a:latin typeface="Outfit 1 Semi-Bold"/>
               </a:rPr>
@@ -17843,7 +17843,7 @@
           <a:p>
             <a:pPr algn="l">
               <a:lnSpc>
-                <a:spcPct val="140000"/>
+                <a:spcPts val="3079"/>
               </a:lnSpc>
             </a:pPr>
             <a:r>
@@ -17882,7 +17882,7 @@
           <a:p>
             <a:pPr algn="l">
               <a:lnSpc>
-                <a:spcPct val="140000"/>
+                <a:spcPts val="2029"/>
               </a:lnSpc>
             </a:pPr>
             <a:r>
@@ -17912,7 +17912,7 @@
             <a:avLst/>
           </a:prstGeom>
           <a:solidFill>
-            <a:srgbClr val="DFDDD7"/>
+            <a:srgbClr val="A5A49F"/>
           </a:solidFill>
           <a:ln>
             <a:noFill/>
@@ -17965,13 +17965,13 @@
           <a:p>
             <a:pPr algn="l">
               <a:lnSpc>
-                <a:spcPct val="140000"/>
+                <a:spcPts val="1679"/>
               </a:lnSpc>
             </a:pPr>
             <a:r>
               <a:rPr sz="1200" i="0" b="0" spc="240">
                 <a:solidFill>
-                  <a:srgbClr val="A9724A"/>
+                  <a:srgbClr val="CC754E"/>
                 </a:solidFill>
                 <a:latin typeface="Outfit 1 Semi-Bold"/>
               </a:rPr>
@@ -18004,7 +18004,7 @@
           <a:p>
             <a:pPr algn="l">
               <a:lnSpc>
-                <a:spcPct val="140000"/>
+                <a:spcPts val="3079"/>
               </a:lnSpc>
             </a:pPr>
             <a:r>
@@ -18043,7 +18043,7 @@
           <a:p>
             <a:pPr algn="l">
               <a:lnSpc>
-                <a:spcPct val="140000"/>
+                <a:spcPts val="2029"/>
               </a:lnSpc>
             </a:pPr>
             <a:r>
@@ -18073,7 +18073,7 @@
             <a:avLst/>
           </a:prstGeom>
           <a:solidFill>
-            <a:srgbClr val="DFDDD7"/>
+            <a:srgbClr val="A5A49F"/>
           </a:solidFill>
           <a:ln>
             <a:noFill/>
@@ -18126,13 +18126,13 @@
           <a:p>
             <a:pPr algn="l">
               <a:lnSpc>
-                <a:spcPct val="140000"/>
+                <a:spcPts val="1679"/>
               </a:lnSpc>
             </a:pPr>
             <a:r>
               <a:rPr sz="1200" i="0" b="0" spc="240">
                 <a:solidFill>
-                  <a:srgbClr val="A9724A"/>
+                  <a:srgbClr val="CC754E"/>
                 </a:solidFill>
                 <a:latin typeface="Outfit 1 Semi-Bold"/>
               </a:rPr>
@@ -18165,7 +18165,7 @@
           <a:p>
             <a:pPr algn="l">
               <a:lnSpc>
-                <a:spcPct val="140000"/>
+                <a:spcPts val="3079"/>
               </a:lnSpc>
             </a:pPr>
             <a:r>
@@ -18204,7 +18204,7 @@
           <a:p>
             <a:pPr algn="l">
               <a:lnSpc>
-                <a:spcPct val="140000"/>
+                <a:spcPts val="2029"/>
               </a:lnSpc>
             </a:pPr>
             <a:r>
@@ -18234,7 +18234,7 @@
             <a:avLst/>
           </a:prstGeom>
           <a:solidFill>
-            <a:srgbClr val="DFDDD7"/>
+            <a:srgbClr val="A5A49F"/>
           </a:solidFill>
           <a:ln>
             <a:noFill/>
@@ -18503,7 +18503,7 @@
             <a:avLst/>
           </a:prstGeom>
           <a:solidFill>
-            <a:srgbClr val="A9724A"/>
+            <a:srgbClr val="CC754E"/>
           </a:solidFill>
           <a:ln>
             <a:noFill/>
@@ -18556,7 +18556,7 @@
           <a:p>
             <a:pPr algn="l">
               <a:lnSpc>
-                <a:spcPct val="130000"/>
+                <a:spcPts val="5980"/>
               </a:lnSpc>
             </a:pPr>
             <a:r>
@@ -18572,7 +18572,7 @@
           <a:p>
             <a:pPr algn="l">
               <a:lnSpc>
-                <a:spcPct val="130000"/>
+                <a:spcPts val="5980"/>
               </a:lnSpc>
             </a:pPr>
             <a:r>
@@ -18774,8 +18774,8 @@
         </p:nvSpPr>
         <p:spPr>
           <a:xfrm>
-            <a:off x="2011680" y="3703320"/>
-            <a:ext cx="13716000" cy="932586"/>
+            <a:off x="2011680" y="2651760"/>
+            <a:ext cx="13716000" cy="942848"/>
           </a:xfrm>
           <a:prstGeom prst="rect">
             <a:avLst/>
@@ -18790,11 +18790,11 @@
           <a:p>
             <a:pPr algn="l">
               <a:lnSpc>
-                <a:spcPct val="110000"/>
-              </a:lnSpc>
-            </a:pPr>
-            <a:r>
-              <a:rPr sz="4712" i="0" b="0">
+                <a:spcPts val="5264"/>
+              </a:lnSpc>
+            </a:pPr>
+            <a:r>
+              <a:rPr sz="4700" i="0" b="0">
                 <a:solidFill>
                   <a:srgbClr val="1C1C1A"/>
                 </a:solidFill>
@@ -18821,8 +18821,8 @@
         </p:blipFill>
         <p:spPr>
           <a:xfrm>
-            <a:off x="2011680" y="5440680"/>
-            <a:ext cx="3246120" cy="771466"/>
+            <a:off x="1028700" y="5257800"/>
+            <a:ext cx="4421124" cy="1050715"/>
           </a:xfrm>
           <a:prstGeom prst="rect">
             <a:avLst/>
@@ -18889,7 +18889,7 @@
         </p:blipFill>
         <p:spPr>
           <a:xfrm>
-            <a:off x="6355080" y="5394960"/>
+            <a:off x="6073445" y="5312664"/>
             <a:ext cx="3291840" cy="942889"/>
           </a:xfrm>
           <a:prstGeom prst="rect">
@@ -19042,7 +19042,7 @@
           <a:p>
             <a:pPr algn="l">
               <a:lnSpc>
-                <a:spcPct val="140000"/>
+                <a:spcPts val="1330"/>
               </a:lnSpc>
             </a:pPr>
             <a:r>
@@ -19066,7 +19066,7 @@
         <p:spPr>
           <a:xfrm>
             <a:off x="8503920" y="2331720"/>
-            <a:ext cx="8961120" cy="824484"/>
+            <a:ext cx="8961120" cy="935482"/>
           </a:xfrm>
           <a:prstGeom prst="rect">
             <a:avLst/>
@@ -19081,7 +19081,7 @@
           <a:p>
             <a:pPr algn="l">
               <a:lnSpc>
-                <a:spcPct val="114000"/>
+                <a:spcPts val="5206"/>
               </a:lnSpc>
             </a:pPr>
             <a:r>
@@ -19091,7 +19091,7 @@
                 </a:solidFill>
                 <a:latin typeface="Outfit 1 Light"/>
               </a:rPr>
-              <a:t>Por que a essência vem primeiro?</a:t>
+              <a:t>POR QUE A ESSÊNCIA VEM PRIMEIRO?</a:t>
             </a:r>
           </a:p>
         </p:txBody>
@@ -19111,7 +19111,7 @@
             <a:avLst/>
           </a:prstGeom>
           <a:solidFill>
-            <a:srgbClr val="DFDDD7"/>
+            <a:srgbClr val="A5A49F"/>
           </a:solidFill>
           <a:ln>
             <a:noFill/>
@@ -19267,7 +19267,7 @@
           <a:p>
             <a:pPr algn="l">
               <a:lnSpc>
-                <a:spcPct val="140000"/>
+                <a:spcPts val="2379"/>
               </a:lnSpc>
             </a:pPr>
             <a:r>
@@ -19306,7 +19306,7 @@
           <a:p>
             <a:pPr algn="l">
               <a:lnSpc>
-                <a:spcPct val="140000"/>
+                <a:spcPts val="2029"/>
               </a:lnSpc>
             </a:pPr>
             <a:r>
@@ -19336,7 +19336,7 @@
             <a:avLst/>
           </a:prstGeom>
           <a:solidFill>
-            <a:srgbClr val="DFDDD7"/>
+            <a:srgbClr val="A5A49F"/>
           </a:solidFill>
           <a:ln>
             <a:noFill/>
@@ -19389,7 +19389,7 @@
           <a:p>
             <a:pPr algn="l">
               <a:lnSpc>
-                <a:spcPct val="140000"/>
+                <a:spcPts val="1330"/>
               </a:lnSpc>
             </a:pPr>
             <a:r>
@@ -19428,7 +19428,7 @@
           <a:p>
             <a:pPr algn="l">
               <a:lnSpc>
-                <a:spcPct val="140000"/>
+                <a:spcPts val="2029"/>
               </a:lnSpc>
             </a:pPr>
             <a:r>
@@ -19467,7 +19467,7 @@
           <a:p>
             <a:pPr algn="l">
               <a:lnSpc>
-                <a:spcPct val="140000"/>
+                <a:spcPts val="1330"/>
               </a:lnSpc>
             </a:pPr>
             <a:r>
@@ -19506,7 +19506,7 @@
           <a:p>
             <a:pPr algn="l">
               <a:lnSpc>
-                <a:spcPct val="140000"/>
+                <a:spcPts val="2029"/>
               </a:lnSpc>
             </a:pPr>
             <a:r>
@@ -19666,7 +19666,7 @@
           <a:p>
             <a:pPr algn="l">
               <a:lnSpc>
-                <a:spcPct val="140000"/>
+                <a:spcPts val="1330"/>
               </a:lnSpc>
             </a:pPr>
             <a:r>
@@ -19690,7 +19690,7 @@
         <p:spPr>
           <a:xfrm>
             <a:off x="2011680" y="2331720"/>
-            <a:ext cx="7772400" cy="824484"/>
+            <a:ext cx="7772400" cy="935482"/>
           </a:xfrm>
           <a:prstGeom prst="rect">
             <a:avLst/>
@@ -19705,7 +19705,7 @@
           <a:p>
             <a:pPr algn="l">
               <a:lnSpc>
-                <a:spcPct val="114000"/>
+                <a:spcPts val="5206"/>
               </a:lnSpc>
             </a:pPr>
             <a:r>
@@ -19735,7 +19735,7 @@
             <a:avLst/>
           </a:prstGeom>
           <a:solidFill>
-            <a:srgbClr val="DFDDD7"/>
+            <a:srgbClr val="A5A49F"/>
           </a:solidFill>
           <a:ln>
             <a:noFill/>
@@ -19891,7 +19891,7 @@
           <a:p>
             <a:pPr algn="l">
               <a:lnSpc>
-                <a:spcPct val="126000"/>
+                <a:spcPts val="4520"/>
               </a:lnSpc>
             </a:pPr>
             <a:r>
@@ -19907,7 +19907,7 @@
           <a:p>
             <a:pPr algn="l">
               <a:lnSpc>
-                <a:spcPct val="126000"/>
+                <a:spcPts val="4520"/>
               </a:lnSpc>
             </a:pPr>
             <a:r>
@@ -19923,7 +19923,7 @@
           <a:p>
             <a:pPr algn="l">
               <a:lnSpc>
-                <a:spcPct val="126000"/>
+                <a:spcPts val="4520"/>
               </a:lnSpc>
             </a:pPr>
             <a:r>
@@ -20060,7 +20060,7 @@
           <a:p>
             <a:pPr algn="l">
               <a:lnSpc>
-                <a:spcPct val="140000"/>
+                <a:spcPts val="1330"/>
               </a:lnSpc>
             </a:pPr>
             <a:r>
@@ -20084,7 +20084,7 @@
         <p:spPr>
           <a:xfrm>
             <a:off x="2011680" y="2331720"/>
-            <a:ext cx="14264640" cy="824484"/>
+            <a:ext cx="14264640" cy="935482"/>
           </a:xfrm>
           <a:prstGeom prst="rect">
             <a:avLst/>
@@ -20099,7 +20099,7 @@
           <a:p>
             <a:pPr algn="l">
               <a:lnSpc>
-                <a:spcPct val="114000"/>
+                <a:spcPts val="5206"/>
               </a:lnSpc>
             </a:pPr>
             <a:r>
@@ -20109,7 +20109,7 @@
                 </a:solidFill>
                 <a:latin typeface="Outfit 1 Light"/>
               </a:rPr>
-              <a:t>Como se chega à revelação</a:t>
+              <a:t>COMO SE CHEGA À REVELAÇÃO</a:t>
             </a:r>
           </a:p>
         </p:txBody>
@@ -20129,7 +20129,7 @@
             <a:avLst/>
           </a:prstGeom>
           <a:solidFill>
-            <a:srgbClr val="DFDDD7"/>
+            <a:srgbClr val="A5A49F"/>
           </a:solidFill>
           <a:ln>
             <a:noFill/>
@@ -20309,7 +20309,7 @@
           <a:p>
             <a:pPr algn="l">
               <a:lnSpc>
-                <a:spcPct val="140000"/>
+                <a:spcPts val="2029"/>
               </a:lnSpc>
             </a:pPr>
             <a:r>
@@ -20339,7 +20339,7 @@
             <a:avLst/>
           </a:prstGeom>
           <a:solidFill>
-            <a:srgbClr val="DFDDD7"/>
+            <a:srgbClr val="A5A49F"/>
           </a:solidFill>
           <a:ln>
             <a:noFill/>
@@ -20392,7 +20392,7 @@
           <a:p>
             <a:pPr algn="l">
               <a:lnSpc>
-                <a:spcPct val="140000"/>
+                <a:spcPts val="3079"/>
               </a:lnSpc>
             </a:pPr>
             <a:r>
@@ -20431,7 +20431,7 @@
           <a:p>
             <a:pPr algn="l">
               <a:lnSpc>
-                <a:spcPct val="140000"/>
+                <a:spcPts val="2029"/>
               </a:lnSpc>
             </a:pPr>
             <a:r>
@@ -20461,7 +20461,7 @@
             <a:avLst/>
           </a:prstGeom>
           <a:solidFill>
-            <a:srgbClr val="DFDDD7"/>
+            <a:srgbClr val="A5A49F"/>
           </a:solidFill>
           <a:ln>
             <a:noFill/>
@@ -20514,7 +20514,7 @@
           <a:p>
             <a:pPr algn="l">
               <a:lnSpc>
-                <a:spcPct val="140000"/>
+                <a:spcPts val="3079"/>
               </a:lnSpc>
             </a:pPr>
             <a:r>
@@ -20553,7 +20553,7 @@
           <a:p>
             <a:pPr algn="l">
               <a:lnSpc>
-                <a:spcPct val="140000"/>
+                <a:spcPts val="2029"/>
               </a:lnSpc>
             </a:pPr>
             <a:r>
@@ -20583,7 +20583,7 @@
             <a:avLst/>
           </a:prstGeom>
           <a:solidFill>
-            <a:srgbClr val="DFDDD7"/>
+            <a:srgbClr val="A5A49F"/>
           </a:solidFill>
           <a:ln>
             <a:noFill/>
@@ -20636,7 +20636,7 @@
           <a:p>
             <a:pPr algn="l">
               <a:lnSpc>
-                <a:spcPct val="140000"/>
+                <a:spcPts val="3079"/>
               </a:lnSpc>
             </a:pPr>
             <a:r>
@@ -20675,7 +20675,7 @@
           <a:p>
             <a:pPr algn="l">
               <a:lnSpc>
-                <a:spcPct val="140000"/>
+                <a:spcPts val="2029"/>
               </a:lnSpc>
             </a:pPr>
             <a:r>
@@ -20705,7 +20705,7 @@
             <a:avLst/>
           </a:prstGeom>
           <a:solidFill>
-            <a:srgbClr val="DFDDD7"/>
+            <a:srgbClr val="A5A49F"/>
           </a:solidFill>
           <a:ln>
             <a:noFill/>
@@ -20758,7 +20758,7 @@
           <a:p>
             <a:pPr algn="l">
               <a:lnSpc>
-                <a:spcPct val="140000"/>
+                <a:spcPts val="3079"/>
               </a:lnSpc>
             </a:pPr>
             <a:r>
@@ -20797,7 +20797,7 @@
           <a:p>
             <a:pPr algn="l">
               <a:lnSpc>
-                <a:spcPct val="140000"/>
+                <a:spcPts val="2029"/>
               </a:lnSpc>
             </a:pPr>
             <a:r>
@@ -20851,7 +20851,7 @@
             <a:r>
               <a:rPr sz="2200" i="0" b="0">
                 <a:solidFill>
-                  <a:srgbClr val="A9724A"/>
+                  <a:srgbClr val="CC754E"/>
                 </a:solidFill>
                 <a:latin typeface="Outfit 1 Light"/>
               </a:rPr>
@@ -20869,7 +20869,7 @@
             <a:r>
               <a:rPr sz="2200" i="0" b="0">
                 <a:solidFill>
-                  <a:srgbClr val="A9724A"/>
+                  <a:srgbClr val="CC754E"/>
                 </a:solidFill>
                 <a:latin typeface="Outfit 1 Light"/>
               </a:rPr>
@@ -20887,7 +20887,7 @@
             <a:r>
               <a:rPr sz="2200" i="0" b="0">
                 <a:solidFill>
-                  <a:srgbClr val="A9724A"/>
+                  <a:srgbClr val="CC754E"/>
                 </a:solidFill>
                 <a:latin typeface="Outfit 1 Light"/>
               </a:rPr>
@@ -20905,7 +20905,7 @@
             <a:r>
               <a:rPr sz="2200" i="0" b="0">
                 <a:solidFill>
-                  <a:srgbClr val="A9724A"/>
+                  <a:srgbClr val="CC754E"/>
                 </a:solidFill>
                 <a:latin typeface="Outfit 1 Light"/>
               </a:rPr>
@@ -20947,7 +20947,7 @@
           <a:p>
             <a:pPr algn="ctr">
               <a:lnSpc>
-                <a:spcPct val="140000"/>
+                <a:spcPts val="1679"/>
               </a:lnSpc>
             </a:pPr>
             <a:r>
@@ -21084,13 +21084,13 @@
           <a:p>
             <a:pPr algn="l">
               <a:lnSpc>
-                <a:spcPct val="140000"/>
+                <a:spcPts val="1330"/>
               </a:lnSpc>
             </a:pPr>
             <a:r>
               <a:rPr sz="950" i="0" b="0" spc="300">
                 <a:solidFill>
-                  <a:srgbClr val="A9724A"/>
+                  <a:srgbClr val="CC754E"/>
                 </a:solidFill>
                 <a:latin typeface="Outfit 1 Semi-Bold"/>
               </a:rPr>
@@ -21123,7 +21123,7 @@
           <a:p>
             <a:pPr algn="l">
               <a:lnSpc>
-                <a:spcPct val="100000"/>
+                <a:spcPts val="6200"/>
               </a:lnSpc>
             </a:pPr>
             <a:r>
@@ -21153,7 +21153,7 @@
             <a:avLst/>
           </a:prstGeom>
           <a:solidFill>
-            <a:srgbClr val="DFDDD7"/>
+            <a:srgbClr val="A5A49F"/>
           </a:solidFill>
           <a:ln>
             <a:noFill/>
@@ -21454,7 +21454,7 @@
           <a:p>
             <a:pPr algn="l">
               <a:lnSpc>
-                <a:spcPct val="140000"/>
+                <a:spcPts val="1330"/>
               </a:lnSpc>
             </a:pPr>
             <a:r>
@@ -21478,7 +21478,7 @@
         <p:spPr>
           <a:xfrm>
             <a:off x="8503920" y="2331720"/>
-            <a:ext cx="8961120" cy="824484"/>
+            <a:ext cx="8961120" cy="935482"/>
           </a:xfrm>
           <a:prstGeom prst="rect">
             <a:avLst/>
@@ -21493,7 +21493,7 @@
           <a:p>
             <a:pPr algn="l">
               <a:lnSpc>
-                <a:spcPct val="114000"/>
+                <a:spcPts val="5206"/>
               </a:lnSpc>
             </a:pPr>
             <a:r>
@@ -21503,7 +21503,7 @@
                 </a:solidFill>
                 <a:latin typeface="Outfit 1 Light"/>
               </a:rPr>
-              <a:t>Onde essa história começa</a:t>
+              <a:t>ONDE ESSA HISTÓRIA COMEÇA</a:t>
             </a:r>
           </a:p>
         </p:txBody>
@@ -21523,7 +21523,7 @@
             <a:avLst/>
           </a:prstGeom>
           <a:solidFill>
-            <a:srgbClr val="DFDDD7"/>
+            <a:srgbClr val="A5A49F"/>
           </a:solidFill>
           <a:ln>
             <a:noFill/>
@@ -21679,7 +21679,7 @@
           <a:p>
             <a:pPr algn="l">
               <a:lnSpc>
-                <a:spcPct val="140000"/>
+                <a:spcPts val="2379"/>
               </a:lnSpc>
             </a:pPr>
             <a:r>
@@ -21718,7 +21718,7 @@
           <a:p>
             <a:pPr algn="l">
               <a:lnSpc>
-                <a:spcPct val="140000"/>
+                <a:spcPts val="2029"/>
               </a:lnSpc>
             </a:pPr>
             <a:r>
@@ -21757,7 +21757,7 @@
           <a:p>
             <a:pPr algn="l">
               <a:lnSpc>
-                <a:spcPct val="140000"/>
+                <a:spcPts val="3079"/>
               </a:lnSpc>
             </a:pPr>
             <a:r>
@@ -21787,7 +21787,7 @@
             <a:avLst/>
           </a:prstGeom>
           <a:solidFill>
-            <a:srgbClr val="A9724A"/>
+            <a:srgbClr val="CC754E"/>
           </a:solidFill>
           <a:ln>
             <a:noFill/>
@@ -21840,7 +21840,7 @@
           <a:p>
             <a:pPr algn="l">
               <a:lnSpc>
-                <a:spcPct val="140000"/>
+                <a:spcPts val="1330"/>
               </a:lnSpc>
             </a:pPr>
             <a:r>
@@ -22000,7 +22000,7 @@
           <a:p>
             <a:pPr algn="l">
               <a:lnSpc>
-                <a:spcPct val="140000"/>
+                <a:spcPts val="1330"/>
               </a:lnSpc>
             </a:pPr>
             <a:r>
@@ -22024,7 +22024,7 @@
         <p:spPr>
           <a:xfrm>
             <a:off x="2011680" y="2331720"/>
-            <a:ext cx="7772400" cy="824484"/>
+            <a:ext cx="7772400" cy="935482"/>
           </a:xfrm>
           <a:prstGeom prst="rect">
             <a:avLst/>
@@ -22039,7 +22039,7 @@
           <a:p>
             <a:pPr algn="l">
               <a:lnSpc>
-                <a:spcPct val="114000"/>
+                <a:spcPts val="5206"/>
               </a:lnSpc>
             </a:pPr>
             <a:r>
@@ -22049,7 +22049,7 @@
                 </a:solidFill>
                 <a:latin typeface="Outfit 1 Light"/>
               </a:rPr>
-              <a:t>Os primeiros sinais</a:t>
+              <a:t>OS PRIMEIROS SINAIS</a:t>
             </a:r>
           </a:p>
         </p:txBody>
@@ -22069,7 +22069,7 @@
             <a:avLst/>
           </a:prstGeom>
           <a:solidFill>
-            <a:srgbClr val="DFDDD7"/>
+            <a:srgbClr val="A5A49F"/>
           </a:solidFill>
           <a:ln>
             <a:noFill/>
@@ -22225,7 +22225,7 @@
           <a:p>
             <a:pPr algn="l">
               <a:lnSpc>
-                <a:spcPct val="140000"/>
+                <a:spcPts val="2379"/>
               </a:lnSpc>
             </a:pPr>
             <a:r>
@@ -22264,7 +22264,7 @@
           <a:p>
             <a:pPr algn="l">
               <a:lnSpc>
-                <a:spcPct val="140000"/>
+                <a:spcPts val="2029"/>
               </a:lnSpc>
             </a:pPr>
             <a:r>
@@ -22303,7 +22303,7 @@
           <a:p>
             <a:pPr algn="l">
               <a:lnSpc>
-                <a:spcPct val="140000"/>
+                <a:spcPts val="1679"/>
               </a:lnSpc>
             </a:pPr>
             <a:r>
@@ -22342,13 +22342,13 @@
           <a:p>
             <a:pPr algn="l">
               <a:lnSpc>
-                <a:spcPct val="140000"/>
-              </a:lnSpc>
-            </a:pPr>
-            <a:r>
-              <a:rPr sz="2900" i="0" b="0">
-                <a:solidFill>
-                  <a:srgbClr val="A9724A"/>
+                <a:spcPts val="3919"/>
+              </a:lnSpc>
+            </a:pPr>
+            <a:r>
+              <a:rPr sz="2800" i="0" b="0">
+                <a:solidFill>
+                  <a:srgbClr val="CC754E"/>
                 </a:solidFill>
                 <a:latin typeface="Outfit 1 Light"/>
               </a:rPr>
@@ -22381,7 +22381,7 @@
           <a:p>
             <a:pPr algn="l">
               <a:lnSpc>
-                <a:spcPct val="140000"/>
+                <a:spcPts val="3079"/>
               </a:lnSpc>
             </a:pPr>
             <a:r>
@@ -22420,7 +22420,7 @@
           <a:p>
             <a:pPr algn="l">
               <a:lnSpc>
-                <a:spcPct val="140000"/>
+                <a:spcPts val="1679"/>
               </a:lnSpc>
             </a:pPr>
             <a:r>
@@ -22459,13 +22459,13 @@
           <a:p>
             <a:pPr algn="l">
               <a:lnSpc>
-                <a:spcPct val="140000"/>
-              </a:lnSpc>
-            </a:pPr>
-            <a:r>
-              <a:rPr sz="2900" i="0" b="0">
-                <a:solidFill>
-                  <a:srgbClr val="A9724A"/>
+                <a:spcPts val="3919"/>
+              </a:lnSpc>
+            </a:pPr>
+            <a:r>
+              <a:rPr sz="2800" i="0" b="0">
+                <a:solidFill>
+                  <a:srgbClr val="CC754E"/>
                 </a:solidFill>
                 <a:latin typeface="Outfit 1 Light"/>
               </a:rPr>
@@ -22498,7 +22498,7 @@
           <a:p>
             <a:pPr algn="l">
               <a:lnSpc>
-                <a:spcPct val="140000"/>
+                <a:spcPts val="3079"/>
               </a:lnSpc>
             </a:pPr>
             <a:r>
